--- a/slides/pptx/Nike Short Thesis.pptx
+++ b/slides/pptx/Nike Short Thesis.pptx
@@ -18,9 +18,11 @@
     <p:sldId id="266" r:id="rId12"/>
     <p:sldId id="267" r:id="rId13"/>
     <p:sldId id="268" r:id="rId14"/>
+    <p:sldId id="269" r:id="rId15"/>
+    <p:sldId id="270" r:id="rId16"/>
   </p:sldIdLst>
   <p:notesMasterIdLst>
-    <p:notesMasterId r:id="rId15"/>
+    <p:notesMasterId r:id="rId17"/>
   </p:notesMasterIdLst>
   <p:sldSz cx="12192000" cy="6858000"/>
   <p:notesSz cx="6858000" cy="12192000"/>
@@ -119,14 +121,14 @@
   <p:extLst>
     <p:ext uri="{521415D9-36F7-43E2-AB2F-B90AF26B5E84}">
       <p14:sectionLst xmlns:p14="http://schemas.microsoft.com/office/powerpoint/2010/main">
-        <p14:section name="Recommendation" id="{62558035-78f9-6946-b20d-2e2d6497bb22}">
+        <p14:section name="Recommendation" id="{8cabbabb-b518-677e-2d7b-0ac9c59cb13d}">
           <p14:sldIdLst>
             <p14:sldId id="256"/>
             <p14:sldId id="257"/>
             <p14:sldId id="258"/>
           </p14:sldIdLst>
         </p14:section>
-        <p14:section name="Fundamentals and valuation" id="{25458b41-2c2e-83a1-3add-782e326dbcfa}">
+        <p14:section name="Fundamentals and valuation" id="{7cba7521-067f-b6ea-2641-e8bf20e766f7}">
           <p14:sldIdLst>
             <p14:sldId id="259"/>
             <p14:sldId id="260"/>
@@ -134,22 +136,24 @@
             <p14:sldId id="262"/>
           </p14:sldIdLst>
         </p14:section>
-        <p14:section name="Evidence" id="{d85b4c9f-a17b-60af-26a1-e21af8d75596}">
+        <p14:section name="Evidence" id="{3126091c-dd3b-8fb1-41fc-94672efbee26}">
           <p14:sldIdLst>
             <p14:sldId id="263"/>
             <p14:sldId id="264"/>
-          </p14:sldIdLst>
-        </p14:section>
-        <p14:section name="Risks and catalysts" id="{ebce699d-364b-3b8c-fc85-53c37b279e01}">
-          <p14:sldIdLst>
             <p14:sldId id="265"/>
             <p14:sldId id="266"/>
           </p14:sldIdLst>
         </p14:section>
-        <p14:section name="Appendix" id="{d9b20c58-ac63-7430-07b5-5611031458ec}">
+        <p14:section name="Risks and catalysts" id="{9cf2ef53-8be3-abe7-13f9-fdb57af104cc}">
           <p14:sldIdLst>
             <p14:sldId id="267"/>
             <p14:sldId id="268"/>
+          </p14:sldIdLst>
+        </p14:section>
+        <p14:section name="Appendix" id="{cae77758-b188-c4ee-cf54-832458652b1a}">
+          <p14:sldIdLst>
+            <p14:sldId id="269"/>
+            <p14:sldId id="270"/>
           </p14:sldIdLst>
         </p14:section>
       </p14:sectionLst>
@@ -2191,6 +2195,851 @@
 </c:chartSpace>
 </file>
 
+<file path=ppt/charts/chart7.xml><?xml version="1.0" encoding="utf-8"?>
+<c:chartSpace xmlns:c="http://schemas.openxmlformats.org/drawingml/2006/chart" xmlns:a="http://schemas.openxmlformats.org/drawingml/2006/main" xmlns:r="http://schemas.openxmlformats.org/officeDocument/2006/relationships">
+  <c:date1904 val="0"/>
+  <c:roundedCorners val="1"/>
+  <c:chart>
+    <c:title>
+      <c:tx>
+        <c:rich>
+          <a:bodyPr/>
+          <a:lstStyle/>
+          <a:p>
+            <a:pPr>
+              <a:defRPr sz="1300" b="0" i="0" u="none" strike="noStrike">
+                <a:solidFill>
+                  <a:srgbClr val="0B2A4A"/>
+                </a:solidFill>
+                <a:latin typeface="+mn-lt"/>
+              </a:defRPr>
+            </a:pPr>
+            <a:r>
+              <a:rPr sz="1300" b="0" i="0" u="none" strike="noStrike">
+                <a:solidFill>
+                  <a:srgbClr val="0B2A4A"/>
+                </a:solidFill>
+                <a:latin typeface="+mn-lt"/>
+              </a:rPr>
+              <a:t>NIKE Brand footwear: units vs revenue per pair, indexed (FY19 = 100)</a:t>
+            </a:r>
+          </a:p>
+        </c:rich>
+      </c:tx>
+      <c:layout/>
+      <c:overlay val="0"/>
+    </c:title>
+    <c:autoTitleDeleted val="0"/>
+    <c:plotArea>
+      <c:layout/>
+      <c:lineChart>
+        <c:varyColors val="0"/>
+        <c:ser>
+          <c:idx val="0"/>
+          <c:order val="0"/>
+          <c:tx>
+            <c:strRef>
+              <c:f>Sheet1!$B$1</c:f>
+              <c:strCache>
+                <c:ptCount val="1"/>
+                <c:pt idx="0">
+                  <c:v>Footwear units (FY19 = 100)</c:v>
+                </c:pt>
+              </c:strCache>
+            </c:strRef>
+          </c:tx>
+          <c:spPr>
+            <a:solidFill>
+              <a:srgbClr val="0B2A4A"/>
+            </a:solidFill>
+            <a:ln w="31750" cap="flat">
+              <a:solidFill>
+                <a:srgbClr val="0B2A4A"/>
+              </a:solidFill>
+              <a:prstDash val="solid"/>
+              <a:round/>
+            </a:ln>
+            <a:effectLst/>
+          </c:spPr>
+          <c:invertIfNegative val="0"/>
+          <c:dLbls>
+            <c:numFmt formatCode="#,##0" sourceLinked="0"/>
+            <c:txPr>
+              <a:bodyPr/>
+              <a:lstStyle/>
+              <a:p>
+                <a:pPr>
+                  <a:defRPr b="1" i="0" strike="noStrike" sz="1200" u="none">
+                    <a:solidFill>
+                      <a:srgbClr val="1F2933"/>
+                    </a:solidFill>
+                    <a:latin typeface="+mn-lt"/>
+                  </a:defRPr>
+                </a:pPr>
+              </a:p>
+            </c:txPr>
+            <c:showLegendKey val="0"/>
+            <c:showVal val="0"/>
+            <c:showCatName val="0"/>
+            <c:showSerName val="0"/>
+            <c:showPercent val="0"/>
+            <c:showBubbleSize val="0"/>
+            <c:showLeaderLines val="0"/>
+          </c:dLbls>
+          <c:marker>
+            <c:symbol val="circle"/>
+            <c:size val="7"/>
+            <c:spPr>
+              <a:solidFill>
+                <a:srgbClr val="0B2A4A"/>
+              </a:solidFill>
+              <a:ln w="9525" cap="flat">
+                <a:solidFill>
+                  <a:srgbClr val="0B2A4A"/>
+                </a:solidFill>
+                <a:prstDash val="solid"/>
+                <a:round/>
+              </a:ln>
+              <a:effectLst/>
+            </c:spPr>
+          </c:marker>
+          <c:cat>
+            <c:multiLvlStrRef>
+              <c:f>Sheet1!$A$2:$A$9</c:f>
+              <c:multiLvlStrCache>
+                <c:ptCount val="8"/>
+                <c:lvl>
+                  <c:pt idx="0">
+                    <c:v>FY19</c:v>
+                  </c:pt>
+                  <c:pt idx="1">
+                    <c:v>FY20</c:v>
+                  </c:pt>
+                  <c:pt idx="2">
+                    <c:v>FY21</c:v>
+                  </c:pt>
+                  <c:pt idx="3">
+                    <c:v>FY22</c:v>
+                  </c:pt>
+                  <c:pt idx="4">
+                    <c:v>FY23</c:v>
+                  </c:pt>
+                  <c:pt idx="5">
+                    <c:v>FY24</c:v>
+                  </c:pt>
+                  <c:pt idx="6">
+                    <c:v>FY25</c:v>
+                  </c:pt>
+                  <c:pt idx="7">
+                    <c:v>FY26</c:v>
+                  </c:pt>
+                </c:lvl>
+              </c:multiLvlStrCache>
+            </c:multiLvlStrRef>
+          </c:cat>
+          <c:val>
+            <c:numRef>
+              <c:f>Sheet1!$B$2:$B$9</c:f>
+              <c:numCache>
+                <c:formatCode>General</c:formatCode>
+                <c:ptCount val="8"/>
+                <c:pt idx="0">
+                  <c:v>100</c:v>
+                </c:pt>
+                <c:pt idx="1">
+                  <c:v>92</c:v>
+                </c:pt>
+                <c:pt idx="2">
+                  <c:v>102.1</c:v>
+                </c:pt>
+                <c:pt idx="3">
+                  <c:v>99.1</c:v>
+                </c:pt>
+                <c:pt idx="4">
+                  <c:v>111.9</c:v>
+                </c:pt>
+                <c:pt idx="5">
+                  <c:v>109.7</c:v>
+                </c:pt>
+                <c:pt idx="6">
+                  <c:v>100.9</c:v>
+                </c:pt>
+                <c:pt idx="7">
+                  <c:v>99.9</c:v>
+                </c:pt>
+              </c:numCache>
+            </c:numRef>
+          </c:val>
+          <c:smooth val="0"/>
+        </c:ser>
+        <c:ser>
+          <c:idx val="1"/>
+          <c:order val="1"/>
+          <c:tx>
+            <c:strRef>
+              <c:f>Sheet1!$C$1</c:f>
+              <c:strCache>
+                <c:ptCount val="1"/>
+                <c:pt idx="0">
+                  <c:v>Reported revenue per pair (FY19 = 100)</c:v>
+                </c:pt>
+              </c:strCache>
+            </c:strRef>
+          </c:tx>
+          <c:spPr>
+            <a:solidFill>
+              <a:srgbClr val="A4262C"/>
+            </a:solidFill>
+            <a:ln w="31750" cap="flat">
+              <a:solidFill>
+                <a:srgbClr val="A4262C"/>
+              </a:solidFill>
+              <a:prstDash val="solid"/>
+              <a:round/>
+            </a:ln>
+            <a:effectLst/>
+          </c:spPr>
+          <c:invertIfNegative val="0"/>
+          <c:dLbls>
+            <c:numFmt formatCode="#,##0" sourceLinked="0"/>
+            <c:txPr>
+              <a:bodyPr/>
+              <a:lstStyle/>
+              <a:p>
+                <a:pPr>
+                  <a:defRPr b="1" i="0" strike="noStrike" sz="1200" u="none">
+                    <a:solidFill>
+                      <a:srgbClr val="1F2933"/>
+                    </a:solidFill>
+                    <a:latin typeface="+mn-lt"/>
+                  </a:defRPr>
+                </a:pPr>
+              </a:p>
+            </c:txPr>
+            <c:showLegendKey val="0"/>
+            <c:showVal val="0"/>
+            <c:showCatName val="0"/>
+            <c:showSerName val="0"/>
+            <c:showPercent val="0"/>
+            <c:showBubbleSize val="0"/>
+            <c:showLeaderLines val="0"/>
+          </c:dLbls>
+          <c:marker>
+            <c:symbol val="circle"/>
+            <c:size val="7"/>
+            <c:spPr>
+              <a:solidFill>
+                <a:srgbClr val="A4262C"/>
+              </a:solidFill>
+              <a:ln w="9525" cap="flat">
+                <a:solidFill>
+                  <a:srgbClr val="A4262C"/>
+                </a:solidFill>
+                <a:prstDash val="solid"/>
+                <a:round/>
+              </a:ln>
+              <a:effectLst/>
+            </c:spPr>
+          </c:marker>
+          <c:cat>
+            <c:multiLvlStrRef>
+              <c:f>Sheet1!$A$2:$A$9</c:f>
+              <c:multiLvlStrCache>
+                <c:ptCount val="8"/>
+                <c:lvl>
+                  <c:pt idx="0">
+                    <c:v>FY19</c:v>
+                  </c:pt>
+                  <c:pt idx="1">
+                    <c:v>FY20</c:v>
+                  </c:pt>
+                  <c:pt idx="2">
+                    <c:v>FY21</c:v>
+                  </c:pt>
+                  <c:pt idx="3">
+                    <c:v>FY22</c:v>
+                  </c:pt>
+                  <c:pt idx="4">
+                    <c:v>FY23</c:v>
+                  </c:pt>
+                  <c:pt idx="5">
+                    <c:v>FY24</c:v>
+                  </c:pt>
+                  <c:pt idx="6">
+                    <c:v>FY25</c:v>
+                  </c:pt>
+                  <c:pt idx="7">
+                    <c:v>FY26</c:v>
+                  </c:pt>
+                </c:lvl>
+              </c:multiLvlStrCache>
+            </c:multiLvlStrRef>
+          </c:cat>
+          <c:val>
+            <c:numRef>
+              <c:f>Sheet1!$C$2:$C$9</c:f>
+              <c:numCache>
+                <c:formatCode>General</c:formatCode>
+                <c:ptCount val="8"/>
+                <c:pt idx="0">
+                  <c:v>100</c:v>
+                </c:pt>
+                <c:pt idx="1">
+                  <c:v>104.6</c:v>
+                </c:pt>
+                <c:pt idx="2">
+                  <c:v>113.3</c:v>
+                </c:pt>
+                <c:pt idx="3">
+                  <c:v>121.5</c:v>
+                </c:pt>
+                <c:pt idx="4">
+                  <c:v>122.2</c:v>
+                </c:pt>
+                <c:pt idx="5">
+                  <c:v>125.8</c:v>
+                </c:pt>
+                <c:pt idx="6">
+                  <c:v>120.7</c:v>
+                </c:pt>
+                <c:pt idx="7">
+                  <c:v>122</c:v>
+                </c:pt>
+              </c:numCache>
+            </c:numRef>
+          </c:val>
+          <c:smooth val="0"/>
+        </c:ser>
+        <c:dLbls>
+          <c:numFmt formatCode="#,##0" sourceLinked="0"/>
+          <c:txPr>
+            <a:bodyPr/>
+            <a:lstStyle/>
+            <a:p>
+              <a:pPr>
+                <a:defRPr b="1" i="0" strike="noStrike" sz="1200" u="none">
+                  <a:solidFill>
+                    <a:srgbClr val="1F2933"/>
+                  </a:solidFill>
+                  <a:latin typeface="+mn-lt"/>
+                </a:defRPr>
+              </a:pPr>
+            </a:p>
+          </c:txPr>
+          <c:showLegendKey val="0"/>
+          <c:showVal val="0"/>
+          <c:showCatName val="0"/>
+          <c:showSerName val="0"/>
+          <c:showPercent val="0"/>
+          <c:showBubbleSize val="0"/>
+          <c:showLeaderLines val="0"/>
+        </c:dLbls>
+        <c:marker val="1"/>
+        <c:axId val="2094734554"/>
+        <c:axId val="2094734552"/>
+        <c:axId val="2094734556"/>
+      </c:lineChart>
+      <c:catAx>
+        <c:axId val="2094734554"/>
+        <c:scaling>
+          <c:orientation val="minMax"/>
+        </c:scaling>
+        <c:delete val="0"/>
+        <c:axPos val="b"/>
+        <c:numFmt formatCode="General" sourceLinked="1"/>
+        <c:majorTickMark val="out"/>
+        <c:minorTickMark val="none"/>
+        <c:tickLblPos val="low"/>
+        <c:spPr>
+          <a:ln w="12700" cap="flat">
+            <a:solidFill>
+              <a:srgbClr val="888888"/>
+            </a:solidFill>
+            <a:prstDash val="solid"/>
+            <a:round/>
+          </a:ln>
+        </c:spPr>
+        <c:txPr>
+          <a:bodyPr/>
+          <a:lstStyle/>
+          <a:p>
+            <a:pPr>
+              <a:defRPr sz="1200" b="0" i="0" u="none" strike="noStrike">
+                <a:solidFill>
+                  <a:srgbClr val="1F2933"/>
+                </a:solidFill>
+                <a:latin typeface="+mn-lt"/>
+              </a:defRPr>
+            </a:pPr>
+            <a:endParaRPr lang="en-US"/>
+          </a:p>
+        </c:txPr>
+        <c:crossAx val="2094734552"/>
+        <c:crosses val="autoZero"/>
+        <c:auto val="1"/>
+        <c:lblAlgn val="ctr"/>
+        <c:noMultiLvlLbl val="1"/>
+      </c:catAx>
+      <c:valAx>
+        <c:axId val="2094734552"/>
+        <c:scaling>
+          <c:orientation val="minMax"/>
+          <c:max val="130"/>
+          <c:min val="80"/>
+        </c:scaling>
+        <c:delete val="1"/>
+        <c:axPos val="l"/>
+        <c:numFmt formatCode="General" sourceLinked="0"/>
+        <c:majorTickMark val="out"/>
+        <c:minorTickMark val="none"/>
+        <c:tickLblPos val="nextTo"/>
+        <c:spPr>
+          <a:ln w="12700" cap="flat">
+            <a:solidFill>
+              <a:srgbClr val="888888"/>
+            </a:solidFill>
+            <a:prstDash val="solid"/>
+            <a:round/>
+          </a:ln>
+        </c:spPr>
+        <c:txPr>
+          <a:bodyPr/>
+          <a:lstStyle/>
+          <a:p>
+            <a:pPr>
+              <a:defRPr sz="1100" b="0" i="0" u="none" strike="noStrike">
+                <a:solidFill>
+                  <a:srgbClr val="6B7280"/>
+                </a:solidFill>
+                <a:latin typeface="+mn-lt"/>
+              </a:defRPr>
+            </a:pPr>
+            <a:endParaRPr lang="en-US"/>
+          </a:p>
+        </c:txPr>
+        <c:crossAx val="2094734554"/>
+        <c:crosses val="autoZero"/>
+        <c:crossBetween val="between"/>
+      </c:valAx>
+      <c:spPr>
+        <a:noFill/>
+        <a:ln>
+          <a:noFill/>
+        </a:ln>
+        <a:effectLst/>
+      </c:spPr>
+    </c:plotArea>
+    <c:legend>
+      <c:legendPos val="b"/>
+      <c:overlay val="0"/>
+      <c:txPr>
+        <a:bodyPr/>
+        <a:lstStyle/>
+        <a:p>
+          <a:pPr>
+            <a:defRPr sz="1100">
+              <a:latin typeface="Arial"/>
+              <a:cs typeface="Arial"/>
+            </a:defRPr>
+          </a:pPr>
+          <a:endParaRPr lang="en-US"/>
+        </a:p>
+      </c:txPr>
+    </c:legend>
+    <c:plotVisOnly val="1"/>
+    <c:dispBlanksAs val="span"/>
+  </c:chart>
+  <c:spPr>
+    <a:noFill/>
+    <a:ln>
+      <a:noFill/>
+    </a:ln>
+    <a:effectLst/>
+  </c:spPr>
+  <c:externalData r:id="rId1">
+    <c:autoUpdate val="0"/>
+  </c:externalData>
+</c:chartSpace>
+</file>
+
+<file path=ppt/charts/chart8.xml><?xml version="1.0" encoding="utf-8"?>
+<c:chartSpace xmlns:c="http://schemas.openxmlformats.org/drawingml/2006/chart" xmlns:a="http://schemas.openxmlformats.org/drawingml/2006/main" xmlns:r="http://schemas.openxmlformats.org/officeDocument/2006/relationships">
+  <c:date1904 val="0"/>
+  <c:roundedCorners val="1"/>
+  <c:chart>
+    <c:title>
+      <c:tx>
+        <c:rich>
+          <a:bodyPr/>
+          <a:lstStyle/>
+          <a:p>
+            <a:pPr>
+              <a:defRPr sz="1300" b="0" i="0" u="none" strike="noStrike">
+                <a:solidFill>
+                  <a:srgbClr val="0B2A4A"/>
+                </a:solidFill>
+                <a:latin typeface="+mn-lt"/>
+              </a:defRPr>
+            </a:pPr>
+            <a:r>
+              <a:rPr sz="1300" b="0" i="0" u="none" strike="noStrike">
+                <a:solidFill>
+                  <a:srgbClr val="0B2A4A"/>
+                </a:solidFill>
+                <a:latin typeface="+mn-lt"/>
+              </a:rPr>
+              <a:t>Global website visits, Aug 2026 year on year (%)</a:t>
+            </a:r>
+          </a:p>
+        </c:rich>
+      </c:tx>
+      <c:layout/>
+      <c:overlay val="0"/>
+    </c:title>
+    <c:autoTitleDeleted val="0"/>
+    <c:plotArea>
+      <c:layout/>
+      <c:barChart>
+        <c:barDir val="bar"/>
+        <c:grouping val="clustered"/>
+        <c:varyColors val="0"/>
+        <c:ser>
+          <c:idx val="0"/>
+          <c:order val="0"/>
+          <c:tx>
+            <c:strRef>
+              <c:f>Sheet1!$B$1</c:f>
+              <c:strCache>
+                <c:ptCount val="1"/>
+                <c:pt idx="0">
+                  <c:v>Website visits, Aug 2026 vs Aug 2025 (%)</c:v>
+                </c:pt>
+              </c:strCache>
+            </c:strRef>
+          </c:tx>
+          <c:spPr>
+            <a:solidFill>
+              <a:srgbClr val="A4262C"/>
+            </a:solidFill>
+            <a:effectLst/>
+          </c:spPr>
+          <c:invertIfNegative val="0"/>
+          <c:dLbls>
+            <c:numFmt formatCode="0.0&quot;%&quot;" sourceLinked="0"/>
+            <c:txPr>
+              <a:bodyPr/>
+              <a:lstStyle/>
+              <a:p>
+                <a:pPr>
+                  <a:defRPr b="1" i="0" strike="noStrike" sz="1200" u="none">
+                    <a:solidFill>
+                      <a:srgbClr val="1F2933"/>
+                    </a:solidFill>
+                    <a:latin typeface="+mn-lt"/>
+                  </a:defRPr>
+                </a:pPr>
+              </a:p>
+            </c:txPr>
+            <c:showLegendKey val="0"/>
+            <c:showVal val="1"/>
+            <c:showCatName val="0"/>
+            <c:showSerName val="0"/>
+            <c:showPercent val="0"/>
+            <c:showBubbleSize val="0"/>
+            <c:showLeaderLines val="0"/>
+          </c:dLbls>
+          <c:dPt>
+            <c:idx val="0"/>
+            <c:invertIfNegative val="0"/>
+            <c:bubble3D val="0"/>
+            <c:spPr>
+              <a:solidFill>
+                <a:srgbClr val="A4262C"/>
+              </a:solidFill>
+              <a:effectLst/>
+            </c:spPr>
+          </c:dPt>
+          <c:dPt>
+            <c:idx val="1"/>
+            <c:invertIfNegative val="0"/>
+            <c:bubble3D val="0"/>
+            <c:spPr>
+              <a:solidFill>
+                <a:srgbClr val="9FB0C0"/>
+              </a:solidFill>
+              <a:effectLst/>
+            </c:spPr>
+          </c:dPt>
+          <c:dPt>
+            <c:idx val="2"/>
+            <c:invertIfNegative val="0"/>
+            <c:bubble3D val="0"/>
+            <c:spPr>
+              <a:solidFill>
+                <a:srgbClr val="9FB0C0"/>
+              </a:solidFill>
+              <a:effectLst/>
+            </c:spPr>
+          </c:dPt>
+          <c:dPt>
+            <c:idx val="3"/>
+            <c:invertIfNegative val="0"/>
+            <c:bubble3D val="0"/>
+            <c:spPr>
+              <a:solidFill>
+                <a:srgbClr val="9FB0C0"/>
+              </a:solidFill>
+              <a:effectLst/>
+            </c:spPr>
+          </c:dPt>
+          <c:dPt>
+            <c:idx val="4"/>
+            <c:invertIfNegative val="0"/>
+            <c:bubble3D val="0"/>
+            <c:spPr>
+              <a:solidFill>
+                <a:srgbClr val="9FB0C0"/>
+              </a:solidFill>
+              <a:effectLst/>
+            </c:spPr>
+          </c:dPt>
+          <c:dPt>
+            <c:idx val="5"/>
+            <c:invertIfNegative val="0"/>
+            <c:bubble3D val="0"/>
+            <c:spPr>
+              <a:solidFill>
+                <a:srgbClr val="9FB0C0"/>
+              </a:solidFill>
+              <a:effectLst/>
+            </c:spPr>
+          </c:dPt>
+          <c:dPt>
+            <c:idx val="6"/>
+            <c:invertIfNegative val="0"/>
+            <c:bubble3D val="0"/>
+            <c:spPr>
+              <a:solidFill>
+                <a:srgbClr val="9FB0C0"/>
+              </a:solidFill>
+              <a:effectLst/>
+            </c:spPr>
+          </c:dPt>
+          <c:dPt>
+            <c:idx val="7"/>
+            <c:invertIfNegative val="0"/>
+            <c:bubble3D val="0"/>
+            <c:spPr>
+              <a:solidFill>
+                <a:srgbClr val="9FB0C0"/>
+              </a:solidFill>
+              <a:effectLst/>
+            </c:spPr>
+          </c:dPt>
+          <c:cat>
+            <c:multiLvlStrRef>
+              <c:f>Sheet1!$A$2:$A$9</c:f>
+              <c:multiLvlStrCache>
+                <c:ptCount val="8"/>
+                <c:lvl>
+                  <c:pt idx="0">
+                    <c:v>nike.com</c:v>
+                  </c:pt>
+                  <c:pt idx="1">
+                    <c:v>Puma</c:v>
+                  </c:pt>
+                  <c:pt idx="2">
+                    <c:v>Under Armour</c:v>
+                  </c:pt>
+                  <c:pt idx="3">
+                    <c:v>New Balance</c:v>
+                  </c:pt>
+                  <c:pt idx="4">
+                    <c:v>Decathlon</c:v>
+                  </c:pt>
+                  <c:pt idx="5">
+                    <c:v>ASICS</c:v>
+                  </c:pt>
+                  <c:pt idx="6">
+                    <c:v>adidas.com</c:v>
+                  </c:pt>
+                  <c:pt idx="7">
+                    <c:v>DICK'S</c:v>
+                  </c:pt>
+                </c:lvl>
+              </c:multiLvlStrCache>
+            </c:multiLvlStrRef>
+          </c:cat>
+          <c:val>
+            <c:numRef>
+              <c:f>Sheet1!$B$2:$B$9</c:f>
+              <c:numCache>
+                <c:formatCode>General</c:formatCode>
+                <c:ptCount val="8"/>
+                <c:pt idx="0">
+                  <c:v>-11.4</c:v>
+                </c:pt>
+                <c:pt idx="1">
+                  <c:v>-5.6</c:v>
+                </c:pt>
+                <c:pt idx="2">
+                  <c:v>-3.7</c:v>
+                </c:pt>
+                <c:pt idx="3">
+                  <c:v>0.4</c:v>
+                </c:pt>
+                <c:pt idx="4">
+                  <c:v>0.2</c:v>
+                </c:pt>
+                <c:pt idx="5">
+                  <c:v>0.9</c:v>
+                </c:pt>
+                <c:pt idx="6">
+                  <c:v>12.5</c:v>
+                </c:pt>
+                <c:pt idx="7">
+                  <c:v>15.2</c:v>
+                </c:pt>
+              </c:numCache>
+            </c:numRef>
+          </c:val>
+        </c:ser>
+        <c:dLbls>
+          <c:numFmt formatCode="0.0&quot;%&quot;" sourceLinked="0"/>
+          <c:txPr>
+            <a:bodyPr/>
+            <a:lstStyle/>
+            <a:p>
+              <a:pPr>
+                <a:defRPr b="1" i="0" strike="noStrike" sz="1200" u="none">
+                  <a:solidFill>
+                    <a:srgbClr val="1F2933"/>
+                  </a:solidFill>
+                  <a:latin typeface="+mn-lt"/>
+                </a:defRPr>
+              </a:pPr>
+            </a:p>
+          </c:txPr>
+          <c:showLegendKey val="0"/>
+          <c:showVal val="1"/>
+          <c:showCatName val="0"/>
+          <c:showSerName val="0"/>
+          <c:showPercent val="0"/>
+          <c:showBubbleSize val="0"/>
+          <c:showLeaderLines val="0"/>
+        </c:dLbls>
+        <c:gapWidth val="40"/>
+        <c:overlap val="0"/>
+        <c:axId val="2094734554"/>
+        <c:axId val="2094734552"/>
+        <c:axId val="2094734556"/>
+      </c:barChart>
+      <c:catAx>
+        <c:axId val="2094734554"/>
+        <c:scaling>
+          <c:orientation val="maxMin"/>
+        </c:scaling>
+        <c:delete val="0"/>
+        <c:axPos val="l"/>
+        <c:numFmt formatCode="General" sourceLinked="1"/>
+        <c:majorTickMark val="out"/>
+        <c:minorTickMark val="none"/>
+        <c:tickLblPos val="low"/>
+        <c:spPr>
+          <a:ln w="12700" cap="flat">
+            <a:solidFill>
+              <a:srgbClr val="888888"/>
+            </a:solidFill>
+            <a:prstDash val="solid"/>
+            <a:round/>
+          </a:ln>
+        </c:spPr>
+        <c:txPr>
+          <a:bodyPr/>
+          <a:lstStyle/>
+          <a:p>
+            <a:pPr>
+              <a:defRPr sz="1100" b="0" i="0" u="none" strike="noStrike">
+                <a:solidFill>
+                  <a:srgbClr val="1F2933"/>
+                </a:solidFill>
+                <a:latin typeface="+mn-lt"/>
+              </a:defRPr>
+            </a:pPr>
+            <a:endParaRPr lang="en-US"/>
+          </a:p>
+        </c:txPr>
+        <c:crossAx val="2094734552"/>
+        <c:crosses val="autoZero"/>
+        <c:auto val="1"/>
+        <c:lblAlgn val="ctr"/>
+        <c:noMultiLvlLbl val="1"/>
+      </c:catAx>
+      <c:valAx>
+        <c:axId val="2094734552"/>
+        <c:scaling>
+          <c:orientation val="minMax"/>
+          <c:max val="20"/>
+          <c:min val="-16"/>
+        </c:scaling>
+        <c:delete val="1"/>
+        <c:axPos val="b"/>
+        <c:numFmt formatCode="General" sourceLinked="0"/>
+        <c:majorTickMark val="out"/>
+        <c:minorTickMark val="none"/>
+        <c:tickLblPos val="low"/>
+        <c:spPr>
+          <a:ln w="12700" cap="flat">
+            <a:solidFill>
+              <a:srgbClr val="888888"/>
+            </a:solidFill>
+            <a:prstDash val="solid"/>
+            <a:round/>
+          </a:ln>
+        </c:spPr>
+        <c:txPr>
+          <a:bodyPr/>
+          <a:lstStyle/>
+          <a:p>
+            <a:pPr>
+              <a:defRPr sz="1100" b="0" i="0" u="none" strike="noStrike">
+                <a:solidFill>
+                  <a:srgbClr val="6B7280"/>
+                </a:solidFill>
+                <a:latin typeface="+mn-lt"/>
+              </a:defRPr>
+            </a:pPr>
+            <a:endParaRPr lang="en-US"/>
+          </a:p>
+        </c:txPr>
+        <c:crossAx val="2094734554"/>
+        <c:crosses val="autoZero"/>
+        <c:crossBetween val="between"/>
+      </c:valAx>
+      <c:spPr>
+        <a:noFill/>
+        <a:ln>
+          <a:noFill/>
+        </a:ln>
+        <a:effectLst/>
+      </c:spPr>
+    </c:plotArea>
+    <c:plotVisOnly val="1"/>
+    <c:dispBlanksAs val="span"/>
+  </c:chart>
+  <c:spPr>
+    <a:noFill/>
+    <a:ln>
+      <a:noFill/>
+    </a:ln>
+    <a:effectLst/>
+  </c:spPr>
+  <c:externalData r:id="rId1">
+    <c:autoUpdate val="0"/>
+  </c:externalData>
+</c:chartSpace>
+</file>
+
 <file path=ppt/notesMasters/notesMaster1.xml><?xml version="1.0" encoding="utf-8"?>
 <p:notesMaster xmlns:a="http://schemas.openxmlformats.org/drawingml/2006/main" xmlns:r="http://schemas.openxmlformats.org/officeDocument/2006/relationships" xmlns:p="http://schemas.openxmlformats.org/presentationml/2006/main">
   <p:cSld>
@@ -2586,7 +3435,7 @@
           <a:p>
             <a:r>
               <a:rPr lang="en-US" dirty="0"/>
-              <a:t>Short means we expect the share price to fall, or to do worse than peers. The pitch is deliberately narrow: FY28 expectations are too high. We do not rely on a near-term earnings miss, because Nike has met or beaten its quarterly guidance 14 of 14 times under CEO Elliott Hill. Peer multiples are one pull from Yahoo Finance at the Oct 13 close and should be refreshed around Oct 30.</a:t>
+              <a:t>Short means we expect the share price to fall, or to do worse than peers. The pitch is deliberately narrow: FY28 expectations are too high. We do not rely on a near-term earnings miss, because Nike landed inside or above its guided range on revenue and gross margin 16 of 16 times in the last eight quarters, but Q1 FY27 revenue (-4.3% against a midpoint of about -3.5%) was the first to fall below the midpoint. Peer multiples are one pull from Yahoo Finance at the Oct 13 close and should be refreshed around Oct 30.</a:t>
             </a:r>
             <a:endParaRPr lang="en-US" dirty="0"/>
           </a:p>
@@ -2674,7 +3523,7 @@
           <a:p>
             <a:r>
               <a:rPr lang="en-US" dirty="0"/>
-              <a:t>Crowded short: 99.2M shares short at Sep 30, 2026 is 8.2% of the 1,203.9M Class B shares that trade (the repo's earlier 6.7% used all share classes). Borrow is cheap (Interactive Brokers 0.41%, Ortex 0.53%), lendable supply is about five times the short, and on Oct 1 to 2 255M shares traded without a squeeze. After record short interest in 27 consumer stocks (2021 to 2026), shorts won 81 of 119 at 6 months, but about 12% of cases ended more than 25% above the market, mostly on earnings-day jumps. Express the idea with puts or a limited-loss structure. Insider buying did not predict returns in historical tests, and the checker found two Form 144 sale notices by the former CFO.</a:t>
+              <a:t>From Nike's 10-K unit and ASP disclosures (NIKE Brand footwear, percent change by year; indices are team arithmetic from the rounded integers, so each year carries about half a point of rounding). Units: FY19 = 100, FY26 = 99.9. Reported revenue per pair: 122.0, currency-neutral ASP 127.2. From the FY23 unit peak, units are -10.7% and revenue -10.9%, so revenue per pair is flat and the volume cut is not being recovered in price. ASP contribution turned negative in FY25 (-3 points), FY26 (-1) and Q1 FY27 (-1), while Q1 FY27 units fell 5%. Apparel is the opposite: units -12.7% from FY23 with revenue per unit +11.3%. Lost footwear units since FY23 split about 45% North America, 30% EMEA, 25% Greater China. Nike's unit sales are recognized sales, so deliberate supply cuts and weaker sell-through cannot be separated from filings; Circana or GfK sell-through would decide it.</a:t>
             </a:r>
             <a:endParaRPr lang="en-US" dirty="0"/>
           </a:p>
@@ -2762,7 +3611,7 @@
           <a:p>
             <a:r>
               <a:rPr lang="en-US" dirty="0"/>
-              <a:t>Decision rules written in advance. Investor Day: a dated long-term operating margin target of 13% or more with an interim bridge would falsify the margin argument; an undated target or one below about 12% supports it. Feng Tay October revenue is published on Taiwan's MOPS around the 10th of each month; thresholds are on a two-year US-dollar basis. Q2 FY27 results arrive around Dec 17, after finals. The dividend is usually declared between Nov 14 and 20; a freeze or token raise is the likely outcome and a mild positive; a large raise would work against us.</a:t>
+              <a:t>Traffic: Semrush public trending pages for August 2026, the last month of Q1 FY27, read from the embedded page data; one month only, no multi-year series was obtainable free. Nike says the digital decline is a deliberate cut in off-price volume. If so, visits should hold while revenue falls. Globally visits fell 11.4% against digital revenue -13%, and in North America visits fell 11.4% against revenue -6%, while adidas.com rose 12.5% and DICK'S 15.2%. Only EMEA fits the deliberate story. Disclosures: a full diff of every 10-K, 10-Q and release FY18 to Q1 FY27 found 16 KPI-type disclosure families withdrawn in the last nine quarters against about five in the prior 24 (Poisson probability about 2e-10); of the 12 with a clear direction, 11 were deteriorating when pulled (Fisher one-sided p = 0.003). Nike also added adverse disclosures in the same period, SEC rules explain four removals, and peers drop tags too, so we say 'withdrawn while deteriorating', not 'hiding'. Receivables: wholesale DSO rose 4.5 to 9.7 days year on year from Q3 FY26 to Q1 FY27 after tariff-refund and FX adjustments, more than any peer, and the segment receivables table that would show where was withdrawn in FY25. Reserves: the sales-related reserve fell from $1,834M (May 2025) to $1,488M (Aug 2026); lapping the FY25 build is worth up to $797M of revenue year on year if usage was unchanged, a base effect management pre-announced. A skeptic check rejected the stronger claim that it explains the guidance beats.</a:t>
             </a:r>
             <a:endParaRPr lang="en-US" dirty="0"/>
           </a:p>
@@ -2850,7 +3699,7 @@
           <a:p>
             <a:r>
               <a:rPr lang="en-US" dirty="0"/>
-              <a:t>Twelve free-data areas were collected (stores, hiring, trade, resale, pricing, attention, apps, reviews, insiders and funds, market size, peers, marketing), plus earnings calls, tariffs, history and short-interest checks. A separate checker re-pulled samples and re-ran tests for each area. These are the main corrections. Items that could not be measured: Nike's own US shipment volumes (Nike's name is masked in public bills of lading), and Census trade data needs an email registration which was not used.</a:t>
+              <a:t>Crowded short: 99.2M shares short at Sep 30, 2026 is 8.2% of the 1,203.9M Class B shares that trade (the repo's earlier 6.7% used all share classes). Borrow is cheap (Interactive Brokers 0.41%, Ortex 0.53%), lendable supply is about five times the short, and on Oct 1 to 2 255M shares traded without a squeeze. After record short interest in 27 consumer stocks (2021 to 2026), shorts won 81 of 119 at 6 months, but about 12% of cases ended more than 25% above the market, mostly on earnings-day jumps. Express the idea with puts or a limited-loss structure. Insider buying did not predict returns in historical tests, and the checker found two Form 144 sale notices by the former CFO.</a:t>
             </a:r>
             <a:endParaRPr lang="en-US" dirty="0"/>
           </a:p>
@@ -2938,6 +3787,182 @@
           <a:p>
             <a:r>
               <a:rPr lang="en-US" dirty="0"/>
+              <a:t>Decision rules written in advance. Investor Day: a dated long-term operating margin target of 13% or more with an interim bridge would falsify the margin argument; an undated target or one below about 12% supports it. Feng Tay October revenue is published on Taiwan's MOPS around the 10th of each month; thresholds are on a two-year US-dollar basis. Q2 FY27 results arrive around Dec 17, after finals. The dividend is usually declared between Nov 14 and 20; a freeze or token raise is the likely outcome and a mild positive; a large raise would work against us.</a:t>
+            </a:r>
+            <a:endParaRPr lang="en-US" dirty="0"/>
+          </a:p>
+        </p:txBody>
+      </p:sp>
+      <p:sp>
+        <p:nvSpPr>
+          <p:cNvPr id="4" name="Slide Number Placeholder 3"/>
+          <p:cNvSpPr>
+            <a:spLocks noGrp="1"/>
+          </p:cNvSpPr>
+          <p:nvPr>
+            <p:ph type="sldNum" sz="quarter" idx="10"/>
+          </p:nvPr>
+        </p:nvSpPr>
+        <p:spPr/>
+        <p:txBody>
+          <a:bodyPr/>
+          <a:lstStyle/>
+          <a:p>
+            <a:fld id="{F7021451-1387-4CA6-816F-3879F97B5CBC}" type="slidenum">
+              <a:rPr lang="en-US"/>
+              <a:t>13</a:t>
+            </a:fld>
+            <a:endParaRPr lang="en-US"/>
+          </a:p>
+        </p:txBody>
+      </p:sp>
+    </p:spTree>
+    <p:extLst>
+      <p:ext uri="{BB962C8B-B14F-4D97-AF65-F5344CB8AC3E}">
+        <p14:creationId xmlns:p14="http://schemas.microsoft.com/office/powerpoint/2010/main" val="1024086991"/>
+      </p:ext>
+    </p:extLst>
+  </p:cSld>
+  <p:clrMapOvr>
+    <a:masterClrMapping/>
+  </p:clrMapOvr>
+</p:notes>
+</file>
+
+<file path=ppt/notesSlides/notesSlide14.xml><?xml version="1.0" encoding="utf-8"?>
+<p:notes xmlns:a="http://schemas.openxmlformats.org/drawingml/2006/main" xmlns:r="http://schemas.openxmlformats.org/officeDocument/2006/relationships" xmlns:p="http://schemas.openxmlformats.org/presentationml/2006/main">
+  <p:cSld>
+    <p:spTree>
+      <p:nvGrpSpPr>
+        <p:cNvPr id="1" name=""/>
+        <p:cNvGrpSpPr/>
+        <p:nvPr/>
+      </p:nvGrpSpPr>
+      <p:grpSpPr>
+        <a:xfrm>
+          <a:off x="0" y="0"/>
+          <a:ext cx="0" cy="0"/>
+          <a:chOff x="0" y="0"/>
+          <a:chExt cx="0" cy="0"/>
+        </a:xfrm>
+      </p:grpSpPr>
+      <p:sp>
+        <p:nvSpPr>
+          <p:cNvPr id="2" name="Slide Image Placeholder 1"/>
+          <p:cNvSpPr>
+            <a:spLocks noGrp="1" noRot="1" noChangeAspect="1"/>
+          </p:cNvSpPr>
+          <p:nvPr>
+            <p:ph type="sldImg"/>
+          </p:nvPr>
+        </p:nvSpPr>
+        <p:spPr/>
+      </p:sp>
+      <p:sp>
+        <p:nvSpPr>
+          <p:cNvPr id="3" name="Notes Placeholder 2"/>
+          <p:cNvSpPr>
+            <a:spLocks noGrp="1"/>
+          </p:cNvSpPr>
+          <p:nvPr>
+            <p:ph type="body" idx="1"/>
+          </p:nvPr>
+        </p:nvSpPr>
+        <p:spPr/>
+        <p:txBody>
+          <a:bodyPr/>
+          <a:lstStyle/>
+          <a:p>
+            <a:r>
+              <a:rPr lang="en-US" dirty="0"/>
+              <a:t>Twelve free-data areas were collected, then seven deep dives (D1 to D7) and twelve forensic hunts (G1 to G12, each with an alternatives log) were run; every candidate smoking gun was given to a separate skeptic. None survived as a single decisive fact, so the pitch rests on the mosaic. Earlier: (stores, hiring, trade, resale, pricing, attention, apps, reviews, insiders and funds, market size, peers, marketing), plus earnings calls, tariffs, history and short-interest checks. A separate checker re-pulled samples and re-ran tests for each area. These are the main corrections. Items that could not be measured: Nike's own US shipment volumes (Nike's name is masked in public bills of lading), and Census trade data needs an email registration which was not used.</a:t>
+            </a:r>
+            <a:endParaRPr lang="en-US" dirty="0"/>
+          </a:p>
+        </p:txBody>
+      </p:sp>
+      <p:sp>
+        <p:nvSpPr>
+          <p:cNvPr id="4" name="Slide Number Placeholder 3"/>
+          <p:cNvSpPr>
+            <a:spLocks noGrp="1"/>
+          </p:cNvSpPr>
+          <p:nvPr>
+            <p:ph type="sldNum" sz="quarter" idx="10"/>
+          </p:nvPr>
+        </p:nvSpPr>
+        <p:spPr/>
+        <p:txBody>
+          <a:bodyPr/>
+          <a:lstStyle/>
+          <a:p>
+            <a:fld id="{F7021451-1387-4CA6-816F-3879F97B5CBC}" type="slidenum">
+              <a:rPr lang="en-US"/>
+              <a:t>14</a:t>
+            </a:fld>
+            <a:endParaRPr lang="en-US"/>
+          </a:p>
+        </p:txBody>
+      </p:sp>
+    </p:spTree>
+    <p:extLst>
+      <p:ext uri="{BB962C8B-B14F-4D97-AF65-F5344CB8AC3E}">
+        <p14:creationId xmlns:p14="http://schemas.microsoft.com/office/powerpoint/2010/main" val="1024086991"/>
+      </p:ext>
+    </p:extLst>
+  </p:cSld>
+  <p:clrMapOvr>
+    <a:masterClrMapping/>
+  </p:clrMapOvr>
+</p:notes>
+</file>
+
+<file path=ppt/notesSlides/notesSlide15.xml><?xml version="1.0" encoding="utf-8"?>
+<p:notes xmlns:a="http://schemas.openxmlformats.org/drawingml/2006/main" xmlns:r="http://schemas.openxmlformats.org/officeDocument/2006/relationships" xmlns:p="http://schemas.openxmlformats.org/presentationml/2006/main">
+  <p:cSld>
+    <p:spTree>
+      <p:nvGrpSpPr>
+        <p:cNvPr id="1" name=""/>
+        <p:cNvGrpSpPr/>
+        <p:nvPr/>
+      </p:nvGrpSpPr>
+      <p:grpSpPr>
+        <a:xfrm>
+          <a:off x="0" y="0"/>
+          <a:ext cx="0" cy="0"/>
+          <a:chOff x="0" y="0"/>
+          <a:chExt cx="0" cy="0"/>
+        </a:xfrm>
+      </p:grpSpPr>
+      <p:sp>
+        <p:nvSpPr>
+          <p:cNvPr id="2" name="Slide Image Placeholder 1"/>
+          <p:cNvSpPr>
+            <a:spLocks noGrp="1" noRot="1" noChangeAspect="1"/>
+          </p:cNvSpPr>
+          <p:nvPr>
+            <p:ph type="sldImg"/>
+          </p:nvPr>
+        </p:nvSpPr>
+        <p:spPr/>
+      </p:sp>
+      <p:sp>
+        <p:nvSpPr>
+          <p:cNvPr id="3" name="Notes Placeholder 2"/>
+          <p:cNvSpPr>
+            <a:spLocks noGrp="1"/>
+          </p:cNvSpPr>
+          <p:nvPr>
+            <p:ph type="body" idx="1"/>
+          </p:nvPr>
+        </p:nvSpPr>
+        <p:spPr/>
+        <p:txBody>
+          <a:bodyPr/>
+          <a:lstStyle/>
+          <a:p>
+            <a:r>
+              <a:rPr lang="en-US" dirty="0"/>
               <a:t>All numbers trace to the documents below or to labeled team arithmetic. The repo holds the cleaned data, scripts and notes.</a:t>
             </a:r>
             <a:endParaRPr lang="en-US" dirty="0"/>
@@ -2961,7 +3986,7 @@
           <a:p>
             <a:fld id="{F7021451-1387-4CA6-816F-3879F97B5CBC}" type="slidenum">
               <a:rPr lang="en-US"/>
-              <a:t>13</a:t>
+              <a:t>15</a:t>
             </a:fld>
             <a:endParaRPr lang="en-US"/>
           </a:p>
@@ -3466,7 +4491,7 @@
           <a:p>
             <a:r>
               <a:rPr lang="en-US" dirty="0"/>
-              <a:t>Margin arithmetic: $1.65 on roughly flat revenue implies operating margin of about 7.2% versus about 5.5% in FY27, a gain of about 170 bp. Nike's best one-year margin gain between FY22 and FY26 was 60 bp. FY28 consensus was $2.22 thirty days earlier (Yahoo earningsTrend), so it has already been cut by 26%; with 24 cuts in 7 days, more cuts look likely, but that is our view. Quotes are from the Q1 FY27 call on Oct 1, 2026.</a:t>
+              <a:t>FY28 bridge (D1, labelled arithmetic from the FY27 guide midpoint): consensus EBIT rises about $700M, of which volume on consensus revenue explains about $200M; the other roughly $500M (114 bp) must come from gross margin and cost, which needs Pace savings to drop through in full plus about 30 bp of gross margin. The gap to consensus that rests on filing facts alone is $0.09 to $0.19 before the tariff offset; the base case of $1.17 (-$0.48) depends on the judgment that the margin step does not happen, so we do not present it as fact. Nike's best one-year margin gain between FY22 and FY26 was 60 bp. FY28 consensus was $2.22 thirty days earlier (Yahoo earningsTrend), so it has already been cut by 26%; with 24 cuts in 7 days, more cuts look likely, but that is our view. Quotes are from the Q1 FY27 call on Oct 1, 2026.</a:t>
             </a:r>
             <a:endParaRPr lang="en-US" dirty="0"/>
           </a:p>
@@ -3554,7 +4579,7 @@
           <a:p>
             <a:r>
               <a:rPr lang="en-US" dirty="0"/>
-              <a:t>Arithmetic: FY26 revenue $46,398M. Q1 FY27 $11,213M, down 4.3%. A full-year decline of 7% to 9% (our read of 'high-single digits'; the release does not say whether reported or currency-neutral) requires Q2 to Q4 to fall 7.9% to 10.6%. Outside China the range assumes Greater China falls 26% to 40% for the rest of the year. If the guide is currency-neutral, the figures improve by about 1 point and the conclusion still holds. Performance (about $16B) and its growth are management statements on the call. Quarterly guidance was met or beaten 14 of 14 times under Hill, so we do not rely on a Q2 miss.</a:t>
+              <a:t>Arithmetic: FY26 revenue $46,398M. Q1 FY27 $11,213M, down 4.3%. A full-year decline of 7% to 9% (our read of 'high-single digits'; the release does not say whether reported or currency-neutral) requires Q2 to Q4 to fall 7.9% to 10.6%. Outside China the range assumes Greater China falls 26% to 40% for the rest of the year. If the guide is currency-neutral, the figures improve by about 1 point and the conclusion still holds. Performance (about $16B) and its growth are management statements on the call. Nike landed inside or above its guided range on revenue and gross margin 16 of 16 times in the last eight quarters, but Q1 FY27 revenue (-4.3% against a midpoint of about -3.5%) was the first to fall below the midpoint, so we do not rely on a Q2 miss.</a:t>
             </a:r>
             <a:endParaRPr lang="en-US" dirty="0"/>
           </a:p>
@@ -4401,7 +5426,7 @@
                 <a:ea typeface="Arial" pitchFamily="34" charset="-122"/>
                 <a:cs typeface="Arial" pitchFamily="34" charset="-120"/>
               </a:rPr>
-              <a:t>The fix is real. The FY28 rebound the price assumes is not supported by Nike's own guidance.</a:t>
+              <a:t>Today's price needs an operating margin Nike has not earned since FY24. Volume has not grown in seven years, and price is now falling.</a:t>
             </a:r>
             <a:endParaRPr lang="en-US" sz="3600" dirty="0"/>
           </a:p>
@@ -4779,9 +5804,64 @@
                 <a:ea typeface="Arial" pitchFamily="34" charset="-122"/>
                 <a:cs typeface="Arial" pitchFamily="34" charset="-120"/>
               </a:rPr>
-              <a:t>The main risks to the short are running momentum, tariff relief and a crowded position; none outweighs the FY28 gap</a:t>
+              <a:t>Footwear volume is back where it was in FY19; every dollar of growth since then was price, and price is now falling</a:t>
             </a:r>
             <a:endParaRPr lang="en-US" sz="2400" dirty="0"/>
+          </a:p>
+        </p:txBody>
+      </p:sp>
+      <p:graphicFrame>
+        <p:nvGraphicFramePr>
+          <p:cNvPr id="4" name="Chart 0" descr=""/>
+          <p:cNvGraphicFramePr/>
+          <p:nvPr/>
+        </p:nvGraphicFramePr>
+        <p:xfrm>
+          <a:off x="548640" y="1508760"/>
+          <a:ext cx="6583680" cy="4160520"/>
+        </p:xfrm>
+        <a:graphic xmlns:a="http://schemas.openxmlformats.org/drawingml/2006/main">
+          <a:graphicData uri="http://schemas.openxmlformats.org/drawingml/2006/chart">
+            <c:chart xmlns:c="http://schemas.openxmlformats.org/drawingml/2006/chart" r:id="rId1"/>
+          </a:graphicData>
+        </a:graphic>
+      </p:graphicFrame>
+      <p:sp>
+        <p:nvSpPr>
+          <p:cNvPr id="5" name="Text 1"/>
+          <p:cNvSpPr txBox="1"/>
+          <p:nvPr/>
+        </p:nvSpPr>
+        <p:spPr>
+          <a:xfrm>
+            <a:off x="7498080" y="1600200"/>
+            <a:ext cx="4114800" cy="292608"/>
+          </a:xfrm>
+          <a:prstGeom prst="rect">
+            <a:avLst/>
+          </a:prstGeom>
+          <a:noFill/>
+          <a:ln/>
+        </p:spPr>
+        <p:txBody>
+          <a:bodyPr wrap="square" lIns="0" tIns="0" rIns="0" bIns="0" rtlCol="0" anchor="ctr"/>
+          <a:lstStyle/>
+          <a:p>
+            <a:pPr indent="0" marL="0">
+              <a:buNone/>
+            </a:pPr>
+            <a:r>
+              <a:rPr lang="en-US" sz="1200" b="1" dirty="0">
+                <a:solidFill>
+                  <a:srgbClr val="0B2A4A"/>
+                </a:solidFill>
+                <a:latin typeface="Arial" pitchFamily="34" charset="0"/>
+                <a:ea typeface="Arial" pitchFamily="34" charset="-122"/>
+                <a:cs typeface="Arial" pitchFamily="34" charset="-120"/>
+              </a:rPr>
+              <a:t>Quarterly footwear: units and price contribution (year on year)</a:t>
+            </a:r>
+            <a:endParaRPr lang="en-US" sz="1200" dirty="0"/>
           </a:p>
         </p:txBody>
       </p:sp>
@@ -4800,19 +5880,19 @@
           </p:nvPr>
         </p:nvGraphicFramePr>
         <p:xfrm>
-          <a:off x="548640" y="1463040"/>
-          <a:ext cx="11091672" cy="914400"/>
+          <a:off x="7498080" y="1965960"/>
+          <a:ext cx="4142232" cy="914400"/>
         </p:xfrm>
         <a:graphic>
           <a:graphicData uri="http://schemas.openxmlformats.org/drawingml/2006/table">
             <a:tbl>
               <a:tblPr/>
               <a:tblGrid>
-                <a:gridCol w="2194560"/>
-                <a:gridCol w="4572000"/>
-                <a:gridCol w="4325112"/>
+                <a:gridCol w="1581912"/>
+                <a:gridCol w="1280160"/>
+                <a:gridCol w="1280160"/>
               </a:tblGrid>
-              <a:tr h="347472">
+              <a:tr h="365760">
                 <a:tc>
                   <a:txBody>
                     <a:bodyPr/>
@@ -4830,7 +5910,7 @@
                           <a:ea typeface="Arial" pitchFamily="34" charset="-122"/>
                           <a:cs typeface="Arial" pitchFamily="34" charset="-120"/>
                         </a:rPr>
-                        <a:t>Risk to our view</a:t>
+                        <a:t>Quarter</a:t>
                       </a:r>
                       <a:endParaRPr lang="en-US" sz="1200" dirty="0">
                         <a:latin typeface="Arial" charset="0"/>
@@ -4862,7 +5942,7 @@
                     <a:bodyPr/>
                     <a:lstStyle/>
                     <a:p>
-                      <a:pPr algn="l" indent="0" marL="0">
+                      <a:pPr algn="r" indent="0" marL="0">
                         <a:buNone/>
                       </a:pPr>
                       <a:r>
@@ -4874,7 +5954,7 @@
                           <a:ea typeface="Arial" pitchFamily="34" charset="-122"/>
                           <a:cs typeface="Arial" pitchFamily="34" charset="-120"/>
                         </a:rPr>
-                        <a:t>Evidence</a:t>
+                        <a:t>Units</a:t>
                       </a:r>
                       <a:endParaRPr lang="en-US" sz="1200" dirty="0">
                         <a:latin typeface="Arial" charset="0"/>
@@ -4906,7 +5986,7 @@
                     <a:bodyPr/>
                     <a:lstStyle/>
                     <a:p>
-                      <a:pPr algn="l" indent="0" marL="0">
+                      <a:pPr algn="r" indent="0" marL="0">
                         <a:buNone/>
                       </a:pPr>
                       <a:r>
@@ -4918,7 +5998,7 @@
                           <a:ea typeface="Arial" pitchFamily="34" charset="-122"/>
                           <a:cs typeface="Arial" pitchFamily="34" charset="-120"/>
                         </a:rPr>
-                        <a:t>Our assessment</a:t>
+                        <a:t>ASP (pts)</a:t>
                       </a:r>
                       <a:endParaRPr lang="en-US" sz="1200" dirty="0">
                         <a:latin typeface="Arial" charset="0"/>
@@ -4946,7 +6026,7 @@
                   </a:tcPr>
                 </a:tc>
               </a:tr>
-              <a:tr h="777240">
+              <a:tr h="365760">
                 <a:tc>
                   <a:txBody>
                     <a:bodyPr/>
@@ -4956,7 +6036,7 @@
                         <a:buNone/>
                       </a:pPr>
                       <a:r>
-                        <a:rPr lang="en-US" sz="1200" b="1" dirty="0">
+                        <a:rPr lang="en-US" sz="1200" dirty="0">
                           <a:solidFill>
                             <a:srgbClr val="1F2933"/>
                           </a:solidFill>
@@ -4964,7 +6044,7 @@
                           <a:ea typeface="Arial" pitchFamily="34" charset="-122"/>
                           <a:cs typeface="Arial" pitchFamily="34" charset="-120"/>
                         </a:rPr>
-                        <a:t>Running recovery is real</a:t>
+                        <a:t>Q1 FY26</a:t>
                       </a:r>
                       <a:endParaRPr lang="en-US" sz="1200" dirty="0">
                         <a:latin typeface="Arial" charset="0"/>
@@ -4999,7 +6079,7 @@
                     <a:bodyPr/>
                     <a:lstStyle/>
                     <a:p>
-                      <a:pPr indent="0" marL="0">
+                      <a:pPr algn="r" indent="0" marL="0">
                         <a:buNone/>
                       </a:pPr>
                       <a:r>
@@ -5011,7 +6091,7 @@
                           <a:ea typeface="Arial" pitchFamily="34" charset="-122"/>
                           <a:cs typeface="Arial" pitchFamily="34" charset="-120"/>
                         </a:rPr>
-                        <a:t>Dick's running reviews +48.6% vs Hoka +21.6%, Brooks +15.8% (Jun to Jul 2026); Pegasus 42 and Vomero 18 rated 4.8</a:t>
+                        <a:t>+2%</a:t>
                       </a:r>
                       <a:endParaRPr lang="en-US" sz="1200" dirty="0">
                         <a:latin typeface="Arial" charset="0"/>
@@ -5046,19 +6126,19 @@
                     <a:bodyPr/>
                     <a:lstStyle/>
                     <a:p>
-                      <a:pPr indent="0" marL="0">
+                      <a:pPr algn="r" indent="0" marL="0">
                         <a:buNone/>
                       </a:pPr>
                       <a:r>
                         <a:rPr lang="en-US" sz="1200" dirty="0">
                           <a:solidFill>
-                            <a:srgbClr val="1F2933"/>
-                          </a:solidFill>
-                          <a:latin typeface="Arial" pitchFamily="34" charset="0"/>
-                          <a:ea typeface="Arial" pitchFamily="34" charset="-122"/>
-                          <a:cs typeface="Arial" pitchFamily="34" charset="-120"/>
-                        </a:rPr>
-                        <a:t>Real volume, but Pegasus 42 is marked down and growth lags ASICS and adidas; offsets lifestyle, not the FY28 gap</a:t>
+                            <a:srgbClr val="A4262C"/>
+                          </a:solidFill>
+                          <a:latin typeface="Arial" pitchFamily="34" charset="0"/>
+                          <a:ea typeface="Arial" pitchFamily="34" charset="-122"/>
+                          <a:cs typeface="Arial" pitchFamily="34" charset="-120"/>
+                        </a:rPr>
+                        <a:t>-4</a:t>
                       </a:r>
                       <a:endParaRPr lang="en-US" sz="1200" dirty="0">
                         <a:latin typeface="Arial" charset="0"/>
@@ -5089,7 +6169,7 @@
                   </a:tcPr>
                 </a:tc>
               </a:tr>
-              <a:tr h="685800">
+              <a:tr h="365760">
                 <a:tc>
                   <a:txBody>
                     <a:bodyPr/>
@@ -5099,7 +6179,7 @@
                         <a:buNone/>
                       </a:pPr>
                       <a:r>
-                        <a:rPr lang="en-US" sz="1200" b="1" dirty="0">
+                        <a:rPr lang="en-US" sz="1200" dirty="0">
                           <a:solidFill>
                             <a:srgbClr val="1F2933"/>
                           </a:solidFill>
@@ -5107,7 +6187,7 @@
                           <a:ea typeface="Arial" pitchFamily="34" charset="-122"/>
                           <a:cs typeface="Arial" pitchFamily="34" charset="-120"/>
                         </a:rPr>
-                        <a:t>Tariffs lower than planned</a:t>
+                        <a:t>Q2 FY26</a:t>
                       </a:r>
                       <a:endParaRPr lang="en-US" sz="1200" dirty="0">
                         <a:latin typeface="Arial" charset="0"/>
@@ -5142,7 +6222,7 @@
                     <a:bodyPr/>
                     <a:lstStyle/>
                     <a:p>
-                      <a:pPr indent="0" marL="0">
+                      <a:pPr algn="r" indent="0" marL="0">
                         <a:buNone/>
                       </a:pPr>
                       <a:r>
@@ -5154,7 +6234,7 @@
                           <a:ea typeface="Arial" pitchFamily="34" charset="-122"/>
                           <a:cs typeface="Arial" pitchFamily="34" charset="-120"/>
                         </a:rPr>
-                        <a:t>About 11.4% blended in force vs 15% plan; worth about +$0.08 to $0.12 of FY28 EPS</a:t>
+                        <a:t>0%</a:t>
                       </a:r>
                       <a:endParaRPr lang="en-US" sz="1200" dirty="0">
                         <a:latin typeface="Arial" charset="0"/>
@@ -5189,19 +6269,19 @@
                     <a:bodyPr/>
                     <a:lstStyle/>
                     <a:p>
-                      <a:pPr indent="0" marL="0">
+                      <a:pPr algn="r" indent="0" marL="0">
                         <a:buNone/>
                       </a:pPr>
                       <a:r>
                         <a:rPr lang="en-US" sz="1200" dirty="0">
                           <a:solidFill>
-                            <a:srgbClr val="1F2933"/>
-                          </a:solidFill>
-                          <a:latin typeface="Arial" pitchFamily="34" charset="0"/>
-                          <a:ea typeface="Arial" pitchFamily="34" charset="-122"/>
-                          <a:cs typeface="Arial" pitchFamily="34" charset="-120"/>
-                        </a:rPr>
-                        <a:t>Probably in the Oct 1 guide already; FY28 tail is two-sided (about +/-$0.10 to $0.25)</a:t>
+                            <a:srgbClr val="A4262C"/>
+                          </a:solidFill>
+                          <a:latin typeface="Arial" pitchFamily="34" charset="0"/>
+                          <a:ea typeface="Arial" pitchFamily="34" charset="-122"/>
+                          <a:cs typeface="Arial" pitchFamily="34" charset="-120"/>
+                        </a:rPr>
+                        <a:t>-1</a:t>
                       </a:r>
                       <a:endParaRPr lang="en-US" sz="1200" dirty="0">
                         <a:latin typeface="Arial" charset="0"/>
@@ -5232,7 +6312,7 @@
                   </a:tcPr>
                 </a:tc>
               </a:tr>
-              <a:tr h="777240">
+              <a:tr h="365760">
                 <a:tc>
                   <a:txBody>
                     <a:bodyPr/>
@@ -5242,7 +6322,7 @@
                         <a:buNone/>
                       </a:pPr>
                       <a:r>
-                        <a:rPr lang="en-US" sz="1200" b="1" dirty="0">
+                        <a:rPr lang="en-US" sz="1200" dirty="0">
                           <a:solidFill>
                             <a:srgbClr val="1F2933"/>
                           </a:solidFill>
@@ -5250,7 +6330,7 @@
                           <a:ea typeface="Arial" pitchFamily="34" charset="-122"/>
                           <a:cs typeface="Arial" pitchFamily="34" charset="-120"/>
                         </a:rPr>
-                        <a:t>Crowded short</a:t>
+                        <a:t>Q3 FY26</a:t>
                       </a:r>
                       <a:endParaRPr lang="en-US" sz="1200" dirty="0">
                         <a:latin typeface="Arial" charset="0"/>
@@ -5285,19 +6365,19 @@
                     <a:bodyPr/>
                     <a:lstStyle/>
                     <a:p>
-                      <a:pPr indent="0" marL="0">
+                      <a:pPr algn="r" indent="0" marL="0">
                         <a:buNone/>
                       </a:pPr>
                       <a:r>
                         <a:rPr lang="en-US" sz="1200" dirty="0">
                           <a:solidFill>
-                            <a:srgbClr val="1F2933"/>
-                          </a:solidFill>
-                          <a:latin typeface="Arial" pitchFamily="34" charset="0"/>
-                          <a:ea typeface="Arial" pitchFamily="34" charset="-122"/>
-                          <a:cs typeface="Arial" pitchFamily="34" charset="-120"/>
-                        </a:rPr>
-                        <a:t>99.2M shares short, 8.2% of tradable shares; 2.6 to 3.8 days to cover; borrow about 0.4% to 0.5%</a:t>
+                            <a:srgbClr val="A4262C"/>
+                          </a:solidFill>
+                          <a:latin typeface="Arial" pitchFamily="34" charset="0"/>
+                          <a:ea typeface="Arial" pitchFamily="34" charset="-122"/>
+                          <a:cs typeface="Arial" pitchFamily="34" charset="-120"/>
+                        </a:rPr>
+                        <a:t>-2%</a:t>
                       </a:r>
                       <a:endParaRPr lang="en-US" sz="1200" dirty="0">
                         <a:latin typeface="Arial" charset="0"/>
@@ -5332,7 +6412,7 @@
                     <a:bodyPr/>
                     <a:lstStyle/>
                     <a:p>
-                      <a:pPr indent="0" marL="0">
+                      <a:pPr algn="r" indent="0" marL="0">
                         <a:buNone/>
                       </a:pPr>
                       <a:r>
@@ -5344,7 +6424,7 @@
                           <a:ea typeface="Arial" pitchFamily="34" charset="-122"/>
                           <a:cs typeface="Arial" pitchFamily="34" charset="-120"/>
                         </a:rPr>
-                        <a:t>Not a squeeze setup; shorts won 81 of 119 at 6 months after past records, with a fat right tail. Use puts</a:t>
+                        <a:t>+1</a:t>
                       </a:r>
                       <a:endParaRPr lang="en-US" sz="1200" dirty="0">
                         <a:latin typeface="Arial" charset="0"/>
@@ -5375,7 +6455,7 @@
                   </a:tcPr>
                 </a:tc>
               </a:tr>
-              <a:tr h="594360">
+              <a:tr h="365760">
                 <a:tc>
                   <a:txBody>
                     <a:bodyPr/>
@@ -5385,7 +6465,7 @@
                         <a:buNone/>
                       </a:pPr>
                       <a:r>
-                        <a:rPr lang="en-US" sz="1200" b="1" dirty="0">
+                        <a:rPr lang="en-US" sz="1200" dirty="0">
                           <a:solidFill>
                             <a:srgbClr val="1F2933"/>
                           </a:solidFill>
@@ -5393,7 +6473,7 @@
                           <a:ea typeface="Arial" pitchFamily="34" charset="-122"/>
                           <a:cs typeface="Arial" pitchFamily="34" charset="-120"/>
                         </a:rPr>
-                        <a:t>Insider buying</a:t>
+                        <a:t>Q1 FY27</a:t>
                       </a:r>
                       <a:endParaRPr lang="en-US" sz="1200" dirty="0">
                         <a:latin typeface="Arial" charset="0"/>
@@ -5428,19 +6508,19 @@
                     <a:bodyPr/>
                     <a:lstStyle/>
                     <a:p>
-                      <a:pPr indent="0" marL="0">
-                        <a:buNone/>
-                      </a:pPr>
-                      <a:r>
-                        <a:rPr lang="en-US" sz="1200" dirty="0">
-                          <a:solidFill>
-                            <a:srgbClr val="1F2933"/>
-                          </a:solidFill>
-                          <a:latin typeface="Arial" pitchFamily="34" charset="0"/>
-                          <a:ea typeface="Arial" pitchFamily="34" charset="-122"/>
-                          <a:cs typeface="Arial" pitchFamily="34" charset="-120"/>
-                        </a:rPr>
-                        <a:t>$5.96M (2025) and $2.73M (2026 YTD), largest in 20 years</a:t>
+                      <a:pPr algn="r" indent="0" marL="0">
+                        <a:buNone/>
+                      </a:pPr>
+                      <a:r>
+                        <a:rPr lang="en-US" sz="1200" b="1" dirty="0">
+                          <a:solidFill>
+                            <a:srgbClr val="A4262C"/>
+                          </a:solidFill>
+                          <a:latin typeface="Arial" pitchFamily="34" charset="0"/>
+                          <a:ea typeface="Arial" pitchFamily="34" charset="-122"/>
+                          <a:cs typeface="Arial" pitchFamily="34" charset="-120"/>
+                        </a:rPr>
+                        <a:t>-5%</a:t>
                       </a:r>
                       <a:endParaRPr lang="en-US" sz="1200" dirty="0">
                         <a:latin typeface="Arial" charset="0"/>
@@ -5475,19 +6555,19 @@
                     <a:bodyPr/>
                     <a:lstStyle/>
                     <a:p>
-                      <a:pPr indent="0" marL="0">
+                      <a:pPr algn="r" indent="0" marL="0">
                         <a:buNone/>
                       </a:pPr>
                       <a:r>
                         <a:rPr lang="en-US" sz="1200" dirty="0">
                           <a:solidFill>
-                            <a:srgbClr val="1F2933"/>
-                          </a:solidFill>
-                          <a:latin typeface="Arial" pitchFamily="34" charset="0"/>
-                          <a:ea typeface="Arial" pitchFamily="34" charset="-122"/>
-                          <a:cs typeface="Arial" pitchFamily="34" charset="-120"/>
-                        </a:rPr>
-                        <a:t>Did not predict returns historically; ex-CFO filed two Form 144 sale notices</a:t>
+                            <a:srgbClr val="A4262C"/>
+                          </a:solidFill>
+                          <a:latin typeface="Arial" pitchFamily="34" charset="0"/>
+                          <a:ea typeface="Arial" pitchFamily="34" charset="-122"/>
+                          <a:cs typeface="Arial" pitchFamily="34" charset="-120"/>
+                        </a:rPr>
+                        <a:t>-1</a:t>
                       </a:r>
                       <a:endParaRPr lang="en-US" sz="1200" dirty="0">
                         <a:latin typeface="Arial" charset="0"/>
@@ -5518,156 +6598,52 @@
                   </a:tcPr>
                 </a:tc>
               </a:tr>
-              <a:tr h="502920">
-                <a:tc>
-                  <a:txBody>
-                    <a:bodyPr/>
-                    <a:lstStyle/>
-                    <a:p>
-                      <a:pPr indent="0" marL="0">
-                        <a:buNone/>
-                      </a:pPr>
-                      <a:r>
-                        <a:rPr lang="en-US" sz="1200" b="1" dirty="0">
-                          <a:solidFill>
-                            <a:srgbClr val="1F2933"/>
-                          </a:solidFill>
-                          <a:latin typeface="Arial" pitchFamily="34" charset="0"/>
-                          <a:ea typeface="Arial" pitchFamily="34" charset="-122"/>
-                          <a:cs typeface="Arial" pitchFamily="34" charset="-120"/>
-                        </a:rPr>
-                        <a:t>Guidance is beaten</a:t>
-                      </a:r>
-                      <a:endParaRPr lang="en-US" sz="1200" dirty="0">
-                        <a:latin typeface="Arial" charset="0"/>
-                        <a:ea typeface="Arial" charset="0"/>
-                        <a:cs typeface="Arial" charset="0"/>
-                      </a:endParaRPr>
-                    </a:p>
-                  </a:txBody>
-                  <a:tcPr marL="91440" marR="91440" marT="45720" marB="45720" anchor="ctr">
-                    <a:lnL w="0" cap="flat" cmpd="sng" algn="ctr">
-                      <a:noFill/>
-                    </a:lnL>
-                    <a:lnR w="0" cap="flat" cmpd="sng" algn="ctr">
-                      <a:noFill/>
-                    </a:lnR>
-                    <a:lnT w="0" cap="flat" cmpd="sng" algn="ctr">
-                      <a:noFill/>
-                    </a:lnT>
-                    <a:lnB w="6350" cap="flat" cmpd="sng" algn="ctr">
-                      <a:solidFill>
-                        <a:srgbClr val="C9CED6"/>
-                      </a:solidFill>
-                      <a:prstDash val="solid"/>
-                      <a:round/>
-                      <a:headEnd type="none" w="med" len="med"/>
-                      <a:tailEnd type="none" w="med" len="med"/>
-                    </a:lnB>
-                  </a:tcPr>
-                </a:tc>
-                <a:tc>
-                  <a:txBody>
-                    <a:bodyPr/>
-                    <a:lstStyle/>
-                    <a:p>
-                      <a:pPr indent="0" marL="0">
-                        <a:buNone/>
-                      </a:pPr>
-                      <a:r>
-                        <a:rPr lang="en-US" sz="1200" dirty="0">
-                          <a:solidFill>
-                            <a:srgbClr val="1F2933"/>
-                          </a:solidFill>
-                          <a:latin typeface="Arial" pitchFamily="34" charset="0"/>
-                          <a:ea typeface="Arial" pitchFamily="34" charset="-122"/>
-                          <a:cs typeface="Arial" pitchFamily="34" charset="-120"/>
-                        </a:rPr>
-                        <a:t>Quarterly guides met or beaten 14 of 14 times under Hill</a:t>
-                      </a:r>
-                      <a:endParaRPr lang="en-US" sz="1200" dirty="0">
-                        <a:latin typeface="Arial" charset="0"/>
-                        <a:ea typeface="Arial" charset="0"/>
-                        <a:cs typeface="Arial" charset="0"/>
-                      </a:endParaRPr>
-                    </a:p>
-                  </a:txBody>
-                  <a:tcPr marL="91440" marR="91440" marT="45720" marB="45720" anchor="ctr">
-                    <a:lnL w="0" cap="flat" cmpd="sng" algn="ctr">
-                      <a:noFill/>
-                    </a:lnL>
-                    <a:lnR w="0" cap="flat" cmpd="sng" algn="ctr">
-                      <a:noFill/>
-                    </a:lnR>
-                    <a:lnT w="0" cap="flat" cmpd="sng" algn="ctr">
-                      <a:noFill/>
-                    </a:lnT>
-                    <a:lnB w="6350" cap="flat" cmpd="sng" algn="ctr">
-                      <a:solidFill>
-                        <a:srgbClr val="C9CED6"/>
-                      </a:solidFill>
-                      <a:prstDash val="solid"/>
-                      <a:round/>
-                      <a:headEnd type="none" w="med" len="med"/>
-                      <a:tailEnd type="none" w="med" len="med"/>
-                    </a:lnB>
-                  </a:tcPr>
-                </a:tc>
-                <a:tc>
-                  <a:txBody>
-                    <a:bodyPr/>
-                    <a:lstStyle/>
-                    <a:p>
-                      <a:pPr indent="0" marL="0">
-                        <a:buNone/>
-                      </a:pPr>
-                      <a:r>
-                        <a:rPr lang="en-US" sz="1200" dirty="0">
-                          <a:solidFill>
-                            <a:srgbClr val="1F2933"/>
-                          </a:solidFill>
-                          <a:latin typeface="Arial" pitchFamily="34" charset="0"/>
-                          <a:ea typeface="Arial" pitchFamily="34" charset="-122"/>
-                          <a:cs typeface="Arial" pitchFamily="34" charset="-120"/>
-                        </a:rPr>
-                        <a:t>We do not rely on a Q2 miss; the thesis is FY28</a:t>
-                      </a:r>
-                      <a:endParaRPr lang="en-US" sz="1200" dirty="0">
-                        <a:latin typeface="Arial" charset="0"/>
-                        <a:ea typeface="Arial" charset="0"/>
-                        <a:cs typeface="Arial" charset="0"/>
-                      </a:endParaRPr>
-                    </a:p>
-                  </a:txBody>
-                  <a:tcPr marL="91440" marR="91440" marT="45720" marB="45720" anchor="ctr">
-                    <a:lnL w="0" cap="flat" cmpd="sng" algn="ctr">
-                      <a:noFill/>
-                    </a:lnL>
-                    <a:lnR w="0" cap="flat" cmpd="sng" algn="ctr">
-                      <a:noFill/>
-                    </a:lnR>
-                    <a:lnT w="0" cap="flat" cmpd="sng" algn="ctr">
-                      <a:noFill/>
-                    </a:lnT>
-                    <a:lnB w="6350" cap="flat" cmpd="sng" algn="ctr">
-                      <a:solidFill>
-                        <a:srgbClr val="C9CED6"/>
-                      </a:solidFill>
-                      <a:prstDash val="solid"/>
-                      <a:round/>
-                      <a:headEnd type="none" w="med" len="med"/>
-                      <a:tailEnd type="none" w="med" len="med"/>
-                    </a:lnB>
-                  </a:tcPr>
-                </a:tc>
-              </a:tr>
             </a:tbl>
           </a:graphicData>
         </a:graphic>
       </p:graphicFrame>
       <p:sp>
         <p:nvSpPr>
-          <p:cNvPr id="5" name="Source"/>
+          <p:cNvPr id="7" name="Text 2"/>
+          <p:cNvSpPr txBox="1"/>
+          <p:nvPr/>
+        </p:nvSpPr>
+        <p:spPr>
+          <a:xfrm>
+            <a:off x="7498080" y="3977640"/>
+            <a:ext cx="4142232" cy="1463040"/>
+          </a:xfrm>
+          <a:prstGeom prst="rect">
+            <a:avLst/>
+          </a:prstGeom>
+          <a:noFill/>
+          <a:ln/>
+        </p:spPr>
+        <p:txBody>
+          <a:bodyPr wrap="square" lIns="0" tIns="0" rIns="0" bIns="0" rtlCol="0" anchor="t"/>
+          <a:lstStyle/>
+          <a:p>
+            <a:pPr indent="0" marL="0">
+              <a:buNone/>
+            </a:pPr>
+            <a:r>
+              <a:rPr lang="en-US" sz="1400" b="1" dirty="0">
+                <a:solidFill>
+                  <a:srgbClr val="0B2A4A"/>
+                </a:solidFill>
+                <a:latin typeface="Arial" pitchFamily="34" charset="0"/>
+                <a:ea typeface="Arial" pitchFamily="34" charset="-122"/>
+                <a:cs typeface="Arial" pitchFamily="34" charset="-120"/>
+              </a:rPr>
+              <a:t>Seven years, zero unit growth. The FY28 consensus needs the rest of Nike outside China to grow 3% to 4%, in units or price, while both are falling.</a:t>
+            </a:r>
+            <a:endParaRPr lang="en-US" sz="1400" dirty="0"/>
+          </a:p>
+        </p:txBody>
+      </p:sp>
+      <p:sp>
+        <p:nvSpPr>
+          <p:cNvPr id="8" name="Source"/>
           <p:cNvSpPr txBox="1"/>
           <p:nvPr/>
         </p:nvSpPr>
@@ -5698,7 +6674,7 @@
                 <a:ea typeface="Arial" pitchFamily="34" charset="-122"/>
                 <a:cs typeface="Arial" pitchFamily="34" charset="-120"/>
               </a:rPr>
-              <a:t>Sources: Dick's/Foot Locker review feed (Jun to Jul 2026); tariff gap sizing (USTR Section 301 notice, Jul 2026; Nike 10-Q); FINRA (Sep 30, 2026), Ortex, Interactive Brokers borrow data; SEC Form 4 and 13F data; earnings call analysis.</a:t>
+              <a:t>Sources: Nike 10-Ks FY16 to FY26 (NIKE Brand footwear unit and ASP percent changes, e.g. FY26 10-K p.33) and 10-Qs through Q1 FY27 (p.23); indices and regional split are team arithmetic (research_notes/Smoking gun hunt/G3_units_factories.md). Q4 quarters are not disclosed.</a:t>
             </a:r>
             <a:endParaRPr lang="en-US" sz="1000" dirty="0"/>
           </a:p>
@@ -5812,9 +6788,64 @@
                 <a:ea typeface="Arial" pitchFamily="34" charset="-122"/>
                 <a:cs typeface="Arial" pitchFamily="34" charset="-120"/>
               </a:rPr>
-              <a:t>Investor Day on Nov 16 to 17 is the decisive event, two days before finals</a:t>
+              <a:t>Independent data contradicts the 'deliberate' explanation for digital, and Nike has withdrawn the disclosures that would settle the rest</a:t>
             </a:r>
             <a:endParaRPr lang="en-US" sz="2400" dirty="0"/>
+          </a:p>
+        </p:txBody>
+      </p:sp>
+      <p:graphicFrame>
+        <p:nvGraphicFramePr>
+          <p:cNvPr id="4" name="Chart 0" descr=""/>
+          <p:cNvGraphicFramePr/>
+          <p:nvPr/>
+        </p:nvGraphicFramePr>
+        <p:xfrm>
+          <a:off x="548640" y="1508760"/>
+          <a:ext cx="5577840" cy="4160520"/>
+        </p:xfrm>
+        <a:graphic xmlns:a="http://schemas.openxmlformats.org/drawingml/2006/main">
+          <a:graphicData uri="http://schemas.openxmlformats.org/drawingml/2006/chart">
+            <c:chart xmlns:c="http://schemas.openxmlformats.org/drawingml/2006/chart" r:id="rId1"/>
+          </a:graphicData>
+        </a:graphic>
+      </p:graphicFrame>
+      <p:sp>
+        <p:nvSpPr>
+          <p:cNvPr id="5" name="Text 1"/>
+          <p:cNvSpPr txBox="1"/>
+          <p:nvPr/>
+        </p:nvSpPr>
+        <p:spPr>
+          <a:xfrm>
+            <a:off x="6492240" y="1600200"/>
+            <a:ext cx="5120640" cy="292608"/>
+          </a:xfrm>
+          <a:prstGeom prst="rect">
+            <a:avLst/>
+          </a:prstGeom>
+          <a:noFill/>
+          <a:ln/>
+        </p:spPr>
+        <p:txBody>
+          <a:bodyPr wrap="square" lIns="0" tIns="0" rIns="0" bIns="0" rtlCol="0" anchor="ctr"/>
+          <a:lstStyle/>
+          <a:p>
+            <a:pPr indent="0" marL="0">
+              <a:buNone/>
+            </a:pPr>
+            <a:r>
+              <a:rPr lang="en-US" sz="1200" b="1" dirty="0">
+                <a:solidFill>
+                  <a:srgbClr val="0B2A4A"/>
+                </a:solidFill>
+                <a:latin typeface="Arial" pitchFamily="34" charset="0"/>
+                <a:ea typeface="Arial" pitchFamily="34" charset="-122"/>
+                <a:cs typeface="Arial" pitchFamily="34" charset="-120"/>
+              </a:rPr>
+              <a:t>What else the forensic pass found (Nike filings)</a:t>
+            </a:r>
+            <a:endParaRPr lang="en-US" sz="1200" dirty="0"/>
           </a:p>
         </p:txBody>
       </p:sp>
@@ -5833,20 +6864,18 @@
           </p:nvPr>
         </p:nvGraphicFramePr>
         <p:xfrm>
-          <a:off x="548640" y="1463040"/>
-          <a:ext cx="11091672" cy="914400"/>
+          <a:off x="6492240" y="1965960"/>
+          <a:ext cx="5148072" cy="914400"/>
         </p:xfrm>
         <a:graphic>
           <a:graphicData uri="http://schemas.openxmlformats.org/drawingml/2006/table">
             <a:tbl>
               <a:tblPr/>
               <a:tblGrid>
-                <a:gridCol w="1554480"/>
-                <a:gridCol w="2468880"/>
-                <a:gridCol w="3749040"/>
-                <a:gridCol w="3319272"/>
+                <a:gridCol w="1417320"/>
+                <a:gridCol w="3730752"/>
               </a:tblGrid>
-              <a:tr h="347472">
+              <a:tr h="329184">
                 <a:tc>
                   <a:txBody>
                     <a:bodyPr/>
@@ -5864,7 +6893,7 @@
                           <a:ea typeface="Arial" pitchFamily="34" charset="-122"/>
                           <a:cs typeface="Arial" pitchFamily="34" charset="-120"/>
                         </a:rPr>
-                        <a:t>Date</a:t>
+                        <a:t>Item</a:t>
                       </a:r>
                       <a:endParaRPr lang="en-US" sz="1200" dirty="0">
                         <a:latin typeface="Arial" charset="0"/>
@@ -5908,7 +6937,7 @@
                           <a:ea typeface="Arial" pitchFamily="34" charset="-122"/>
                           <a:cs typeface="Arial" pitchFamily="34" charset="-120"/>
                         </a:rPr>
-                        <a:t>Event</a:t>
+                        <a:t>Finding</a:t>
                       </a:r>
                       <a:endParaRPr lang="en-US" sz="1200" dirty="0">
                         <a:latin typeface="Arial" charset="0"/>
@@ -5935,114 +6964,26 @@
                     </a:solidFill>
                   </a:tcPr>
                 </a:tc>
-                <a:tc>
-                  <a:txBody>
-                    <a:bodyPr/>
-                    <a:lstStyle/>
-                    <a:p>
-                      <a:pPr algn="l" indent="0" marL="0">
+              </a:tr>
+              <a:tr h="960120">
+                <a:tc>
+                  <a:txBody>
+                    <a:bodyPr/>
+                    <a:lstStyle/>
+                    <a:p>
+                      <a:pPr indent="0" marL="0">
                         <a:buNone/>
                       </a:pPr>
                       <a:r>
                         <a:rPr lang="en-US" sz="1200" b="1" dirty="0">
                           <a:solidFill>
-                            <a:srgbClr val="FFFFFF"/>
-                          </a:solidFill>
-                          <a:latin typeface="Arial" pitchFamily="34" charset="0"/>
-                          <a:ea typeface="Arial" pitchFamily="34" charset="-122"/>
-                          <a:cs typeface="Arial" pitchFamily="34" charset="-120"/>
-                        </a:rPr>
-                        <a:t>Supports the short if</a:t>
-                      </a:r>
-                      <a:endParaRPr lang="en-US" sz="1200" dirty="0">
-                        <a:latin typeface="Arial" charset="0"/>
-                        <a:ea typeface="Arial" charset="0"/>
-                        <a:cs typeface="Arial" charset="0"/>
-                      </a:endParaRPr>
-                    </a:p>
-                  </a:txBody>
-                  <a:tcPr marL="91440" marR="91440" marT="45720" marB="45720" anchor="ctr">
-                    <a:lnL w="0" cap="flat" cmpd="sng" algn="ctr">
-                      <a:noFill/>
-                    </a:lnL>
-                    <a:lnR w="0" cap="flat" cmpd="sng" algn="ctr">
-                      <a:noFill/>
-                    </a:lnR>
-                    <a:lnT w="0" cap="flat" cmpd="sng" algn="ctr">
-                      <a:noFill/>
-                    </a:lnT>
-                    <a:lnB w="0" cap="flat" cmpd="sng" algn="ctr">
-                      <a:noFill/>
-                    </a:lnB>
-                    <a:solidFill>
-                      <a:srgbClr val="0B2A4A"/>
-                    </a:solidFill>
-                  </a:tcPr>
-                </a:tc>
-                <a:tc>
-                  <a:txBody>
-                    <a:bodyPr/>
-                    <a:lstStyle/>
-                    <a:p>
-                      <a:pPr algn="l" indent="0" marL="0">
-                        <a:buNone/>
-                      </a:pPr>
-                      <a:r>
-                        <a:rPr lang="en-US" sz="1200" b="1" dirty="0">
-                          <a:solidFill>
-                            <a:srgbClr val="FFFFFF"/>
-                          </a:solidFill>
-                          <a:latin typeface="Arial" pitchFamily="34" charset="0"/>
-                          <a:ea typeface="Arial" pitchFamily="34" charset="-122"/>
-                          <a:cs typeface="Arial" pitchFamily="34" charset="-120"/>
-                        </a:rPr>
-                        <a:t>Supports a long if</a:t>
-                      </a:r>
-                      <a:endParaRPr lang="en-US" sz="1200" dirty="0">
-                        <a:latin typeface="Arial" charset="0"/>
-                        <a:ea typeface="Arial" charset="0"/>
-                        <a:cs typeface="Arial" charset="0"/>
-                      </a:endParaRPr>
-                    </a:p>
-                  </a:txBody>
-                  <a:tcPr marL="91440" marR="91440" marT="45720" marB="45720" anchor="ctr">
-                    <a:lnL w="0" cap="flat" cmpd="sng" algn="ctr">
-                      <a:noFill/>
-                    </a:lnL>
-                    <a:lnR w="0" cap="flat" cmpd="sng" algn="ctr">
-                      <a:noFill/>
-                    </a:lnR>
-                    <a:lnT w="0" cap="flat" cmpd="sng" algn="ctr">
-                      <a:noFill/>
-                    </a:lnT>
-                    <a:lnB w="0" cap="flat" cmpd="sng" algn="ctr">
-                      <a:noFill/>
-                    </a:lnB>
-                    <a:solidFill>
-                      <a:srgbClr val="0B2A4A"/>
-                    </a:solidFill>
-                  </a:tcPr>
-                </a:tc>
-              </a:tr>
-              <a:tr h="548640">
-                <a:tc>
-                  <a:txBody>
-                    <a:bodyPr/>
-                    <a:lstStyle/>
-                    <a:p>
-                      <a:pPr indent="0" marL="0">
-                        <a:buNone/>
-                      </a:pPr>
-                      <a:r>
-                        <a:rPr lang="en-US" sz="1200" dirty="0">
-                          <a:solidFill>
                             <a:srgbClr val="1F2933"/>
                           </a:solidFill>
                           <a:latin typeface="Arial" pitchFamily="34" charset="0"/>
                           <a:ea typeface="Arial" pitchFamily="34" charset="-122"/>
                           <a:cs typeface="Arial" pitchFamily="34" charset="-120"/>
                         </a:rPr>
-                        <a:t>Oct 28</a:t>
+                        <a:t>Disclosures withdrawn</a:t>
                       </a:r>
                       <a:endParaRPr lang="en-US" sz="1200" dirty="0">
                         <a:latin typeface="Arial" charset="0"/>
@@ -6081,7 +7022,7 @@
                         <a:buNone/>
                       </a:pPr>
                       <a:r>
-                        <a:rPr lang="en-US" sz="1200" b="1" dirty="0">
+                        <a:rPr lang="en-US" sz="1200" dirty="0">
                           <a:solidFill>
                             <a:srgbClr val="1F2933"/>
                           </a:solidFill>
@@ -6089,7 +7030,7 @@
                           <a:ea typeface="Arial" pitchFamily="34" charset="-122"/>
                           <a:cs typeface="Arial" pitchFamily="34" charset="-120"/>
                         </a:rPr>
-                        <a:t>Topsports interim results</a:t>
+                        <a:t>16 KPI disclosure families dropped in 9 quarters vs about 5 in the prior 24; 11 of 12 with a clear direction were deteriorating (receivables by segment, returns-reserve rollforward, comparable store sales, Men's/Women's/Kids' split, ASP line of the margin bridge)</a:t>
                       </a:r>
                       <a:endParaRPr lang="en-US" sz="1200" dirty="0">
                         <a:latin typeface="Arial" charset="0"/>
@@ -6119,6 +7060,8 @@
                     </a:lnB>
                   </a:tcPr>
                 </a:tc>
+              </a:tr>
+              <a:tr h="731520">
                 <a:tc>
                   <a:txBody>
                     <a:bodyPr/>
@@ -6128,7 +7071,7 @@
                         <a:buNone/>
                       </a:pPr>
                       <a:r>
-                        <a:rPr lang="en-US" sz="1200" dirty="0">
+                        <a:rPr lang="en-US" sz="1200" b="1" dirty="0">
                           <a:solidFill>
                             <a:srgbClr val="1F2933"/>
                           </a:solidFill>
@@ -6136,7 +7079,7 @@
                           <a:ea typeface="Arial" pitchFamily="34" charset="-122"/>
                           <a:cs typeface="Arial" pitchFamily="34" charset="-120"/>
                         </a:rPr>
-                        <a:t>Door decline continues; China wholesale weak</a:t>
+                        <a:t>Wholesale receivable days</a:t>
                       </a:r>
                       <a:endParaRPr lang="en-US" sz="1200" dirty="0">
                         <a:latin typeface="Arial" charset="0"/>
@@ -6183,7 +7126,7 @@
                           <a:ea typeface="Arial" pitchFamily="34" charset="-122"/>
                           <a:cs typeface="Arial" pitchFamily="34" charset="-120"/>
                         </a:rPr>
-                        <a:t>Doors stabilize</a:t>
+                        <a:t>+4.5 to +9.7 days year on year, Q3 FY26 to Q1 FY27, after tariff-refund and FX adjustments; larger than any peer; cause not separable (timing, slow pay or longer terms)</a:t>
                       </a:r>
                       <a:endParaRPr lang="en-US" sz="1200" dirty="0">
                         <a:latin typeface="Arial" charset="0"/>
@@ -6214,7 +7157,7 @@
                   </a:tcPr>
                 </a:tc>
               </a:tr>
-              <a:tr h="548640">
+              <a:tr h="731520">
                 <a:tc>
                   <a:txBody>
                     <a:bodyPr/>
@@ -6224,7 +7167,7 @@
                         <a:buNone/>
                       </a:pPr>
                       <a:r>
-                        <a:rPr lang="en-US" sz="1200" dirty="0">
+                        <a:rPr lang="en-US" sz="1200" b="1" dirty="0">
                           <a:solidFill>
                             <a:srgbClr val="1F2933"/>
                           </a:solidFill>
@@ -6232,7 +7175,7 @@
                           <a:ea typeface="Arial" pitchFamily="34" charset="-122"/>
                           <a:cs typeface="Arial" pitchFamily="34" charset="-120"/>
                         </a:rPr>
-                        <a:t>About Nov 10</a:t>
+                        <a:t>Sales-related reserve</a:t>
                       </a:r>
                       <a:endParaRPr lang="en-US" sz="1200" dirty="0">
                         <a:latin typeface="Arial" charset="0"/>
@@ -6271,7 +7214,7 @@
                         <a:buNone/>
                       </a:pPr>
                       <a:r>
-                        <a:rPr lang="en-US" sz="1200" b="1" dirty="0">
+                        <a:rPr lang="en-US" sz="1200" dirty="0">
                           <a:solidFill>
                             <a:srgbClr val="1F2933"/>
                           </a:solidFill>
@@ -6279,7 +7222,7 @@
                           <a:ea typeface="Arial" pitchFamily="34" charset="-122"/>
                           <a:cs typeface="Arial" pitchFamily="34" charset="-120"/>
                         </a:rPr>
-                        <a:t>Feng Tay October revenue</a:t>
+                        <a:t>$1,834M (May 2025) to $1,488M (Aug 2026). Lapping the FY25 build is a tailwind worth up to about $0.30 to $0.43 of FY26 EPS if usage was unchanged, and it fades in FY27</a:t>
                       </a:r>
                       <a:endParaRPr lang="en-US" sz="1200" dirty="0">
                         <a:latin typeface="Arial" charset="0"/>
@@ -6309,6 +7252,8 @@
                     </a:lnB>
                   </a:tcPr>
                 </a:tc>
+              </a:tr>
+              <a:tr h="777240">
                 <a:tc>
                   <a:txBody>
                     <a:bodyPr/>
@@ -6318,7 +7263,7 @@
                         <a:buNone/>
                       </a:pPr>
                       <a:r>
-                        <a:rPr lang="en-US" sz="1200" dirty="0">
+                        <a:rPr lang="en-US" sz="1200" b="1" dirty="0">
                           <a:solidFill>
                             <a:srgbClr val="1F2933"/>
                           </a:solidFill>
@@ -6326,7 +7271,7 @@
                           <a:ea typeface="Arial" pitchFamily="34" charset="-122"/>
                           <a:cs typeface="Arial" pitchFamily="34" charset="-120"/>
                         </a:rPr>
-                        <a:t>Worse than -8% (two-year, USD) while peer factories hold</a:t>
+                        <a:t>Unreserved contingency</a:t>
                       </a:r>
                       <a:endParaRPr lang="en-US" sz="1200" dirty="0">
                         <a:latin typeface="Arial" charset="0"/>
@@ -6373,7 +7318,7 @@
                           <a:ea typeface="Arial" pitchFamily="34" charset="-122"/>
                           <a:cs typeface="Arial" pitchFamily="34" charset="-120"/>
                         </a:rPr>
-                        <a:t>Better than -3%</a:t>
+                        <a:t>Belgian customs claim, EUR 1.5B per Belgian press, no amount or accrual in Nike's filings; bank guarantees rose from $289M (FY22) to about $1.3B (FY26); hearing listed Nov 30</a:t>
                       </a:r>
                       <a:endParaRPr lang="en-US" sz="1200" dirty="0">
                         <a:latin typeface="Arial" charset="0"/>
@@ -6404,773 +7349,13 @@
                   </a:tcPr>
                 </a:tc>
               </a:tr>
-              <a:tr h="502920">
-                <a:tc>
-                  <a:txBody>
-                    <a:bodyPr/>
-                    <a:lstStyle/>
-                    <a:p>
-                      <a:pPr indent="0" marL="0">
-                        <a:buNone/>
-                      </a:pPr>
-                      <a:r>
-                        <a:rPr lang="en-US" sz="1200" dirty="0">
-                          <a:solidFill>
-                            <a:srgbClr val="1F2933"/>
-                          </a:solidFill>
-                          <a:latin typeface="Arial" pitchFamily="34" charset="0"/>
-                          <a:ea typeface="Arial" pitchFamily="34" charset="-122"/>
-                          <a:cs typeface="Arial" pitchFamily="34" charset="-120"/>
-                        </a:rPr>
-                        <a:t>Nov 14 to 20</a:t>
-                      </a:r>
-                      <a:endParaRPr lang="en-US" sz="1200" dirty="0">
-                        <a:latin typeface="Arial" charset="0"/>
-                        <a:ea typeface="Arial" charset="0"/>
-                        <a:cs typeface="Arial" charset="0"/>
-                      </a:endParaRPr>
-                    </a:p>
-                  </a:txBody>
-                  <a:tcPr marL="91440" marR="91440" marT="45720" marB="45720" anchor="ctr">
-                    <a:lnL w="0" cap="flat" cmpd="sng" algn="ctr">
-                      <a:noFill/>
-                    </a:lnL>
-                    <a:lnR w="0" cap="flat" cmpd="sng" algn="ctr">
-                      <a:noFill/>
-                    </a:lnR>
-                    <a:lnT w="0" cap="flat" cmpd="sng" algn="ctr">
-                      <a:noFill/>
-                    </a:lnT>
-                    <a:lnB w="6350" cap="flat" cmpd="sng" algn="ctr">
-                      <a:solidFill>
-                        <a:srgbClr val="C9CED6"/>
-                      </a:solidFill>
-                      <a:prstDash val="solid"/>
-                      <a:round/>
-                      <a:headEnd type="none" w="med" len="med"/>
-                      <a:tailEnd type="none" w="med" len="med"/>
-                    </a:lnB>
-                  </a:tcPr>
-                </a:tc>
-                <a:tc>
-                  <a:txBody>
-                    <a:bodyPr/>
-                    <a:lstStyle/>
-                    <a:p>
-                      <a:pPr indent="0" marL="0">
-                        <a:buNone/>
-                      </a:pPr>
-                      <a:r>
-                        <a:rPr lang="en-US" sz="1200" b="1" dirty="0">
-                          <a:solidFill>
-                            <a:srgbClr val="1F2933"/>
-                          </a:solidFill>
-                          <a:latin typeface="Arial" pitchFamily="34" charset="0"/>
-                          <a:ea typeface="Arial" pitchFamily="34" charset="-122"/>
-                          <a:cs typeface="Arial" pitchFamily="34" charset="-120"/>
-                        </a:rPr>
-                        <a:t>Dividend declaration</a:t>
-                      </a:r>
-                      <a:endParaRPr lang="en-US" sz="1200" dirty="0">
-                        <a:latin typeface="Arial" charset="0"/>
-                        <a:ea typeface="Arial" charset="0"/>
-                        <a:cs typeface="Arial" charset="0"/>
-                      </a:endParaRPr>
-                    </a:p>
-                  </a:txBody>
-                  <a:tcPr marL="91440" marR="91440" marT="45720" marB="45720" anchor="ctr">
-                    <a:lnL w="0" cap="flat" cmpd="sng" algn="ctr">
-                      <a:noFill/>
-                    </a:lnL>
-                    <a:lnR w="0" cap="flat" cmpd="sng" algn="ctr">
-                      <a:noFill/>
-                    </a:lnR>
-                    <a:lnT w="0" cap="flat" cmpd="sng" algn="ctr">
-                      <a:noFill/>
-                    </a:lnT>
-                    <a:lnB w="6350" cap="flat" cmpd="sng" algn="ctr">
-                      <a:solidFill>
-                        <a:srgbClr val="C9CED6"/>
-                      </a:solidFill>
-                      <a:prstDash val="solid"/>
-                      <a:round/>
-                      <a:headEnd type="none" w="med" len="med"/>
-                      <a:tailEnd type="none" w="med" len="med"/>
-                    </a:lnB>
-                  </a:tcPr>
-                </a:tc>
-                <a:tc>
-                  <a:txBody>
-                    <a:bodyPr/>
-                    <a:lstStyle/>
-                    <a:p>
-                      <a:pPr indent="0" marL="0">
-                        <a:buNone/>
-                      </a:pPr>
-                      <a:r>
-                        <a:rPr lang="en-US" sz="1200" dirty="0">
-                          <a:solidFill>
-                            <a:srgbClr val="1F2933"/>
-                          </a:solidFill>
-                          <a:latin typeface="Arial" pitchFamily="34" charset="0"/>
-                          <a:ea typeface="Arial" pitchFamily="34" charset="-122"/>
-                          <a:cs typeface="Arial" pitchFamily="34" charset="-120"/>
-                        </a:rPr>
-                        <a:t>Cut</a:t>
-                      </a:r>
-                      <a:endParaRPr lang="en-US" sz="1200" dirty="0">
-                        <a:latin typeface="Arial" charset="0"/>
-                        <a:ea typeface="Arial" charset="0"/>
-                        <a:cs typeface="Arial" charset="0"/>
-                      </a:endParaRPr>
-                    </a:p>
-                  </a:txBody>
-                  <a:tcPr marL="91440" marR="91440" marT="45720" marB="45720" anchor="ctr">
-                    <a:lnL w="0" cap="flat" cmpd="sng" algn="ctr">
-                      <a:noFill/>
-                    </a:lnL>
-                    <a:lnR w="0" cap="flat" cmpd="sng" algn="ctr">
-                      <a:noFill/>
-                    </a:lnR>
-                    <a:lnT w="0" cap="flat" cmpd="sng" algn="ctr">
-                      <a:noFill/>
-                    </a:lnT>
-                    <a:lnB w="6350" cap="flat" cmpd="sng" algn="ctr">
-                      <a:solidFill>
-                        <a:srgbClr val="C9CED6"/>
-                      </a:solidFill>
-                      <a:prstDash val="solid"/>
-                      <a:round/>
-                      <a:headEnd type="none" w="med" len="med"/>
-                      <a:tailEnd type="none" w="med" len="med"/>
-                    </a:lnB>
-                  </a:tcPr>
-                </a:tc>
-                <a:tc>
-                  <a:txBody>
-                    <a:bodyPr/>
-                    <a:lstStyle/>
-                    <a:p>
-                      <a:pPr indent="0" marL="0">
-                        <a:buNone/>
-                      </a:pPr>
-                      <a:r>
-                        <a:rPr lang="en-US" sz="1200" dirty="0">
-                          <a:solidFill>
-                            <a:srgbClr val="1F2933"/>
-                          </a:solidFill>
-                          <a:latin typeface="Arial" pitchFamily="34" charset="0"/>
-                          <a:ea typeface="Arial" pitchFamily="34" charset="-122"/>
-                          <a:cs typeface="Arial" pitchFamily="34" charset="-120"/>
-                        </a:rPr>
-                        <a:t>Raise well above token level</a:t>
-                      </a:r>
-                      <a:endParaRPr lang="en-US" sz="1200" dirty="0">
-                        <a:latin typeface="Arial" charset="0"/>
-                        <a:ea typeface="Arial" charset="0"/>
-                        <a:cs typeface="Arial" charset="0"/>
-                      </a:endParaRPr>
-                    </a:p>
-                  </a:txBody>
-                  <a:tcPr marL="91440" marR="91440" marT="45720" marB="45720" anchor="ctr">
-                    <a:lnL w="0" cap="flat" cmpd="sng" algn="ctr">
-                      <a:noFill/>
-                    </a:lnL>
-                    <a:lnR w="0" cap="flat" cmpd="sng" algn="ctr">
-                      <a:noFill/>
-                    </a:lnR>
-                    <a:lnT w="0" cap="flat" cmpd="sng" algn="ctr">
-                      <a:noFill/>
-                    </a:lnT>
-                    <a:lnB w="6350" cap="flat" cmpd="sng" algn="ctr">
-                      <a:solidFill>
-                        <a:srgbClr val="C9CED6"/>
-                      </a:solidFill>
-                      <a:prstDash val="solid"/>
-                      <a:round/>
-                      <a:headEnd type="none" w="med" len="med"/>
-                      <a:tailEnd type="none" w="med" len="med"/>
-                    </a:lnB>
-                  </a:tcPr>
-                </a:tc>
-              </a:tr>
-              <a:tr h="640080">
-                <a:tc>
-                  <a:txBody>
-                    <a:bodyPr/>
-                    <a:lstStyle/>
-                    <a:p>
-                      <a:pPr indent="0" marL="0">
-                        <a:buNone/>
-                      </a:pPr>
-                      <a:r>
-                        <a:rPr lang="en-US" sz="1200" b="1" dirty="0">
-                          <a:solidFill>
-                            <a:srgbClr val="A4262C"/>
-                          </a:solidFill>
-                          <a:latin typeface="Arial" pitchFamily="34" charset="0"/>
-                          <a:ea typeface="Arial" pitchFamily="34" charset="-122"/>
-                          <a:cs typeface="Arial" pitchFamily="34" charset="-120"/>
-                        </a:rPr>
-                        <a:t>Nov 16 to 17</a:t>
-                      </a:r>
-                      <a:endParaRPr lang="en-US" sz="1200" dirty="0">
-                        <a:latin typeface="Arial" charset="0"/>
-                        <a:ea typeface="Arial" charset="0"/>
-                        <a:cs typeface="Arial" charset="0"/>
-                      </a:endParaRPr>
-                    </a:p>
-                  </a:txBody>
-                  <a:tcPr marL="91440" marR="91440" marT="45720" marB="45720" anchor="ctr">
-                    <a:lnL w="0" cap="flat" cmpd="sng" algn="ctr">
-                      <a:noFill/>
-                    </a:lnL>
-                    <a:lnR w="0" cap="flat" cmpd="sng" algn="ctr">
-                      <a:noFill/>
-                    </a:lnR>
-                    <a:lnT w="0" cap="flat" cmpd="sng" algn="ctr">
-                      <a:noFill/>
-                    </a:lnT>
-                    <a:lnB w="6350" cap="flat" cmpd="sng" algn="ctr">
-                      <a:solidFill>
-                        <a:srgbClr val="C9CED6"/>
-                      </a:solidFill>
-                      <a:prstDash val="solid"/>
-                      <a:round/>
-                      <a:headEnd type="none" w="med" len="med"/>
-                      <a:tailEnd type="none" w="med" len="med"/>
-                    </a:lnB>
-                  </a:tcPr>
-                </a:tc>
-                <a:tc>
-                  <a:txBody>
-                    <a:bodyPr/>
-                    <a:lstStyle/>
-                    <a:p>
-                      <a:pPr indent="0" marL="0">
-                        <a:buNone/>
-                      </a:pPr>
-                      <a:r>
-                        <a:rPr lang="en-US" sz="1200" b="1" dirty="0">
-                          <a:solidFill>
-                            <a:srgbClr val="1F2933"/>
-                          </a:solidFill>
-                          <a:latin typeface="Arial" pitchFamily="34" charset="0"/>
-                          <a:ea typeface="Arial" pitchFamily="34" charset="-122"/>
-                          <a:cs typeface="Arial" pitchFamily="34" charset="-120"/>
-                        </a:rPr>
-                        <a:t>Nike Investor Day</a:t>
-                      </a:r>
-                      <a:endParaRPr lang="en-US" sz="1200" dirty="0">
-                        <a:latin typeface="Arial" charset="0"/>
-                        <a:ea typeface="Arial" charset="0"/>
-                        <a:cs typeface="Arial" charset="0"/>
-                      </a:endParaRPr>
-                    </a:p>
-                  </a:txBody>
-                  <a:tcPr marL="91440" marR="91440" marT="45720" marB="45720" anchor="ctr">
-                    <a:lnL w="0" cap="flat" cmpd="sng" algn="ctr">
-                      <a:noFill/>
-                    </a:lnL>
-                    <a:lnR w="0" cap="flat" cmpd="sng" algn="ctr">
-                      <a:noFill/>
-                    </a:lnR>
-                    <a:lnT w="0" cap="flat" cmpd="sng" algn="ctr">
-                      <a:noFill/>
-                    </a:lnT>
-                    <a:lnB w="6350" cap="flat" cmpd="sng" algn="ctr">
-                      <a:solidFill>
-                        <a:srgbClr val="C9CED6"/>
-                      </a:solidFill>
-                      <a:prstDash val="solid"/>
-                      <a:round/>
-                      <a:headEnd type="none" w="med" len="med"/>
-                      <a:tailEnd type="none" w="med" len="med"/>
-                    </a:lnB>
-                  </a:tcPr>
-                </a:tc>
-                <a:tc>
-                  <a:txBody>
-                    <a:bodyPr/>
-                    <a:lstStyle/>
-                    <a:p>
-                      <a:pPr indent="0" marL="0">
-                        <a:buNone/>
-                      </a:pPr>
-                      <a:r>
-                        <a:rPr lang="en-US" sz="1200" dirty="0">
-                          <a:solidFill>
-                            <a:srgbClr val="1F2933"/>
-                          </a:solidFill>
-                          <a:latin typeface="Arial" pitchFamily="34" charset="0"/>
-                          <a:ea typeface="Arial" pitchFamily="34" charset="-122"/>
-                          <a:cs typeface="Arial" pitchFamily="34" charset="-120"/>
-                        </a:rPr>
-                        <a:t>FY28 EPS framed below about $1.50, or revenue below flat</a:t>
-                      </a:r>
-                      <a:endParaRPr lang="en-US" sz="1200" dirty="0">
-                        <a:latin typeface="Arial" charset="0"/>
-                        <a:ea typeface="Arial" charset="0"/>
-                        <a:cs typeface="Arial" charset="0"/>
-                      </a:endParaRPr>
-                    </a:p>
-                  </a:txBody>
-                  <a:tcPr marL="91440" marR="91440" marT="45720" marB="45720" anchor="ctr">
-                    <a:lnL w="0" cap="flat" cmpd="sng" algn="ctr">
-                      <a:noFill/>
-                    </a:lnL>
-                    <a:lnR w="0" cap="flat" cmpd="sng" algn="ctr">
-                      <a:noFill/>
-                    </a:lnR>
-                    <a:lnT w="0" cap="flat" cmpd="sng" algn="ctr">
-                      <a:noFill/>
-                    </a:lnT>
-                    <a:lnB w="6350" cap="flat" cmpd="sng" algn="ctr">
-                      <a:solidFill>
-                        <a:srgbClr val="C9CED6"/>
-                      </a:solidFill>
-                      <a:prstDash val="solid"/>
-                      <a:round/>
-                      <a:headEnd type="none" w="med" len="med"/>
-                      <a:tailEnd type="none" w="med" len="med"/>
-                    </a:lnB>
-                  </a:tcPr>
-                </a:tc>
-                <a:tc>
-                  <a:txBody>
-                    <a:bodyPr/>
-                    <a:lstStyle/>
-                    <a:p>
-                      <a:pPr indent="0" marL="0">
-                        <a:buNone/>
-                      </a:pPr>
-                      <a:r>
-                        <a:rPr lang="en-US" sz="1200" dirty="0">
-                          <a:solidFill>
-                            <a:srgbClr val="1F2933"/>
-                          </a:solidFill>
-                          <a:latin typeface="Arial" pitchFamily="34" charset="0"/>
-                          <a:ea typeface="Arial" pitchFamily="34" charset="-122"/>
-                          <a:cs typeface="Arial" pitchFamily="34" charset="-120"/>
-                        </a:rPr>
-                        <a:t>FY28 held, plus FY29 margin target above about 9%</a:t>
-                      </a:r>
-                      <a:endParaRPr lang="en-US" sz="1200" dirty="0">
-                        <a:latin typeface="Arial" charset="0"/>
-                        <a:ea typeface="Arial" charset="0"/>
-                        <a:cs typeface="Arial" charset="0"/>
-                      </a:endParaRPr>
-                    </a:p>
-                  </a:txBody>
-                  <a:tcPr marL="91440" marR="91440" marT="45720" marB="45720" anchor="ctr">
-                    <a:lnL w="0" cap="flat" cmpd="sng" algn="ctr">
-                      <a:noFill/>
-                    </a:lnL>
-                    <a:lnR w="0" cap="flat" cmpd="sng" algn="ctr">
-                      <a:noFill/>
-                    </a:lnR>
-                    <a:lnT w="0" cap="flat" cmpd="sng" algn="ctr">
-                      <a:noFill/>
-                    </a:lnT>
-                    <a:lnB w="6350" cap="flat" cmpd="sng" algn="ctr">
-                      <a:solidFill>
-                        <a:srgbClr val="C9CED6"/>
-                      </a:solidFill>
-                      <a:prstDash val="solid"/>
-                      <a:round/>
-                      <a:headEnd type="none" w="med" len="med"/>
-                      <a:tailEnd type="none" w="med" len="med"/>
-                    </a:lnB>
-                  </a:tcPr>
-                </a:tc>
-              </a:tr>
-              <a:tr h="502920">
-                <a:tc>
-                  <a:txBody>
-                    <a:bodyPr/>
-                    <a:lstStyle/>
-                    <a:p>
-                      <a:pPr indent="0" marL="0">
-                        <a:buNone/>
-                      </a:pPr>
-                      <a:r>
-                        <a:rPr lang="en-US" sz="1200" dirty="0">
-                          <a:solidFill>
-                            <a:srgbClr val="1F2933"/>
-                          </a:solidFill>
-                          <a:latin typeface="Arial" pitchFamily="34" charset="0"/>
-                          <a:ea typeface="Arial" pitchFamily="34" charset="-122"/>
-                          <a:cs typeface="Arial" pitchFamily="34" charset="-120"/>
-                        </a:rPr>
-                        <a:t>Nov 19</a:t>
-                      </a:r>
-                      <a:endParaRPr lang="en-US" sz="1200" dirty="0">
-                        <a:latin typeface="Arial" charset="0"/>
-                        <a:ea typeface="Arial" charset="0"/>
-                        <a:cs typeface="Arial" charset="0"/>
-                      </a:endParaRPr>
-                    </a:p>
-                  </a:txBody>
-                  <a:tcPr marL="91440" marR="91440" marT="45720" marB="45720" anchor="ctr">
-                    <a:lnL w="0" cap="flat" cmpd="sng" algn="ctr">
-                      <a:noFill/>
-                    </a:lnL>
-                    <a:lnR w="0" cap="flat" cmpd="sng" algn="ctr">
-                      <a:noFill/>
-                    </a:lnR>
-                    <a:lnT w="0" cap="flat" cmpd="sng" algn="ctr">
-                      <a:noFill/>
-                    </a:lnT>
-                    <a:lnB w="6350" cap="flat" cmpd="sng" algn="ctr">
-                      <a:solidFill>
-                        <a:srgbClr val="C9CED6"/>
-                      </a:solidFill>
-                      <a:prstDash val="solid"/>
-                      <a:round/>
-                      <a:headEnd type="none" w="med" len="med"/>
-                      <a:tailEnd type="none" w="med" len="med"/>
-                    </a:lnB>
-                  </a:tcPr>
-                </a:tc>
-                <a:tc>
-                  <a:txBody>
-                    <a:bodyPr/>
-                    <a:lstStyle/>
-                    <a:p>
-                      <a:pPr indent="0" marL="0">
-                        <a:buNone/>
-                      </a:pPr>
-                      <a:r>
-                        <a:rPr lang="en-US" sz="1200" b="1" dirty="0">
-                          <a:solidFill>
-                            <a:srgbClr val="1F2933"/>
-                          </a:solidFill>
-                          <a:latin typeface="Arial" pitchFamily="34" charset="0"/>
-                          <a:ea typeface="Arial" pitchFamily="34" charset="-122"/>
-                          <a:cs typeface="Arial" pitchFamily="34" charset="-120"/>
-                        </a:rPr>
-                        <a:t>Finals</a:t>
-                      </a:r>
-                      <a:endParaRPr lang="en-US" sz="1200" dirty="0">
-                        <a:latin typeface="Arial" charset="0"/>
-                        <a:ea typeface="Arial" charset="0"/>
-                        <a:cs typeface="Arial" charset="0"/>
-                      </a:endParaRPr>
-                    </a:p>
-                  </a:txBody>
-                  <a:tcPr marL="91440" marR="91440" marT="45720" marB="45720" anchor="ctr">
-                    <a:lnL w="0" cap="flat" cmpd="sng" algn="ctr">
-                      <a:noFill/>
-                    </a:lnL>
-                    <a:lnR w="0" cap="flat" cmpd="sng" algn="ctr">
-                      <a:noFill/>
-                    </a:lnR>
-                    <a:lnT w="0" cap="flat" cmpd="sng" algn="ctr">
-                      <a:noFill/>
-                    </a:lnT>
-                    <a:lnB w="6350" cap="flat" cmpd="sng" algn="ctr">
-                      <a:solidFill>
-                        <a:srgbClr val="C9CED6"/>
-                      </a:solidFill>
-                      <a:prstDash val="solid"/>
-                      <a:round/>
-                      <a:headEnd type="none" w="med" len="med"/>
-                      <a:tailEnd type="none" w="med" len="med"/>
-                    </a:lnB>
-                  </a:tcPr>
-                </a:tc>
-                <a:tc>
-                  <a:txBody>
-                    <a:bodyPr/>
-                    <a:lstStyle/>
-                    <a:p>
-                      <a:pPr indent="0" marL="0">
-                        <a:buNone/>
-                      </a:pPr>
-                      <a:r>
-                        <a:rPr lang="en-US" sz="1200" dirty="0">
-                          <a:solidFill>
-                            <a:srgbClr val="1F2933"/>
-                          </a:solidFill>
-                          <a:latin typeface="Arial" pitchFamily="34" charset="0"/>
-                          <a:ea typeface="Arial" pitchFamily="34" charset="-122"/>
-                          <a:cs typeface="Arial" pitchFamily="34" charset="-120"/>
-                        </a:rPr>
-                        <a:t>Update pitch for Investor Day</a:t>
-                      </a:r>
-                      <a:endParaRPr lang="en-US" sz="1200" dirty="0">
-                        <a:latin typeface="Arial" charset="0"/>
-                        <a:ea typeface="Arial" charset="0"/>
-                        <a:cs typeface="Arial" charset="0"/>
-                      </a:endParaRPr>
-                    </a:p>
-                  </a:txBody>
-                  <a:tcPr marL="91440" marR="91440" marT="45720" marB="45720" anchor="ctr">
-                    <a:lnL w="0" cap="flat" cmpd="sng" algn="ctr">
-                      <a:noFill/>
-                    </a:lnL>
-                    <a:lnR w="0" cap="flat" cmpd="sng" algn="ctr">
-                      <a:noFill/>
-                    </a:lnR>
-                    <a:lnT w="0" cap="flat" cmpd="sng" algn="ctr">
-                      <a:noFill/>
-                    </a:lnT>
-                    <a:lnB w="6350" cap="flat" cmpd="sng" algn="ctr">
-                      <a:solidFill>
-                        <a:srgbClr val="C9CED6"/>
-                      </a:solidFill>
-                      <a:prstDash val="solid"/>
-                      <a:round/>
-                      <a:headEnd type="none" w="med" len="med"/>
-                      <a:tailEnd type="none" w="med" len="med"/>
-                    </a:lnB>
-                  </a:tcPr>
-                </a:tc>
-                <a:tc>
-                  <a:txBody>
-                    <a:bodyPr/>
-                    <a:lstStyle/>
-                    <a:p>
-                      <a:pPr indent="0" marL="0">
-                        <a:buNone/>
-                      </a:pPr>
-                      <a:r>
-                        <a:rPr lang="en-US" sz="1200" dirty="0">
-                          <a:solidFill>
-                            <a:srgbClr val="1F2933"/>
-                          </a:solidFill>
-                          <a:latin typeface="Arial" pitchFamily="34" charset="0"/>
-                          <a:ea typeface="Arial" pitchFamily="34" charset="-122"/>
-                          <a:cs typeface="Arial" pitchFamily="34" charset="-120"/>
-                        </a:rPr>
-                        <a:t>Update pitch for Investor Day</a:t>
-                      </a:r>
-                      <a:endParaRPr lang="en-US" sz="1200" dirty="0">
-                        <a:latin typeface="Arial" charset="0"/>
-                        <a:ea typeface="Arial" charset="0"/>
-                        <a:cs typeface="Arial" charset="0"/>
-                      </a:endParaRPr>
-                    </a:p>
-                  </a:txBody>
-                  <a:tcPr marL="91440" marR="91440" marT="45720" marB="45720" anchor="ctr">
-                    <a:lnL w="0" cap="flat" cmpd="sng" algn="ctr">
-                      <a:noFill/>
-                    </a:lnL>
-                    <a:lnR w="0" cap="flat" cmpd="sng" algn="ctr">
-                      <a:noFill/>
-                    </a:lnR>
-                    <a:lnT w="0" cap="flat" cmpd="sng" algn="ctr">
-                      <a:noFill/>
-                    </a:lnT>
-                    <a:lnB w="6350" cap="flat" cmpd="sng" algn="ctr">
-                      <a:solidFill>
-                        <a:srgbClr val="C9CED6"/>
-                      </a:solidFill>
-                      <a:prstDash val="solid"/>
-                      <a:round/>
-                      <a:headEnd type="none" w="med" len="med"/>
-                      <a:tailEnd type="none" w="med" len="med"/>
-                    </a:lnB>
-                  </a:tcPr>
-                </a:tc>
-              </a:tr>
-              <a:tr h="548640">
-                <a:tc>
-                  <a:txBody>
-                    <a:bodyPr/>
-                    <a:lstStyle/>
-                    <a:p>
-                      <a:pPr indent="0" marL="0">
-                        <a:buNone/>
-                      </a:pPr>
-                      <a:r>
-                        <a:rPr lang="en-US" sz="1200" dirty="0">
-                          <a:solidFill>
-                            <a:srgbClr val="1F2933"/>
-                          </a:solidFill>
-                          <a:latin typeface="Arial" pitchFamily="34" charset="0"/>
-                          <a:ea typeface="Arial" pitchFamily="34" charset="-122"/>
-                          <a:cs typeface="Arial" pitchFamily="34" charset="-120"/>
-                        </a:rPr>
-                        <a:t>About Dec 17</a:t>
-                      </a:r>
-                      <a:endParaRPr lang="en-US" sz="1200" dirty="0">
-                        <a:latin typeface="Arial" charset="0"/>
-                        <a:ea typeface="Arial" charset="0"/>
-                        <a:cs typeface="Arial" charset="0"/>
-                      </a:endParaRPr>
-                    </a:p>
-                  </a:txBody>
-                  <a:tcPr marL="91440" marR="91440" marT="45720" marB="45720" anchor="ctr">
-                    <a:lnL w="0" cap="flat" cmpd="sng" algn="ctr">
-                      <a:noFill/>
-                    </a:lnL>
-                    <a:lnR w="0" cap="flat" cmpd="sng" algn="ctr">
-                      <a:noFill/>
-                    </a:lnR>
-                    <a:lnT w="0" cap="flat" cmpd="sng" algn="ctr">
-                      <a:noFill/>
-                    </a:lnT>
-                    <a:lnB w="6350" cap="flat" cmpd="sng" algn="ctr">
-                      <a:solidFill>
-                        <a:srgbClr val="C9CED6"/>
-                      </a:solidFill>
-                      <a:prstDash val="solid"/>
-                      <a:round/>
-                      <a:headEnd type="none" w="med" len="med"/>
-                      <a:tailEnd type="none" w="med" len="med"/>
-                    </a:lnB>
-                  </a:tcPr>
-                </a:tc>
-                <a:tc>
-                  <a:txBody>
-                    <a:bodyPr/>
-                    <a:lstStyle/>
-                    <a:p>
-                      <a:pPr indent="0" marL="0">
-                        <a:buNone/>
-                      </a:pPr>
-                      <a:r>
-                        <a:rPr lang="en-US" sz="1200" b="1" dirty="0">
-                          <a:solidFill>
-                            <a:srgbClr val="1F2933"/>
-                          </a:solidFill>
-                          <a:latin typeface="Arial" pitchFamily="34" charset="0"/>
-                          <a:ea typeface="Arial" pitchFamily="34" charset="-122"/>
-                          <a:cs typeface="Arial" pitchFamily="34" charset="-120"/>
-                        </a:rPr>
-                        <a:t>Q2 FY27 results</a:t>
-                      </a:r>
-                      <a:endParaRPr lang="en-US" sz="1200" dirty="0">
-                        <a:latin typeface="Arial" charset="0"/>
-                        <a:ea typeface="Arial" charset="0"/>
-                        <a:cs typeface="Arial" charset="0"/>
-                      </a:endParaRPr>
-                    </a:p>
-                  </a:txBody>
-                  <a:tcPr marL="91440" marR="91440" marT="45720" marB="45720" anchor="ctr">
-                    <a:lnL w="0" cap="flat" cmpd="sng" algn="ctr">
-                      <a:noFill/>
-                    </a:lnL>
-                    <a:lnR w="0" cap="flat" cmpd="sng" algn="ctr">
-                      <a:noFill/>
-                    </a:lnR>
-                    <a:lnT w="0" cap="flat" cmpd="sng" algn="ctr">
-                      <a:noFill/>
-                    </a:lnT>
-                    <a:lnB w="6350" cap="flat" cmpd="sng" algn="ctr">
-                      <a:solidFill>
-                        <a:srgbClr val="C9CED6"/>
-                      </a:solidFill>
-                      <a:prstDash val="solid"/>
-                      <a:round/>
-                      <a:headEnd type="none" w="med" len="med"/>
-                      <a:tailEnd type="none" w="med" len="med"/>
-                    </a:lnB>
-                  </a:tcPr>
-                </a:tc>
-                <a:tc>
-                  <a:txBody>
-                    <a:bodyPr/>
-                    <a:lstStyle/>
-                    <a:p>
-                      <a:pPr indent="0" marL="0">
-                        <a:buNone/>
-                      </a:pPr>
-                      <a:r>
-                        <a:rPr lang="en-US" sz="1200" dirty="0">
-                          <a:solidFill>
-                            <a:srgbClr val="1F2933"/>
-                          </a:solidFill>
-                          <a:latin typeface="Arial" pitchFamily="34" charset="0"/>
-                          <a:ea typeface="Arial" pitchFamily="34" charset="-122"/>
-                          <a:cs typeface="Arial" pitchFamily="34" charset="-120"/>
-                        </a:rPr>
-                        <a:t>Gross margin below 40.6%</a:t>
-                      </a:r>
-                      <a:endParaRPr lang="en-US" sz="1200" dirty="0">
-                        <a:latin typeface="Arial" charset="0"/>
-                        <a:ea typeface="Arial" charset="0"/>
-                        <a:cs typeface="Arial" charset="0"/>
-                      </a:endParaRPr>
-                    </a:p>
-                  </a:txBody>
-                  <a:tcPr marL="91440" marR="91440" marT="45720" marB="45720" anchor="ctr">
-                    <a:lnL w="0" cap="flat" cmpd="sng" algn="ctr">
-                      <a:noFill/>
-                    </a:lnL>
-                    <a:lnR w="0" cap="flat" cmpd="sng" algn="ctr">
-                      <a:noFill/>
-                    </a:lnR>
-                    <a:lnT w="0" cap="flat" cmpd="sng" algn="ctr">
-                      <a:noFill/>
-                    </a:lnT>
-                    <a:lnB w="6350" cap="flat" cmpd="sng" algn="ctr">
-                      <a:solidFill>
-                        <a:srgbClr val="C9CED6"/>
-                      </a:solidFill>
-                      <a:prstDash val="solid"/>
-                      <a:round/>
-                      <a:headEnd type="none" w="med" len="med"/>
-                      <a:tailEnd type="none" w="med" len="med"/>
-                    </a:lnB>
-                  </a:tcPr>
-                </a:tc>
-                <a:tc>
-                  <a:txBody>
-                    <a:bodyPr/>
-                    <a:lstStyle/>
-                    <a:p>
-                      <a:pPr indent="0" marL="0">
-                        <a:buNone/>
-                      </a:pPr>
-                      <a:r>
-                        <a:rPr lang="en-US" sz="1200" dirty="0">
-                          <a:solidFill>
-                            <a:srgbClr val="1F2933"/>
-                          </a:solidFill>
-                          <a:latin typeface="Arial" pitchFamily="34" charset="0"/>
-                          <a:ea typeface="Arial" pitchFamily="34" charset="-122"/>
-                          <a:cs typeface="Arial" pitchFamily="34" charset="-120"/>
-                        </a:rPr>
-                        <a:t>Gross margin well above 41% with pricing positive</a:t>
-                      </a:r>
-                      <a:endParaRPr lang="en-US" sz="1200" dirty="0">
-                        <a:latin typeface="Arial" charset="0"/>
-                        <a:ea typeface="Arial" charset="0"/>
-                        <a:cs typeface="Arial" charset="0"/>
-                      </a:endParaRPr>
-                    </a:p>
-                  </a:txBody>
-                  <a:tcPr marL="91440" marR="91440" marT="45720" marB="45720" anchor="ctr">
-                    <a:lnL w="0" cap="flat" cmpd="sng" algn="ctr">
-                      <a:noFill/>
-                    </a:lnL>
-                    <a:lnR w="0" cap="flat" cmpd="sng" algn="ctr">
-                      <a:noFill/>
-                    </a:lnR>
-                    <a:lnT w="0" cap="flat" cmpd="sng" algn="ctr">
-                      <a:noFill/>
-                    </a:lnT>
-                    <a:lnB w="6350" cap="flat" cmpd="sng" algn="ctr">
-                      <a:solidFill>
-                        <a:srgbClr val="C9CED6"/>
-                      </a:solidFill>
-                      <a:prstDash val="solid"/>
-                      <a:round/>
-                      <a:headEnd type="none" w="med" len="med"/>
-                      <a:tailEnd type="none" w="med" len="med"/>
-                    </a:lnB>
-                  </a:tcPr>
-                </a:tc>
-              </a:tr>
             </a:tbl>
           </a:graphicData>
         </a:graphic>
       </p:graphicFrame>
       <p:sp>
         <p:nvSpPr>
-          <p:cNvPr id="5" name="Source"/>
+          <p:cNvPr id="7" name="Source"/>
           <p:cNvSpPr txBox="1"/>
           <p:nvPr/>
         </p:nvSpPr>
@@ -7201,7 +7386,7 @@
                 <a:ea typeface="Arial" pitchFamily="34" charset="-122"/>
                 <a:cs typeface="Arial" pitchFamily="34" charset="-120"/>
               </a:rPr>
-              <a:t>Sources: Nike Q4 FY26 call (Investor Day date, Jun 30, 2026); Taiwan MOPS; HKEX; team decision rules (research_notes/Long or short cruxes/00_SCOREBOARD.md). Dates for peer and supplier releases are expected, not confirmed.</a:t>
+              <a:t>Sources: Semrush public trending pages (Aug 2026, read Oct 15, 2026); Nike 10-Ks FY18 to FY26, 10-Qs through Q1 FY27 and releases (full-text diffs); TV Limburg (Aug 28, 2026) for the hearing date. Notes: research_notes/Smoking gun hunt/G6, G11, G2, G12 (with G12_check) and G10.</a:t>
             </a:r>
             <a:endParaRPr lang="en-US" sz="1000" dirty="0"/>
           </a:p>
@@ -7315,7 +7500,7 @@
                 <a:ea typeface="Arial" pitchFamily="34" charset="-122"/>
                 <a:cs typeface="Arial" pitchFamily="34" charset="-120"/>
               </a:rPr>
-              <a:t>Appendix: independent checkers downgraded several early findings, and the deck uses the corrected grades</a:t>
+              <a:t>The main risks to the short are running momentum, tariff relief and a crowded position; none outweighs the FY28 gap</a:t>
             </a:r>
             <a:endParaRPr lang="en-US" sz="2400" dirty="0"/>
           </a:p>
@@ -7344,8 +7529,9 @@
             <a:tbl>
               <a:tblPr/>
               <a:tblGrid>
-                <a:gridCol w="4206240"/>
-                <a:gridCol w="6885432"/>
+                <a:gridCol w="2194560"/>
+                <a:gridCol w="4572000"/>
+                <a:gridCol w="4325112"/>
               </a:tblGrid>
               <a:tr h="347472">
                 <a:tc>
@@ -7365,7 +7551,7 @@
                           <a:ea typeface="Arial" pitchFamily="34" charset="-122"/>
                           <a:cs typeface="Arial" pitchFamily="34" charset="-120"/>
                         </a:rPr>
-                        <a:t>Early claim</a:t>
+                        <a:t>Risk to our view</a:t>
                       </a:r>
                       <a:endParaRPr lang="en-US" sz="1200" dirty="0">
                         <a:latin typeface="Arial" charset="0"/>
@@ -7409,7 +7595,7 @@
                           <a:ea typeface="Arial" pitchFamily="34" charset="-122"/>
                           <a:cs typeface="Arial" pitchFamily="34" charset="-120"/>
                         </a:rPr>
-                        <a:t>After checking</a:t>
+                        <a:t>Evidence</a:t>
                       </a:r>
                       <a:endParaRPr lang="en-US" sz="1200" dirty="0">
                         <a:latin typeface="Arial" charset="0"/>
@@ -7436,8 +7622,52 @@
                     </a:solidFill>
                   </a:tcPr>
                 </a:tc>
+                <a:tc>
+                  <a:txBody>
+                    <a:bodyPr/>
+                    <a:lstStyle/>
+                    <a:p>
+                      <a:pPr algn="l" indent="0" marL="0">
+                        <a:buNone/>
+                      </a:pPr>
+                      <a:r>
+                        <a:rPr lang="en-US" sz="1200" b="1" dirty="0">
+                          <a:solidFill>
+                            <a:srgbClr val="FFFFFF"/>
+                          </a:solidFill>
+                          <a:latin typeface="Arial" pitchFamily="34" charset="0"/>
+                          <a:ea typeface="Arial" pitchFamily="34" charset="-122"/>
+                          <a:cs typeface="Arial" pitchFamily="34" charset="-120"/>
+                        </a:rPr>
+                        <a:t>Our assessment</a:t>
+                      </a:r>
+                      <a:endParaRPr lang="en-US" sz="1200" dirty="0">
+                        <a:latin typeface="Arial" charset="0"/>
+                        <a:ea typeface="Arial" charset="0"/>
+                        <a:cs typeface="Arial" charset="0"/>
+                      </a:endParaRPr>
+                    </a:p>
+                  </a:txBody>
+                  <a:tcPr marL="91440" marR="91440" marT="45720" marB="45720" anchor="ctr">
+                    <a:lnL w="0" cap="flat" cmpd="sng" algn="ctr">
+                      <a:noFill/>
+                    </a:lnL>
+                    <a:lnR w="0" cap="flat" cmpd="sng" algn="ctr">
+                      <a:noFill/>
+                    </a:lnR>
+                    <a:lnT w="0" cap="flat" cmpd="sng" algn="ctr">
+                      <a:noFill/>
+                    </a:lnT>
+                    <a:lnB w="0" cap="flat" cmpd="sng" algn="ctr">
+                      <a:noFill/>
+                    </a:lnB>
+                    <a:solidFill>
+                      <a:srgbClr val="0B2A4A"/>
+                    </a:solidFill>
+                  </a:tcPr>
+                </a:tc>
               </a:tr>
-              <a:tr h="566928">
+              <a:tr h="658368">
                 <a:tc>
                   <a:txBody>
                     <a:bodyPr/>
@@ -7447,7 +7677,7 @@
                         <a:buNone/>
                       </a:pPr>
                       <a:r>
-                        <a:rPr lang="en-US" sz="1200" dirty="0">
+                        <a:rPr lang="en-US" sz="1200" b="1" dirty="0">
                           <a:solidFill>
                             <a:srgbClr val="1F2933"/>
                           </a:solidFill>
@@ -7455,7 +7685,7 @@
                           <a:ea typeface="Arial" pitchFamily="34" charset="-122"/>
                           <a:cs typeface="Arial" pitchFamily="34" charset="-120"/>
                         </a:rPr>
-                        <a:t>Resale decline has stopped (Nike + Jordan -2.3% YoY)</a:t>
+                        <a:t>Running recovery is real</a:t>
                       </a:r>
                       <a:endParaRPr lang="en-US" sz="1200" dirty="0">
                         <a:latin typeface="Arial" charset="0"/>
@@ -7502,7 +7732,7 @@
                           <a:ea typeface="Arial" pitchFamily="34" charset="-122"/>
                           <a:cs typeface="Arial" pitchFamily="34" charset="-120"/>
                         </a:rPr>
-                        <a:t>Mostly the weaker yen; about -9.5% in USD, rivals -5.5%. Launch-premium gain disappears for men's sizes</a:t>
+                        <a:t>Dick's running reviews +48.6% vs Hoka +21.6%, Brooks +15.8% (Jun to Jul 2026); Pegasus 42 and Vomero 18 rated 4.8</a:t>
                       </a:r>
                       <a:endParaRPr lang="en-US" sz="1200" dirty="0">
                         <a:latin typeface="Arial" charset="0"/>
@@ -7532,8 +7762,6 @@
                     </a:lnB>
                   </a:tcPr>
                 </a:tc>
-              </a:tr>
-              <a:tr h="566928">
                 <a:tc>
                   <a:txBody>
                     <a:bodyPr/>
@@ -7551,7 +7779,7 @@
                           <a:ea typeface="Arial" pitchFamily="34" charset="-122"/>
                           <a:cs typeface="Arial" pitchFamily="34" charset="-120"/>
                         </a:rPr>
-                        <a:t>Market size: strong short on North America volume</a:t>
+                        <a:t>Real volume, but Pegasus 42 is marked down and growth lags ASICS and adidas; offsets lifestyle, not the FY28 gap</a:t>
                       </a:r>
                       <a:endParaRPr lang="en-US" sz="1200" dirty="0">
                         <a:latin typeface="Arial" charset="0"/>
@@ -7581,6 +7809,8 @@
                     </a:lnB>
                   </a:tcPr>
                 </a:tc>
+              </a:tr>
+              <a:tr h="566928">
                 <a:tc>
                   <a:txBody>
                     <a:bodyPr/>
@@ -7590,7 +7820,7 @@
                         <a:buNone/>
                       </a:pPr>
                       <a:r>
-                        <a:rPr lang="en-US" sz="1200" dirty="0">
+                        <a:rPr lang="en-US" sz="1200" b="1" dirty="0">
                           <a:solidFill>
                             <a:srgbClr val="1F2933"/>
                           </a:solidFill>
@@ -7598,7 +7828,7 @@
                           <a:ea typeface="Arial" pitchFamily="34" charset="-122"/>
                           <a:cs typeface="Arial" pitchFamily="34" charset="-120"/>
                         </a:rPr>
-                        <a:t>Not supported for the last four quarters (Nike units at or above real spending); rests on FY24 to FY25 and price</a:t>
+                        <a:t>Tariffs lower than planned</a:t>
                       </a:r>
                       <a:endParaRPr lang="en-US" sz="1200" dirty="0">
                         <a:latin typeface="Arial" charset="0"/>
@@ -7628,8 +7858,6 @@
                     </a:lnB>
                   </a:tcPr>
                 </a:tc>
-              </a:tr>
-              <a:tr h="502920">
                 <a:tc>
                   <a:txBody>
                     <a:bodyPr/>
@@ -7647,7 +7875,7 @@
                           <a:ea typeface="Arial" pitchFamily="34" charset="-122"/>
                           <a:cs typeface="Arial" pitchFamily="34" charset="-120"/>
                         </a:rPr>
-                        <a:t>Factory vs US imports: strong</a:t>
+                        <a:t>About 11.4% blended in force vs 15% plan; worth about +$0.08 to $0.12 of FY28 EPS</a:t>
                       </a:r>
                       <a:endParaRPr lang="en-US" sz="1200" dirty="0">
                         <a:latin typeface="Arial" charset="0"/>
@@ -7694,7 +7922,7 @@
                           <a:ea typeface="Arial" pitchFamily="34" charset="-122"/>
                           <a:cs typeface="Arial" pitchFamily="34" charset="-120"/>
                         </a:rPr>
-                        <a:t>Moderate; four of seven benchmarks are the same goods from the same countries</a:t>
+                        <a:t>Probably in the Oct 1 guide already; FY28 tail is two-sided (about +/-$0.10 to $0.25)</a:t>
                       </a:r>
                       <a:endParaRPr lang="en-US" sz="1200" dirty="0">
                         <a:latin typeface="Arial" charset="0"/>
@@ -7725,7 +7953,7 @@
                   </a:tcPr>
                 </a:tc>
               </a:tr>
-              <a:tr h="502920">
+              <a:tr h="658368">
                 <a:tc>
                   <a:txBody>
                     <a:bodyPr/>
@@ -7735,7 +7963,7 @@
                         <a:buNone/>
                       </a:pPr>
                       <a:r>
-                        <a:rPr lang="en-US" sz="1200" dirty="0">
+                        <a:rPr lang="en-US" sz="1200" b="1" dirty="0">
                           <a:solidFill>
                             <a:srgbClr val="1F2933"/>
                           </a:solidFill>
@@ -7743,7 +7971,7 @@
                           <a:ea typeface="Arial" pitchFamily="34" charset="-122"/>
                           <a:cs typeface="Arial" pitchFamily="34" charset="-120"/>
                         </a:rPr>
-                        <a:t>Product hiring share doubled to 36%</a:t>
+                        <a:t>Crowded short</a:t>
                       </a:r>
                       <a:endParaRPr lang="en-US" sz="1200" dirty="0">
                         <a:latin typeface="Arial" charset="0"/>
@@ -7790,7 +8018,7 @@
                           <a:ea typeface="Arial" pitchFamily="34" charset="-122"/>
                           <a:cs typeface="Arial" pitchFamily="34" charset="-120"/>
                         </a:rPr>
-                        <a:t>Overstated; October open postings are about 5% to 6% below last year</a:t>
+                        <a:t>99.2M shares short, 8.2% of tradable shares; 2.6 to 3.8 days to cover; borrow about 0.4% to 0.5%</a:t>
                       </a:r>
                       <a:endParaRPr lang="en-US" sz="1200" dirty="0">
                         <a:latin typeface="Arial" charset="0"/>
@@ -7820,8 +8048,6 @@
                     </a:lnB>
                   </a:tcPr>
                 </a:tc>
-              </a:tr>
-              <a:tr h="566928">
                 <a:tc>
                   <a:txBody>
                     <a:bodyPr/>
@@ -7839,7 +8065,7 @@
                           <a:ea typeface="Arial" pitchFamily="34" charset="-122"/>
                           <a:cs typeface="Arial" pitchFamily="34" charset="-120"/>
                         </a:rPr>
-                        <a:t>Store closures: 33 of 73 US in-line stores (45%)</a:t>
+                        <a:t>Not a squeeze setup; shorts won 81 of 119 at 6 months after past records, with a fat right tail. Use puts</a:t>
                       </a:r>
                       <a:endParaRPr lang="en-US" sz="1200" dirty="0">
                         <a:latin typeface="Arial" charset="0"/>
@@ -7869,6 +8095,8 @@
                     </a:lnB>
                   </a:tcPr>
                 </a:tc>
+              </a:tr>
+              <a:tr h="502920">
                 <a:tc>
                   <a:txBody>
                     <a:bodyPr/>
@@ -7878,7 +8106,7 @@
                         <a:buNone/>
                       </a:pPr>
                       <a:r>
-                        <a:rPr lang="en-US" sz="1200" dirty="0">
+                        <a:rPr lang="en-US" sz="1200" b="1" dirty="0">
                           <a:solidFill>
                             <a:srgbClr val="1F2933"/>
                           </a:solidFill>
@@ -7886,7 +8114,7 @@
                           <a:ea typeface="Arial" pitchFamily="34" charset="-122"/>
                           <a:cs typeface="Arial" pitchFamily="34" charset="-120"/>
                         </a:rPr>
-                        <a:t>Confirmed, but all small Well Collective doors; about 0.15% to 0.35% of revenue, so weak as a revenue signal</a:t>
+                        <a:t>Insider buying</a:t>
                       </a:r>
                       <a:endParaRPr lang="en-US" sz="1200" dirty="0">
                         <a:latin typeface="Arial" charset="0"/>
@@ -7916,8 +8144,6 @@
                     </a:lnB>
                   </a:tcPr>
                 </a:tc>
-              </a:tr>
-              <a:tr h="502920">
                 <a:tc>
                   <a:txBody>
                     <a:bodyPr/>
@@ -7935,7 +8161,7 @@
                           <a:ea typeface="Arial" pitchFamily="34" charset="-122"/>
                           <a:cs typeface="Arial" pitchFamily="34" charset="-120"/>
                         </a:rPr>
-                        <a:t>Positioning (13F exits, short interest, insider buying)</a:t>
+                        <a:t>$5.96M (2025) and $2.73M (2026 YTD), largest in 20 years</a:t>
                       </a:r>
                       <a:endParaRPr lang="en-US" sz="1200" dirty="0">
                         <a:latin typeface="Arial" charset="0"/>
@@ -7982,7 +8208,293 @@
                           <a:ea typeface="Arial" pitchFamily="34" charset="-122"/>
                           <a:cs typeface="Arial" pitchFamily="34" charset="-120"/>
                         </a:rPr>
-                        <a:t>Did not predict returns in historical tests; fund exits overstated about fivefold</a:t>
+                        <a:t>Did not predict returns historically; ex-CFO filed two Form 144 sale notices</a:t>
+                      </a:r>
+                      <a:endParaRPr lang="en-US" sz="1200" dirty="0">
+                        <a:latin typeface="Arial" charset="0"/>
+                        <a:ea typeface="Arial" charset="0"/>
+                        <a:cs typeface="Arial" charset="0"/>
+                      </a:endParaRPr>
+                    </a:p>
+                  </a:txBody>
+                  <a:tcPr marL="91440" marR="91440" marT="45720" marB="45720" anchor="ctr">
+                    <a:lnL w="0" cap="flat" cmpd="sng" algn="ctr">
+                      <a:noFill/>
+                    </a:lnL>
+                    <a:lnR w="0" cap="flat" cmpd="sng" algn="ctr">
+                      <a:noFill/>
+                    </a:lnR>
+                    <a:lnT w="0" cap="flat" cmpd="sng" algn="ctr">
+                      <a:noFill/>
+                    </a:lnT>
+                    <a:lnB w="6350" cap="flat" cmpd="sng" algn="ctr">
+                      <a:solidFill>
+                        <a:srgbClr val="C9CED6"/>
+                      </a:solidFill>
+                      <a:prstDash val="solid"/>
+                      <a:round/>
+                      <a:headEnd type="none" w="med" len="med"/>
+                      <a:tailEnd type="none" w="med" len="med"/>
+                    </a:lnB>
+                  </a:tcPr>
+                </a:tc>
+              </a:tr>
+              <a:tr h="502920">
+                <a:tc>
+                  <a:txBody>
+                    <a:bodyPr/>
+                    <a:lstStyle/>
+                    <a:p>
+                      <a:pPr indent="0" marL="0">
+                        <a:buNone/>
+                      </a:pPr>
+                      <a:r>
+                        <a:rPr lang="en-US" sz="1200" b="1" dirty="0">
+                          <a:solidFill>
+                            <a:srgbClr val="1F2933"/>
+                          </a:solidFill>
+                          <a:latin typeface="Arial" pitchFamily="34" charset="0"/>
+                          <a:ea typeface="Arial" pitchFamily="34" charset="-122"/>
+                          <a:cs typeface="Arial" pitchFamily="34" charset="-120"/>
+                        </a:rPr>
+                        <a:t>Guidance is conservative</a:t>
+                      </a:r>
+                      <a:endParaRPr lang="en-US" sz="1200" dirty="0">
+                        <a:latin typeface="Arial" charset="0"/>
+                        <a:ea typeface="Arial" charset="0"/>
+                        <a:cs typeface="Arial" charset="0"/>
+                      </a:endParaRPr>
+                    </a:p>
+                  </a:txBody>
+                  <a:tcPr marL="91440" marR="91440" marT="45720" marB="45720" anchor="ctr">
+                    <a:lnL w="0" cap="flat" cmpd="sng" algn="ctr">
+                      <a:noFill/>
+                    </a:lnL>
+                    <a:lnR w="0" cap="flat" cmpd="sng" algn="ctr">
+                      <a:noFill/>
+                    </a:lnR>
+                    <a:lnT w="0" cap="flat" cmpd="sng" algn="ctr">
+                      <a:noFill/>
+                    </a:lnT>
+                    <a:lnB w="6350" cap="flat" cmpd="sng" algn="ctr">
+                      <a:solidFill>
+                        <a:srgbClr val="C9CED6"/>
+                      </a:solidFill>
+                      <a:prstDash val="solid"/>
+                      <a:round/>
+                      <a:headEnd type="none" w="med" len="med"/>
+                      <a:tailEnd type="none" w="med" len="med"/>
+                    </a:lnB>
+                  </a:tcPr>
+                </a:tc>
+                <a:tc>
+                  <a:txBody>
+                    <a:bodyPr/>
+                    <a:lstStyle/>
+                    <a:p>
+                      <a:pPr indent="0" marL="0">
+                        <a:buNone/>
+                      </a:pPr>
+                      <a:r>
+                        <a:rPr lang="en-US" sz="1200" dirty="0">
+                          <a:solidFill>
+                            <a:srgbClr val="1F2933"/>
+                          </a:solidFill>
+                          <a:latin typeface="Arial" pitchFamily="34" charset="0"/>
+                          <a:ea typeface="Arial" pitchFamily="34" charset="-122"/>
+                          <a:cs typeface="Arial" pitchFamily="34" charset="-120"/>
+                        </a:rPr>
+                        <a:t>Inside or above the guided range 16 of 16 times (revenue and gross margin, 8 quarters); Q1 FY27 first below midpoint</a:t>
+                      </a:r>
+                      <a:endParaRPr lang="en-US" sz="1200" dirty="0">
+                        <a:latin typeface="Arial" charset="0"/>
+                        <a:ea typeface="Arial" charset="0"/>
+                        <a:cs typeface="Arial" charset="0"/>
+                      </a:endParaRPr>
+                    </a:p>
+                  </a:txBody>
+                  <a:tcPr marL="91440" marR="91440" marT="45720" marB="45720" anchor="ctr">
+                    <a:lnL w="0" cap="flat" cmpd="sng" algn="ctr">
+                      <a:noFill/>
+                    </a:lnL>
+                    <a:lnR w="0" cap="flat" cmpd="sng" algn="ctr">
+                      <a:noFill/>
+                    </a:lnR>
+                    <a:lnT w="0" cap="flat" cmpd="sng" algn="ctr">
+                      <a:noFill/>
+                    </a:lnT>
+                    <a:lnB w="6350" cap="flat" cmpd="sng" algn="ctr">
+                      <a:solidFill>
+                        <a:srgbClr val="C9CED6"/>
+                      </a:solidFill>
+                      <a:prstDash val="solid"/>
+                      <a:round/>
+                      <a:headEnd type="none" w="med" len="med"/>
+                      <a:tailEnd type="none" w="med" len="med"/>
+                    </a:lnB>
+                  </a:tcPr>
+                </a:tc>
+                <a:tc>
+                  <a:txBody>
+                    <a:bodyPr/>
+                    <a:lstStyle/>
+                    <a:p>
+                      <a:pPr indent="0" marL="0">
+                        <a:buNone/>
+                      </a:pPr>
+                      <a:r>
+                        <a:rPr lang="en-US" sz="1200" dirty="0">
+                          <a:solidFill>
+                            <a:srgbClr val="1F2933"/>
+                          </a:solidFill>
+                          <a:latin typeface="Arial" pitchFamily="34" charset="0"/>
+                          <a:ea typeface="Arial" pitchFamily="34" charset="-122"/>
+                          <a:cs typeface="Arial" pitchFamily="34" charset="-120"/>
+                        </a:rPr>
+                        <a:t>We do not rely on a Q2 miss; the thesis is FY28</a:t>
+                      </a:r>
+                      <a:endParaRPr lang="en-US" sz="1200" dirty="0">
+                        <a:latin typeface="Arial" charset="0"/>
+                        <a:ea typeface="Arial" charset="0"/>
+                        <a:cs typeface="Arial" charset="0"/>
+                      </a:endParaRPr>
+                    </a:p>
+                  </a:txBody>
+                  <a:tcPr marL="91440" marR="91440" marT="45720" marB="45720" anchor="ctr">
+                    <a:lnL w="0" cap="flat" cmpd="sng" algn="ctr">
+                      <a:noFill/>
+                    </a:lnL>
+                    <a:lnR w="0" cap="flat" cmpd="sng" algn="ctr">
+                      <a:noFill/>
+                    </a:lnR>
+                    <a:lnT w="0" cap="flat" cmpd="sng" algn="ctr">
+                      <a:noFill/>
+                    </a:lnT>
+                    <a:lnB w="6350" cap="flat" cmpd="sng" algn="ctr">
+                      <a:solidFill>
+                        <a:srgbClr val="C9CED6"/>
+                      </a:solidFill>
+                      <a:prstDash val="solid"/>
+                      <a:round/>
+                      <a:headEnd type="none" w="med" len="med"/>
+                      <a:tailEnd type="none" w="med" len="med"/>
+                    </a:lnB>
+                  </a:tcPr>
+                </a:tc>
+              </a:tr>
+              <a:tr h="713232">
+                <a:tc>
+                  <a:txBody>
+                    <a:bodyPr/>
+                    <a:lstStyle/>
+                    <a:p>
+                      <a:pPr indent="0" marL="0">
+                        <a:buNone/>
+                      </a:pPr>
+                      <a:r>
+                        <a:rPr lang="en-US" sz="1200" b="1" dirty="0">
+                          <a:solidFill>
+                            <a:srgbClr val="1F2933"/>
+                          </a:solidFill>
+                          <a:latin typeface="Arial" pitchFamily="34" charset="0"/>
+                          <a:ea typeface="Arial" pitchFamily="34" charset="-122"/>
+                          <a:cs typeface="Arial" pitchFamily="34" charset="-120"/>
+                        </a:rPr>
+                        <a:t>Product pipeline is rebuilding</a:t>
+                      </a:r>
+                      <a:endParaRPr lang="en-US" sz="1200" dirty="0">
+                        <a:latin typeface="Arial" charset="0"/>
+                        <a:ea typeface="Arial" charset="0"/>
+                        <a:cs typeface="Arial" charset="0"/>
+                      </a:endParaRPr>
+                    </a:p>
+                  </a:txBody>
+                  <a:tcPr marL="91440" marR="91440" marT="45720" marB="45720" anchor="ctr">
+                    <a:lnL w="0" cap="flat" cmpd="sng" algn="ctr">
+                      <a:noFill/>
+                    </a:lnL>
+                    <a:lnR w="0" cap="flat" cmpd="sng" algn="ctr">
+                      <a:noFill/>
+                    </a:lnR>
+                    <a:lnT w="0" cap="flat" cmpd="sng" algn="ctr">
+                      <a:noFill/>
+                    </a:lnT>
+                    <a:lnB w="6350" cap="flat" cmpd="sng" algn="ctr">
+                      <a:solidFill>
+                        <a:srgbClr val="C9CED6"/>
+                      </a:solidFill>
+                      <a:prstDash val="solid"/>
+                      <a:round/>
+                      <a:headEnd type="none" w="med" len="med"/>
+                      <a:tailEnd type="none" w="med" len="med"/>
+                    </a:lnB>
+                  </a:tcPr>
+                </a:tc>
+                <a:tc>
+                  <a:txBody>
+                    <a:bodyPr/>
+                    <a:lstStyle/>
+                    <a:p>
+                      <a:pPr indent="0" marL="0">
+                        <a:buNone/>
+                      </a:pPr>
+                      <a:r>
+                        <a:rPr lang="en-US" sz="1200" dirty="0">
+                          <a:solidFill>
+                            <a:srgbClr val="1F2933"/>
+                          </a:solidFill>
+                          <a:latin typeface="Arial" pitchFamily="34" charset="0"/>
+                          <a:ea typeface="Arial" pitchFamily="34" charset="-122"/>
+                          <a:cs typeface="Arial" pitchFamily="34" charset="-120"/>
+                        </a:rPr>
+                        <a:t>21 intent-to-use US trademark filings for new product names in Jan to Sep 2026; prior 15-year high was 7. Names typically ship within about 3 months of filing</a:t>
+                      </a:r>
+                      <a:endParaRPr lang="en-US" sz="1200" dirty="0">
+                        <a:latin typeface="Arial" charset="0"/>
+                        <a:ea typeface="Arial" charset="0"/>
+                        <a:cs typeface="Arial" charset="0"/>
+                      </a:endParaRPr>
+                    </a:p>
+                  </a:txBody>
+                  <a:tcPr marL="91440" marR="91440" marT="45720" marB="45720" anchor="ctr">
+                    <a:lnL w="0" cap="flat" cmpd="sng" algn="ctr">
+                      <a:noFill/>
+                    </a:lnL>
+                    <a:lnR w="0" cap="flat" cmpd="sng" algn="ctr">
+                      <a:noFill/>
+                    </a:lnR>
+                    <a:lnT w="0" cap="flat" cmpd="sng" algn="ctr">
+                      <a:noFill/>
+                    </a:lnT>
+                    <a:lnB w="6350" cap="flat" cmpd="sng" algn="ctr">
+                      <a:solidFill>
+                        <a:srgbClr val="C9CED6"/>
+                      </a:solidFill>
+                      <a:prstDash val="solid"/>
+                      <a:round/>
+                      <a:headEnd type="none" w="med" len="med"/>
+                      <a:tailEnd type="none" w="med" len="med"/>
+                    </a:lnB>
+                  </a:tcPr>
+                </a:tc>
+                <a:tc>
+                  <a:txBody>
+                    <a:bodyPr/>
+                    <a:lstStyle/>
+                    <a:p>
+                      <a:pPr indent="0" marL="0">
+                        <a:buNone/>
+                      </a:pPr>
+                      <a:r>
+                        <a:rPr lang="en-US" sz="1200" dirty="0">
+                          <a:solidFill>
+                            <a:srgbClr val="1F2933"/>
+                          </a:solidFill>
+                          <a:latin typeface="Arial" pitchFamily="34" charset="0"/>
+                          <a:ea typeface="Arial" pitchFamily="34" charset="-122"/>
+                          <a:cs typeface="Arial" pitchFamily="34" charset="-120"/>
+                        </a:rPr>
+                        <a:t>Supports a late FY27 to FY28 launch wave; volume effect cannot be sized from filings. The main long argument</a:t>
                       </a:r>
                       <a:endParaRPr lang="en-US" sz="1200" dirty="0">
                         <a:latin typeface="Arial" charset="0"/>
@@ -8050,7 +8562,7 @@
                 <a:ea typeface="Arial" pitchFamily="34" charset="-122"/>
                 <a:cs typeface="Arial" pitchFamily="34" charset="-120"/>
               </a:rPr>
-              <a:t>Sources: checker reviews in data/hunt/*/README.md and research_notes/Long or short cruxes/. Unmeasurable: Nike US shipment volumes (masked consignee), Census API (registration required).</a:t>
+              <a:t>Sources: Dick's/Foot Locker review feed (Jun to Jul 2026); tariff gap sizing (USTR Section 301 notice, Jul 2026; Nike 10-Q); FINRA (Sep 30, 2026), Ortex, Interactive Brokers borrow data; SEC Form 4 and 13F data; guidance record (G9); USPTO trademark search (G7).</a:t>
             </a:r>
             <a:endParaRPr lang="en-US" sz="1000" dirty="0"/>
           </a:p>
@@ -8164,7 +8676,7 @@
                 <a:ea typeface="Arial" pitchFamily="34" charset="-122"/>
                 <a:cs typeface="Arial" pitchFamily="34" charset="-120"/>
               </a:rPr>
-              <a:t>Appendix: primary sources and where the data lives</a:t>
+              <a:t>Investor Day on Nov 16 to 17 is the decisive event, two days before finals</a:t>
             </a:r>
             <a:endParaRPr lang="en-US" sz="2400" dirty="0"/>
           </a:p>
@@ -8193,8 +8705,10 @@
             <a:tbl>
               <a:tblPr/>
               <a:tblGrid>
+                <a:gridCol w="1554480"/>
                 <a:gridCol w="2468880"/>
-                <a:gridCol w="8622792"/>
+                <a:gridCol w="3749040"/>
+                <a:gridCol w="3319272"/>
               </a:tblGrid>
               <a:tr h="347472">
                 <a:tc>
@@ -8214,7 +8728,7 @@
                           <a:ea typeface="Arial" pitchFamily="34" charset="-122"/>
                           <a:cs typeface="Arial" pitchFamily="34" charset="-120"/>
                         </a:rPr>
-                        <a:t>Category</a:t>
+                        <a:t>Date</a:t>
                       </a:r>
                       <a:endParaRPr lang="en-US" sz="1200" dirty="0">
                         <a:latin typeface="Arial" charset="0"/>
@@ -8258,7 +8772,7 @@
                           <a:ea typeface="Arial" pitchFamily="34" charset="-122"/>
                           <a:cs typeface="Arial" pitchFamily="34" charset="-120"/>
                         </a:rPr>
-                        <a:t>Sources</a:t>
+                        <a:t>Event</a:t>
                       </a:r>
                       <a:endParaRPr lang="en-US" sz="1200" dirty="0">
                         <a:latin typeface="Arial" charset="0"/>
@@ -8285,8 +8799,96 @@
                     </a:solidFill>
                   </a:tcPr>
                 </a:tc>
+                <a:tc>
+                  <a:txBody>
+                    <a:bodyPr/>
+                    <a:lstStyle/>
+                    <a:p>
+                      <a:pPr algn="l" indent="0" marL="0">
+                        <a:buNone/>
+                      </a:pPr>
+                      <a:r>
+                        <a:rPr lang="en-US" sz="1200" b="1" dirty="0">
+                          <a:solidFill>
+                            <a:srgbClr val="FFFFFF"/>
+                          </a:solidFill>
+                          <a:latin typeface="Arial" pitchFamily="34" charset="0"/>
+                          <a:ea typeface="Arial" pitchFamily="34" charset="-122"/>
+                          <a:cs typeface="Arial" pitchFamily="34" charset="-120"/>
+                        </a:rPr>
+                        <a:t>Supports the short if</a:t>
+                      </a:r>
+                      <a:endParaRPr lang="en-US" sz="1200" dirty="0">
+                        <a:latin typeface="Arial" charset="0"/>
+                        <a:ea typeface="Arial" charset="0"/>
+                        <a:cs typeface="Arial" charset="0"/>
+                      </a:endParaRPr>
+                    </a:p>
+                  </a:txBody>
+                  <a:tcPr marL="91440" marR="91440" marT="45720" marB="45720" anchor="ctr">
+                    <a:lnL w="0" cap="flat" cmpd="sng" algn="ctr">
+                      <a:noFill/>
+                    </a:lnL>
+                    <a:lnR w="0" cap="flat" cmpd="sng" algn="ctr">
+                      <a:noFill/>
+                    </a:lnR>
+                    <a:lnT w="0" cap="flat" cmpd="sng" algn="ctr">
+                      <a:noFill/>
+                    </a:lnT>
+                    <a:lnB w="0" cap="flat" cmpd="sng" algn="ctr">
+                      <a:noFill/>
+                    </a:lnB>
+                    <a:solidFill>
+                      <a:srgbClr val="0B2A4A"/>
+                    </a:solidFill>
+                  </a:tcPr>
+                </a:tc>
+                <a:tc>
+                  <a:txBody>
+                    <a:bodyPr/>
+                    <a:lstStyle/>
+                    <a:p>
+                      <a:pPr algn="l" indent="0" marL="0">
+                        <a:buNone/>
+                      </a:pPr>
+                      <a:r>
+                        <a:rPr lang="en-US" sz="1200" b="1" dirty="0">
+                          <a:solidFill>
+                            <a:srgbClr val="FFFFFF"/>
+                          </a:solidFill>
+                          <a:latin typeface="Arial" pitchFamily="34" charset="0"/>
+                          <a:ea typeface="Arial" pitchFamily="34" charset="-122"/>
+                          <a:cs typeface="Arial" pitchFamily="34" charset="-120"/>
+                        </a:rPr>
+                        <a:t>Supports a long if</a:t>
+                      </a:r>
+                      <a:endParaRPr lang="en-US" sz="1200" dirty="0">
+                        <a:latin typeface="Arial" charset="0"/>
+                        <a:ea typeface="Arial" charset="0"/>
+                        <a:cs typeface="Arial" charset="0"/>
+                      </a:endParaRPr>
+                    </a:p>
+                  </a:txBody>
+                  <a:tcPr marL="91440" marR="91440" marT="45720" marB="45720" anchor="ctr">
+                    <a:lnL w="0" cap="flat" cmpd="sng" algn="ctr">
+                      <a:noFill/>
+                    </a:lnL>
+                    <a:lnR w="0" cap="flat" cmpd="sng" algn="ctr">
+                      <a:noFill/>
+                    </a:lnR>
+                    <a:lnT w="0" cap="flat" cmpd="sng" algn="ctr">
+                      <a:noFill/>
+                    </a:lnT>
+                    <a:lnB w="0" cap="flat" cmpd="sng" algn="ctr">
+                      <a:noFill/>
+                    </a:lnB>
+                    <a:solidFill>
+                      <a:srgbClr val="0B2A4A"/>
+                    </a:solidFill>
+                  </a:tcPr>
+                </a:tc>
               </a:tr>
-              <a:tr h="685800">
+              <a:tr h="502920">
                 <a:tc>
                   <a:txBody>
                     <a:bodyPr/>
@@ -8296,7 +8898,7 @@
                         <a:buNone/>
                       </a:pPr>
                       <a:r>
-                        <a:rPr lang="en-US" sz="1200" b="1" dirty="0">
+                        <a:rPr lang="en-US" sz="1200" dirty="0">
                           <a:solidFill>
                             <a:srgbClr val="1F2933"/>
                           </a:solidFill>
@@ -8304,7 +8906,7 @@
                           <a:ea typeface="Arial" pitchFamily="34" charset="-122"/>
                           <a:cs typeface="Arial" pitchFamily="34" charset="-120"/>
                         </a:rPr>
-                        <a:t>Nike filings and calls</a:t>
+                        <a:t>Oct 28</a:t>
                       </a:r>
                       <a:endParaRPr lang="en-US" sz="1200" dirty="0">
                         <a:latin typeface="Arial" charset="0"/>
@@ -8343,7 +8945,7 @@
                         <a:buNone/>
                       </a:pPr>
                       <a:r>
-                        <a:rPr lang="en-US" sz="1200" dirty="0">
+                        <a:rPr lang="en-US" sz="1200" b="1" dirty="0">
                           <a:solidFill>
                             <a:srgbClr val="1F2933"/>
                           </a:solidFill>
@@ -8351,7 +8953,7 @@
                           <a:ea typeface="Arial" pitchFamily="34" charset="-122"/>
                           <a:cs typeface="Arial" pitchFamily="34" charset="-120"/>
                         </a:rPr>
-                        <a:t>FY24, FY25, FY26 Form 10-K; Q1 FY27 Form 10-Q and earnings release (Oct 1, 2026); official call transcripts Q1 FY21 to Q1 FY27 (investors.nike.com)</a:t>
+                        <a:t>Topsports interim results</a:t>
                       </a:r>
                       <a:endParaRPr lang="en-US" sz="1200" dirty="0">
                         <a:latin typeface="Arial" charset="0"/>
@@ -8381,8 +8983,6 @@
                     </a:lnB>
                   </a:tcPr>
                 </a:tc>
-              </a:tr>
-              <a:tr h="685800">
                 <a:tc>
                   <a:txBody>
                     <a:bodyPr/>
@@ -8392,7 +8992,7 @@
                         <a:buNone/>
                       </a:pPr>
                       <a:r>
-                        <a:rPr lang="en-US" sz="1200" b="1" dirty="0">
+                        <a:rPr lang="en-US" sz="1200" dirty="0">
                           <a:solidFill>
                             <a:srgbClr val="1F2933"/>
                           </a:solidFill>
@@ -8400,7 +9000,7 @@
                           <a:ea typeface="Arial" pitchFamily="34" charset="-122"/>
                           <a:cs typeface="Arial" pitchFamily="34" charset="-120"/>
                         </a:rPr>
-                        <a:t>Peers and market</a:t>
+                        <a:t>Door decline continues; China wholesale weak</a:t>
                       </a:r>
                       <a:endParaRPr lang="en-US" sz="1200" dirty="0">
                         <a:latin typeface="Arial" charset="0"/>
@@ -8447,7 +9047,7 @@
                           <a:ea typeface="Arial" pitchFamily="34" charset="-122"/>
                           <a:cs typeface="Arial" pitchFamily="34" charset="-120"/>
                         </a:rPr>
-                        <a:t>adidas, On, Deckers, ASICS results; HKEX filings (Topsports, Pou Sheng, ANTA, Li-Ning, Xtep, 361); Taiwan MOPS (Feng Tay and others); Yahoo Finance; FINRA; BEA; BLS; China NBS</a:t>
+                        <a:t>Doors stabilize</a:t>
                       </a:r>
                       <a:endParaRPr lang="en-US" sz="1200" dirty="0">
                         <a:latin typeface="Arial" charset="0"/>
@@ -8478,7 +9078,7 @@
                   </a:tcPr>
                 </a:tc>
               </a:tr>
-              <a:tr h="685800">
+              <a:tr h="502920">
                 <a:tc>
                   <a:txBody>
                     <a:bodyPr/>
@@ -8488,7 +9088,7 @@
                         <a:buNone/>
                       </a:pPr>
                       <a:r>
-                        <a:rPr lang="en-US" sz="1200" b="1" dirty="0">
+                        <a:rPr lang="en-US" sz="1200" dirty="0">
                           <a:solidFill>
                             <a:srgbClr val="1F2933"/>
                           </a:solidFill>
@@ -8496,7 +9096,7 @@
                           <a:ea typeface="Arial" pitchFamily="34" charset="-122"/>
                           <a:cs typeface="Arial" pitchFamily="34" charset="-120"/>
                         </a:rPr>
-                        <a:t>Alternative data</a:t>
+                        <a:t>About Nov 10</a:t>
                       </a:r>
                       <a:endParaRPr lang="en-US" sz="1200" dirty="0">
                         <a:latin typeface="Arial" charset="0"/>
@@ -8535,7 +9135,7 @@
                         <a:buNone/>
                       </a:pPr>
                       <a:r>
-                        <a:rPr lang="en-US" sz="1200" dirty="0">
+                        <a:rPr lang="en-US" sz="1200" b="1" dirty="0">
                           <a:solidFill>
                             <a:srgbClr val="1F2933"/>
                           </a:solidFill>
@@ -8543,7 +9143,7 @@
                           <a:ea typeface="Arial" pitchFamily="34" charset="-122"/>
                           <a:cs typeface="Arial" pitchFamily="34" charset="-120"/>
                         </a:rPr>
-                        <a:t>Common Crawl nike.com panel; Nike store API; SNKRDUNK resale; Dick's, Foot Locker and Fleet Feet product feeds; Google Play reviews; Wikipedia pageviews</a:t>
+                        <a:t>Feng Tay October revenue</a:t>
                       </a:r>
                       <a:endParaRPr lang="en-US" sz="1200" dirty="0">
                         <a:latin typeface="Arial" charset="0"/>
@@ -8573,8 +9173,6 @@
                     </a:lnB>
                   </a:tcPr>
                 </a:tc>
-              </a:tr>
-              <a:tr h="685800">
                 <a:tc>
                   <a:txBody>
                     <a:bodyPr/>
@@ -8584,7 +9182,7 @@
                         <a:buNone/>
                       </a:pPr>
                       <a:r>
-                        <a:rPr lang="en-US" sz="1200" b="1" dirty="0">
+                        <a:rPr lang="en-US" sz="1200" dirty="0">
                           <a:solidFill>
                             <a:srgbClr val="1F2933"/>
                           </a:solidFill>
@@ -8592,7 +9190,7 @@
                           <a:ea typeface="Arial" pitchFamily="34" charset="-122"/>
                           <a:cs typeface="Arial" pitchFamily="34" charset="-120"/>
                         </a:rPr>
-                        <a:t>Analysis in the repo</a:t>
+                        <a:t>Worse than -8% (two-year, USD) while peer factories hold</a:t>
                       </a:r>
                       <a:endParaRPr lang="en-US" sz="1200" dirty="0">
                         <a:latin typeface="Arial" charset="0"/>
@@ -8639,7 +9237,2655 @@
                           <a:ea typeface="Arial" pitchFamily="34" charset="-122"/>
                           <a:cs typeface="Arial" pitchFamily="34" charset="-120"/>
                         </a:rPr>
-                        <a:t>research_notes/Long or short cruxes/ (scoreboard and eight question notes); data/hunt/ (cleaned data and scripts); research_notes/Refinitiv pull list.md (data still to pull)</a:t>
+                        <a:t>Better than -3%</a:t>
+                      </a:r>
+                      <a:endParaRPr lang="en-US" sz="1200" dirty="0">
+                        <a:latin typeface="Arial" charset="0"/>
+                        <a:ea typeface="Arial" charset="0"/>
+                        <a:cs typeface="Arial" charset="0"/>
+                      </a:endParaRPr>
+                    </a:p>
+                  </a:txBody>
+                  <a:tcPr marL="91440" marR="91440" marT="45720" marB="45720" anchor="ctr">
+                    <a:lnL w="0" cap="flat" cmpd="sng" algn="ctr">
+                      <a:noFill/>
+                    </a:lnL>
+                    <a:lnR w="0" cap="flat" cmpd="sng" algn="ctr">
+                      <a:noFill/>
+                    </a:lnR>
+                    <a:lnT w="0" cap="flat" cmpd="sng" algn="ctr">
+                      <a:noFill/>
+                    </a:lnT>
+                    <a:lnB w="6350" cap="flat" cmpd="sng" algn="ctr">
+                      <a:solidFill>
+                        <a:srgbClr val="C9CED6"/>
+                      </a:solidFill>
+                      <a:prstDash val="solid"/>
+                      <a:round/>
+                      <a:headEnd type="none" w="med" len="med"/>
+                      <a:tailEnd type="none" w="med" len="med"/>
+                    </a:lnB>
+                  </a:tcPr>
+                </a:tc>
+              </a:tr>
+              <a:tr h="457200">
+                <a:tc>
+                  <a:txBody>
+                    <a:bodyPr/>
+                    <a:lstStyle/>
+                    <a:p>
+                      <a:pPr indent="0" marL="0">
+                        <a:buNone/>
+                      </a:pPr>
+                      <a:r>
+                        <a:rPr lang="en-US" sz="1200" dirty="0">
+                          <a:solidFill>
+                            <a:srgbClr val="1F2933"/>
+                          </a:solidFill>
+                          <a:latin typeface="Arial" pitchFamily="34" charset="0"/>
+                          <a:ea typeface="Arial" pitchFamily="34" charset="-122"/>
+                          <a:cs typeface="Arial" pitchFamily="34" charset="-120"/>
+                        </a:rPr>
+                        <a:t>Nov 14 to 20</a:t>
+                      </a:r>
+                      <a:endParaRPr lang="en-US" sz="1200" dirty="0">
+                        <a:latin typeface="Arial" charset="0"/>
+                        <a:ea typeface="Arial" charset="0"/>
+                        <a:cs typeface="Arial" charset="0"/>
+                      </a:endParaRPr>
+                    </a:p>
+                  </a:txBody>
+                  <a:tcPr marL="91440" marR="91440" marT="45720" marB="45720" anchor="ctr">
+                    <a:lnL w="0" cap="flat" cmpd="sng" algn="ctr">
+                      <a:noFill/>
+                    </a:lnL>
+                    <a:lnR w="0" cap="flat" cmpd="sng" algn="ctr">
+                      <a:noFill/>
+                    </a:lnR>
+                    <a:lnT w="0" cap="flat" cmpd="sng" algn="ctr">
+                      <a:noFill/>
+                    </a:lnT>
+                    <a:lnB w="6350" cap="flat" cmpd="sng" algn="ctr">
+                      <a:solidFill>
+                        <a:srgbClr val="C9CED6"/>
+                      </a:solidFill>
+                      <a:prstDash val="solid"/>
+                      <a:round/>
+                      <a:headEnd type="none" w="med" len="med"/>
+                      <a:tailEnd type="none" w="med" len="med"/>
+                    </a:lnB>
+                  </a:tcPr>
+                </a:tc>
+                <a:tc>
+                  <a:txBody>
+                    <a:bodyPr/>
+                    <a:lstStyle/>
+                    <a:p>
+                      <a:pPr indent="0" marL="0">
+                        <a:buNone/>
+                      </a:pPr>
+                      <a:r>
+                        <a:rPr lang="en-US" sz="1200" b="1" dirty="0">
+                          <a:solidFill>
+                            <a:srgbClr val="1F2933"/>
+                          </a:solidFill>
+                          <a:latin typeface="Arial" pitchFamily="34" charset="0"/>
+                          <a:ea typeface="Arial" pitchFamily="34" charset="-122"/>
+                          <a:cs typeface="Arial" pitchFamily="34" charset="-120"/>
+                        </a:rPr>
+                        <a:t>Dividend declaration</a:t>
+                      </a:r>
+                      <a:endParaRPr lang="en-US" sz="1200" dirty="0">
+                        <a:latin typeface="Arial" charset="0"/>
+                        <a:ea typeface="Arial" charset="0"/>
+                        <a:cs typeface="Arial" charset="0"/>
+                      </a:endParaRPr>
+                    </a:p>
+                  </a:txBody>
+                  <a:tcPr marL="91440" marR="91440" marT="45720" marB="45720" anchor="ctr">
+                    <a:lnL w="0" cap="flat" cmpd="sng" algn="ctr">
+                      <a:noFill/>
+                    </a:lnL>
+                    <a:lnR w="0" cap="flat" cmpd="sng" algn="ctr">
+                      <a:noFill/>
+                    </a:lnR>
+                    <a:lnT w="0" cap="flat" cmpd="sng" algn="ctr">
+                      <a:noFill/>
+                    </a:lnT>
+                    <a:lnB w="6350" cap="flat" cmpd="sng" algn="ctr">
+                      <a:solidFill>
+                        <a:srgbClr val="C9CED6"/>
+                      </a:solidFill>
+                      <a:prstDash val="solid"/>
+                      <a:round/>
+                      <a:headEnd type="none" w="med" len="med"/>
+                      <a:tailEnd type="none" w="med" len="med"/>
+                    </a:lnB>
+                  </a:tcPr>
+                </a:tc>
+                <a:tc>
+                  <a:txBody>
+                    <a:bodyPr/>
+                    <a:lstStyle/>
+                    <a:p>
+                      <a:pPr indent="0" marL="0">
+                        <a:buNone/>
+                      </a:pPr>
+                      <a:r>
+                        <a:rPr lang="en-US" sz="1200" dirty="0">
+                          <a:solidFill>
+                            <a:srgbClr val="1F2933"/>
+                          </a:solidFill>
+                          <a:latin typeface="Arial" pitchFamily="34" charset="0"/>
+                          <a:ea typeface="Arial" pitchFamily="34" charset="-122"/>
+                          <a:cs typeface="Arial" pitchFamily="34" charset="-120"/>
+                        </a:rPr>
+                        <a:t>Cut</a:t>
+                      </a:r>
+                      <a:endParaRPr lang="en-US" sz="1200" dirty="0">
+                        <a:latin typeface="Arial" charset="0"/>
+                        <a:ea typeface="Arial" charset="0"/>
+                        <a:cs typeface="Arial" charset="0"/>
+                      </a:endParaRPr>
+                    </a:p>
+                  </a:txBody>
+                  <a:tcPr marL="91440" marR="91440" marT="45720" marB="45720" anchor="ctr">
+                    <a:lnL w="0" cap="flat" cmpd="sng" algn="ctr">
+                      <a:noFill/>
+                    </a:lnL>
+                    <a:lnR w="0" cap="flat" cmpd="sng" algn="ctr">
+                      <a:noFill/>
+                    </a:lnR>
+                    <a:lnT w="0" cap="flat" cmpd="sng" algn="ctr">
+                      <a:noFill/>
+                    </a:lnT>
+                    <a:lnB w="6350" cap="flat" cmpd="sng" algn="ctr">
+                      <a:solidFill>
+                        <a:srgbClr val="C9CED6"/>
+                      </a:solidFill>
+                      <a:prstDash val="solid"/>
+                      <a:round/>
+                      <a:headEnd type="none" w="med" len="med"/>
+                      <a:tailEnd type="none" w="med" len="med"/>
+                    </a:lnB>
+                  </a:tcPr>
+                </a:tc>
+                <a:tc>
+                  <a:txBody>
+                    <a:bodyPr/>
+                    <a:lstStyle/>
+                    <a:p>
+                      <a:pPr indent="0" marL="0">
+                        <a:buNone/>
+                      </a:pPr>
+                      <a:r>
+                        <a:rPr lang="en-US" sz="1200" dirty="0">
+                          <a:solidFill>
+                            <a:srgbClr val="1F2933"/>
+                          </a:solidFill>
+                          <a:latin typeface="Arial" pitchFamily="34" charset="0"/>
+                          <a:ea typeface="Arial" pitchFamily="34" charset="-122"/>
+                          <a:cs typeface="Arial" pitchFamily="34" charset="-120"/>
+                        </a:rPr>
+                        <a:t>Raise well above token level</a:t>
+                      </a:r>
+                      <a:endParaRPr lang="en-US" sz="1200" dirty="0">
+                        <a:latin typeface="Arial" charset="0"/>
+                        <a:ea typeface="Arial" charset="0"/>
+                        <a:cs typeface="Arial" charset="0"/>
+                      </a:endParaRPr>
+                    </a:p>
+                  </a:txBody>
+                  <a:tcPr marL="91440" marR="91440" marT="45720" marB="45720" anchor="ctr">
+                    <a:lnL w="0" cap="flat" cmpd="sng" algn="ctr">
+                      <a:noFill/>
+                    </a:lnL>
+                    <a:lnR w="0" cap="flat" cmpd="sng" algn="ctr">
+                      <a:noFill/>
+                    </a:lnR>
+                    <a:lnT w="0" cap="flat" cmpd="sng" algn="ctr">
+                      <a:noFill/>
+                    </a:lnT>
+                    <a:lnB w="6350" cap="flat" cmpd="sng" algn="ctr">
+                      <a:solidFill>
+                        <a:srgbClr val="C9CED6"/>
+                      </a:solidFill>
+                      <a:prstDash val="solid"/>
+                      <a:round/>
+                      <a:headEnd type="none" w="med" len="med"/>
+                      <a:tailEnd type="none" w="med" len="med"/>
+                    </a:lnB>
+                  </a:tcPr>
+                </a:tc>
+              </a:tr>
+              <a:tr h="594360">
+                <a:tc>
+                  <a:txBody>
+                    <a:bodyPr/>
+                    <a:lstStyle/>
+                    <a:p>
+                      <a:pPr indent="0" marL="0">
+                        <a:buNone/>
+                      </a:pPr>
+                      <a:r>
+                        <a:rPr lang="en-US" sz="1200" b="1" dirty="0">
+                          <a:solidFill>
+                            <a:srgbClr val="A4262C"/>
+                          </a:solidFill>
+                          <a:latin typeface="Arial" pitchFamily="34" charset="0"/>
+                          <a:ea typeface="Arial" pitchFamily="34" charset="-122"/>
+                          <a:cs typeface="Arial" pitchFamily="34" charset="-120"/>
+                        </a:rPr>
+                        <a:t>Nov 16 to 17</a:t>
+                      </a:r>
+                      <a:endParaRPr lang="en-US" sz="1200" dirty="0">
+                        <a:latin typeface="Arial" charset="0"/>
+                        <a:ea typeface="Arial" charset="0"/>
+                        <a:cs typeface="Arial" charset="0"/>
+                      </a:endParaRPr>
+                    </a:p>
+                  </a:txBody>
+                  <a:tcPr marL="91440" marR="91440" marT="45720" marB="45720" anchor="ctr">
+                    <a:lnL w="0" cap="flat" cmpd="sng" algn="ctr">
+                      <a:noFill/>
+                    </a:lnL>
+                    <a:lnR w="0" cap="flat" cmpd="sng" algn="ctr">
+                      <a:noFill/>
+                    </a:lnR>
+                    <a:lnT w="0" cap="flat" cmpd="sng" algn="ctr">
+                      <a:noFill/>
+                    </a:lnT>
+                    <a:lnB w="6350" cap="flat" cmpd="sng" algn="ctr">
+                      <a:solidFill>
+                        <a:srgbClr val="C9CED6"/>
+                      </a:solidFill>
+                      <a:prstDash val="solid"/>
+                      <a:round/>
+                      <a:headEnd type="none" w="med" len="med"/>
+                      <a:tailEnd type="none" w="med" len="med"/>
+                    </a:lnB>
+                  </a:tcPr>
+                </a:tc>
+                <a:tc>
+                  <a:txBody>
+                    <a:bodyPr/>
+                    <a:lstStyle/>
+                    <a:p>
+                      <a:pPr indent="0" marL="0">
+                        <a:buNone/>
+                      </a:pPr>
+                      <a:r>
+                        <a:rPr lang="en-US" sz="1200" b="1" dirty="0">
+                          <a:solidFill>
+                            <a:srgbClr val="1F2933"/>
+                          </a:solidFill>
+                          <a:latin typeface="Arial" pitchFamily="34" charset="0"/>
+                          <a:ea typeface="Arial" pitchFamily="34" charset="-122"/>
+                          <a:cs typeface="Arial" pitchFamily="34" charset="-120"/>
+                        </a:rPr>
+                        <a:t>Nike Investor Day</a:t>
+                      </a:r>
+                      <a:endParaRPr lang="en-US" sz="1200" dirty="0">
+                        <a:latin typeface="Arial" charset="0"/>
+                        <a:ea typeface="Arial" charset="0"/>
+                        <a:cs typeface="Arial" charset="0"/>
+                      </a:endParaRPr>
+                    </a:p>
+                  </a:txBody>
+                  <a:tcPr marL="91440" marR="91440" marT="45720" marB="45720" anchor="ctr">
+                    <a:lnL w="0" cap="flat" cmpd="sng" algn="ctr">
+                      <a:noFill/>
+                    </a:lnL>
+                    <a:lnR w="0" cap="flat" cmpd="sng" algn="ctr">
+                      <a:noFill/>
+                    </a:lnR>
+                    <a:lnT w="0" cap="flat" cmpd="sng" algn="ctr">
+                      <a:noFill/>
+                    </a:lnT>
+                    <a:lnB w="6350" cap="flat" cmpd="sng" algn="ctr">
+                      <a:solidFill>
+                        <a:srgbClr val="C9CED6"/>
+                      </a:solidFill>
+                      <a:prstDash val="solid"/>
+                      <a:round/>
+                      <a:headEnd type="none" w="med" len="med"/>
+                      <a:tailEnd type="none" w="med" len="med"/>
+                    </a:lnB>
+                  </a:tcPr>
+                </a:tc>
+                <a:tc>
+                  <a:txBody>
+                    <a:bodyPr/>
+                    <a:lstStyle/>
+                    <a:p>
+                      <a:pPr indent="0" marL="0">
+                        <a:buNone/>
+                      </a:pPr>
+                      <a:r>
+                        <a:rPr lang="en-US" sz="1200" dirty="0">
+                          <a:solidFill>
+                            <a:srgbClr val="1F2933"/>
+                          </a:solidFill>
+                          <a:latin typeface="Arial" pitchFamily="34" charset="0"/>
+                          <a:ea typeface="Arial" pitchFamily="34" charset="-122"/>
+                          <a:cs typeface="Arial" pitchFamily="34" charset="-120"/>
+                        </a:rPr>
+                        <a:t>FY28 EPS framed below about $1.50, or revenue below flat</a:t>
+                      </a:r>
+                      <a:endParaRPr lang="en-US" sz="1200" dirty="0">
+                        <a:latin typeface="Arial" charset="0"/>
+                        <a:ea typeface="Arial" charset="0"/>
+                        <a:cs typeface="Arial" charset="0"/>
+                      </a:endParaRPr>
+                    </a:p>
+                  </a:txBody>
+                  <a:tcPr marL="91440" marR="91440" marT="45720" marB="45720" anchor="ctr">
+                    <a:lnL w="0" cap="flat" cmpd="sng" algn="ctr">
+                      <a:noFill/>
+                    </a:lnL>
+                    <a:lnR w="0" cap="flat" cmpd="sng" algn="ctr">
+                      <a:noFill/>
+                    </a:lnR>
+                    <a:lnT w="0" cap="flat" cmpd="sng" algn="ctr">
+                      <a:noFill/>
+                    </a:lnT>
+                    <a:lnB w="6350" cap="flat" cmpd="sng" algn="ctr">
+                      <a:solidFill>
+                        <a:srgbClr val="C9CED6"/>
+                      </a:solidFill>
+                      <a:prstDash val="solid"/>
+                      <a:round/>
+                      <a:headEnd type="none" w="med" len="med"/>
+                      <a:tailEnd type="none" w="med" len="med"/>
+                    </a:lnB>
+                  </a:tcPr>
+                </a:tc>
+                <a:tc>
+                  <a:txBody>
+                    <a:bodyPr/>
+                    <a:lstStyle/>
+                    <a:p>
+                      <a:pPr indent="0" marL="0">
+                        <a:buNone/>
+                      </a:pPr>
+                      <a:r>
+                        <a:rPr lang="en-US" sz="1200" dirty="0">
+                          <a:solidFill>
+                            <a:srgbClr val="1F2933"/>
+                          </a:solidFill>
+                          <a:latin typeface="Arial" pitchFamily="34" charset="0"/>
+                          <a:ea typeface="Arial" pitchFamily="34" charset="-122"/>
+                          <a:cs typeface="Arial" pitchFamily="34" charset="-120"/>
+                        </a:rPr>
+                        <a:t>FY28 held, plus FY29 margin target above about 9%</a:t>
+                      </a:r>
+                      <a:endParaRPr lang="en-US" sz="1200" dirty="0">
+                        <a:latin typeface="Arial" charset="0"/>
+                        <a:ea typeface="Arial" charset="0"/>
+                        <a:cs typeface="Arial" charset="0"/>
+                      </a:endParaRPr>
+                    </a:p>
+                  </a:txBody>
+                  <a:tcPr marL="91440" marR="91440" marT="45720" marB="45720" anchor="ctr">
+                    <a:lnL w="0" cap="flat" cmpd="sng" algn="ctr">
+                      <a:noFill/>
+                    </a:lnL>
+                    <a:lnR w="0" cap="flat" cmpd="sng" algn="ctr">
+                      <a:noFill/>
+                    </a:lnR>
+                    <a:lnT w="0" cap="flat" cmpd="sng" algn="ctr">
+                      <a:noFill/>
+                    </a:lnT>
+                    <a:lnB w="6350" cap="flat" cmpd="sng" algn="ctr">
+                      <a:solidFill>
+                        <a:srgbClr val="C9CED6"/>
+                      </a:solidFill>
+                      <a:prstDash val="solid"/>
+                      <a:round/>
+                      <a:headEnd type="none" w="med" len="med"/>
+                      <a:tailEnd type="none" w="med" len="med"/>
+                    </a:lnB>
+                  </a:tcPr>
+                </a:tc>
+              </a:tr>
+              <a:tr h="457200">
+                <a:tc>
+                  <a:txBody>
+                    <a:bodyPr/>
+                    <a:lstStyle/>
+                    <a:p>
+                      <a:pPr indent="0" marL="0">
+                        <a:buNone/>
+                      </a:pPr>
+                      <a:r>
+                        <a:rPr lang="en-US" sz="1200" dirty="0">
+                          <a:solidFill>
+                            <a:srgbClr val="1F2933"/>
+                          </a:solidFill>
+                          <a:latin typeface="Arial" pitchFamily="34" charset="0"/>
+                          <a:ea typeface="Arial" pitchFamily="34" charset="-122"/>
+                          <a:cs typeface="Arial" pitchFamily="34" charset="-120"/>
+                        </a:rPr>
+                        <a:t>Nov 19</a:t>
+                      </a:r>
+                      <a:endParaRPr lang="en-US" sz="1200" dirty="0">
+                        <a:latin typeface="Arial" charset="0"/>
+                        <a:ea typeface="Arial" charset="0"/>
+                        <a:cs typeface="Arial" charset="0"/>
+                      </a:endParaRPr>
+                    </a:p>
+                  </a:txBody>
+                  <a:tcPr marL="91440" marR="91440" marT="45720" marB="45720" anchor="ctr">
+                    <a:lnL w="0" cap="flat" cmpd="sng" algn="ctr">
+                      <a:noFill/>
+                    </a:lnL>
+                    <a:lnR w="0" cap="flat" cmpd="sng" algn="ctr">
+                      <a:noFill/>
+                    </a:lnR>
+                    <a:lnT w="0" cap="flat" cmpd="sng" algn="ctr">
+                      <a:noFill/>
+                    </a:lnT>
+                    <a:lnB w="6350" cap="flat" cmpd="sng" algn="ctr">
+                      <a:solidFill>
+                        <a:srgbClr val="C9CED6"/>
+                      </a:solidFill>
+                      <a:prstDash val="solid"/>
+                      <a:round/>
+                      <a:headEnd type="none" w="med" len="med"/>
+                      <a:tailEnd type="none" w="med" len="med"/>
+                    </a:lnB>
+                  </a:tcPr>
+                </a:tc>
+                <a:tc>
+                  <a:txBody>
+                    <a:bodyPr/>
+                    <a:lstStyle/>
+                    <a:p>
+                      <a:pPr indent="0" marL="0">
+                        <a:buNone/>
+                      </a:pPr>
+                      <a:r>
+                        <a:rPr lang="en-US" sz="1200" b="1" dirty="0">
+                          <a:solidFill>
+                            <a:srgbClr val="1F2933"/>
+                          </a:solidFill>
+                          <a:latin typeface="Arial" pitchFamily="34" charset="0"/>
+                          <a:ea typeface="Arial" pitchFamily="34" charset="-122"/>
+                          <a:cs typeface="Arial" pitchFamily="34" charset="-120"/>
+                        </a:rPr>
+                        <a:t>Finals</a:t>
+                      </a:r>
+                      <a:endParaRPr lang="en-US" sz="1200" dirty="0">
+                        <a:latin typeface="Arial" charset="0"/>
+                        <a:ea typeface="Arial" charset="0"/>
+                        <a:cs typeface="Arial" charset="0"/>
+                      </a:endParaRPr>
+                    </a:p>
+                  </a:txBody>
+                  <a:tcPr marL="91440" marR="91440" marT="45720" marB="45720" anchor="ctr">
+                    <a:lnL w="0" cap="flat" cmpd="sng" algn="ctr">
+                      <a:noFill/>
+                    </a:lnL>
+                    <a:lnR w="0" cap="flat" cmpd="sng" algn="ctr">
+                      <a:noFill/>
+                    </a:lnR>
+                    <a:lnT w="0" cap="flat" cmpd="sng" algn="ctr">
+                      <a:noFill/>
+                    </a:lnT>
+                    <a:lnB w="6350" cap="flat" cmpd="sng" algn="ctr">
+                      <a:solidFill>
+                        <a:srgbClr val="C9CED6"/>
+                      </a:solidFill>
+                      <a:prstDash val="solid"/>
+                      <a:round/>
+                      <a:headEnd type="none" w="med" len="med"/>
+                      <a:tailEnd type="none" w="med" len="med"/>
+                    </a:lnB>
+                  </a:tcPr>
+                </a:tc>
+                <a:tc>
+                  <a:txBody>
+                    <a:bodyPr/>
+                    <a:lstStyle/>
+                    <a:p>
+                      <a:pPr indent="0" marL="0">
+                        <a:buNone/>
+                      </a:pPr>
+                      <a:r>
+                        <a:rPr lang="en-US" sz="1200" dirty="0">
+                          <a:solidFill>
+                            <a:srgbClr val="1F2933"/>
+                          </a:solidFill>
+                          <a:latin typeface="Arial" pitchFamily="34" charset="0"/>
+                          <a:ea typeface="Arial" pitchFamily="34" charset="-122"/>
+                          <a:cs typeface="Arial" pitchFamily="34" charset="-120"/>
+                        </a:rPr>
+                        <a:t>Update pitch for Investor Day</a:t>
+                      </a:r>
+                      <a:endParaRPr lang="en-US" sz="1200" dirty="0">
+                        <a:latin typeface="Arial" charset="0"/>
+                        <a:ea typeface="Arial" charset="0"/>
+                        <a:cs typeface="Arial" charset="0"/>
+                      </a:endParaRPr>
+                    </a:p>
+                  </a:txBody>
+                  <a:tcPr marL="91440" marR="91440" marT="45720" marB="45720" anchor="ctr">
+                    <a:lnL w="0" cap="flat" cmpd="sng" algn="ctr">
+                      <a:noFill/>
+                    </a:lnL>
+                    <a:lnR w="0" cap="flat" cmpd="sng" algn="ctr">
+                      <a:noFill/>
+                    </a:lnR>
+                    <a:lnT w="0" cap="flat" cmpd="sng" algn="ctr">
+                      <a:noFill/>
+                    </a:lnT>
+                    <a:lnB w="6350" cap="flat" cmpd="sng" algn="ctr">
+                      <a:solidFill>
+                        <a:srgbClr val="C9CED6"/>
+                      </a:solidFill>
+                      <a:prstDash val="solid"/>
+                      <a:round/>
+                      <a:headEnd type="none" w="med" len="med"/>
+                      <a:tailEnd type="none" w="med" len="med"/>
+                    </a:lnB>
+                  </a:tcPr>
+                </a:tc>
+                <a:tc>
+                  <a:txBody>
+                    <a:bodyPr/>
+                    <a:lstStyle/>
+                    <a:p>
+                      <a:pPr indent="0" marL="0">
+                        <a:buNone/>
+                      </a:pPr>
+                      <a:r>
+                        <a:rPr lang="en-US" sz="1200" dirty="0">
+                          <a:solidFill>
+                            <a:srgbClr val="1F2933"/>
+                          </a:solidFill>
+                          <a:latin typeface="Arial" pitchFamily="34" charset="0"/>
+                          <a:ea typeface="Arial" pitchFamily="34" charset="-122"/>
+                          <a:cs typeface="Arial" pitchFamily="34" charset="-120"/>
+                        </a:rPr>
+                        <a:t>Update pitch for Investor Day</a:t>
+                      </a:r>
+                      <a:endParaRPr lang="en-US" sz="1200" dirty="0">
+                        <a:latin typeface="Arial" charset="0"/>
+                        <a:ea typeface="Arial" charset="0"/>
+                        <a:cs typeface="Arial" charset="0"/>
+                      </a:endParaRPr>
+                    </a:p>
+                  </a:txBody>
+                  <a:tcPr marL="91440" marR="91440" marT="45720" marB="45720" anchor="ctr">
+                    <a:lnL w="0" cap="flat" cmpd="sng" algn="ctr">
+                      <a:noFill/>
+                    </a:lnL>
+                    <a:lnR w="0" cap="flat" cmpd="sng" algn="ctr">
+                      <a:noFill/>
+                    </a:lnR>
+                    <a:lnT w="0" cap="flat" cmpd="sng" algn="ctr">
+                      <a:noFill/>
+                    </a:lnT>
+                    <a:lnB w="6350" cap="flat" cmpd="sng" algn="ctr">
+                      <a:solidFill>
+                        <a:srgbClr val="C9CED6"/>
+                      </a:solidFill>
+                      <a:prstDash val="solid"/>
+                      <a:round/>
+                      <a:headEnd type="none" w="med" len="med"/>
+                      <a:tailEnd type="none" w="med" len="med"/>
+                    </a:lnB>
+                  </a:tcPr>
+                </a:tc>
+              </a:tr>
+              <a:tr h="640080">
+                <a:tc>
+                  <a:txBody>
+                    <a:bodyPr/>
+                    <a:lstStyle/>
+                    <a:p>
+                      <a:pPr indent="0" marL="0">
+                        <a:buNone/>
+                      </a:pPr>
+                      <a:r>
+                        <a:rPr lang="en-US" sz="1200" dirty="0">
+                          <a:solidFill>
+                            <a:srgbClr val="1F2933"/>
+                          </a:solidFill>
+                          <a:latin typeface="Arial" pitchFamily="34" charset="0"/>
+                          <a:ea typeface="Arial" pitchFamily="34" charset="-122"/>
+                          <a:cs typeface="Arial" pitchFamily="34" charset="-120"/>
+                        </a:rPr>
+                        <a:t>Nov 30</a:t>
+                      </a:r>
+                      <a:endParaRPr lang="en-US" sz="1200" dirty="0">
+                        <a:latin typeface="Arial" charset="0"/>
+                        <a:ea typeface="Arial" charset="0"/>
+                        <a:cs typeface="Arial" charset="0"/>
+                      </a:endParaRPr>
+                    </a:p>
+                  </a:txBody>
+                  <a:tcPr marL="91440" marR="91440" marT="45720" marB="45720" anchor="ctr">
+                    <a:lnL w="0" cap="flat" cmpd="sng" algn="ctr">
+                      <a:noFill/>
+                    </a:lnL>
+                    <a:lnR w="0" cap="flat" cmpd="sng" algn="ctr">
+                      <a:noFill/>
+                    </a:lnR>
+                    <a:lnT w="0" cap="flat" cmpd="sng" algn="ctr">
+                      <a:noFill/>
+                    </a:lnT>
+                    <a:lnB w="6350" cap="flat" cmpd="sng" algn="ctr">
+                      <a:solidFill>
+                        <a:srgbClr val="C9CED6"/>
+                      </a:solidFill>
+                      <a:prstDash val="solid"/>
+                      <a:round/>
+                      <a:headEnd type="none" w="med" len="med"/>
+                      <a:tailEnd type="none" w="med" len="med"/>
+                    </a:lnB>
+                  </a:tcPr>
+                </a:tc>
+                <a:tc>
+                  <a:txBody>
+                    <a:bodyPr/>
+                    <a:lstStyle/>
+                    <a:p>
+                      <a:pPr indent="0" marL="0">
+                        <a:buNone/>
+                      </a:pPr>
+                      <a:r>
+                        <a:rPr lang="en-US" sz="1200" b="1" dirty="0">
+                          <a:solidFill>
+                            <a:srgbClr val="1F2933"/>
+                          </a:solidFill>
+                          <a:latin typeface="Arial" pitchFamily="34" charset="0"/>
+                          <a:ea typeface="Arial" pitchFamily="34" charset="-122"/>
+                          <a:cs typeface="Arial" pitchFamily="34" charset="-120"/>
+                        </a:rPr>
+                        <a:t>Belgian customs case, merits hearing (press)</a:t>
+                      </a:r>
+                      <a:endParaRPr lang="en-US" sz="1200" dirty="0">
+                        <a:latin typeface="Arial" charset="0"/>
+                        <a:ea typeface="Arial" charset="0"/>
+                        <a:cs typeface="Arial" charset="0"/>
+                      </a:endParaRPr>
+                    </a:p>
+                  </a:txBody>
+                  <a:tcPr marL="91440" marR="91440" marT="45720" marB="45720" anchor="ctr">
+                    <a:lnL w="0" cap="flat" cmpd="sng" algn="ctr">
+                      <a:noFill/>
+                    </a:lnL>
+                    <a:lnR w="0" cap="flat" cmpd="sng" algn="ctr">
+                      <a:noFill/>
+                    </a:lnR>
+                    <a:lnT w="0" cap="flat" cmpd="sng" algn="ctr">
+                      <a:noFill/>
+                    </a:lnT>
+                    <a:lnB w="6350" cap="flat" cmpd="sng" algn="ctr">
+                      <a:solidFill>
+                        <a:srgbClr val="C9CED6"/>
+                      </a:solidFill>
+                      <a:prstDash val="solid"/>
+                      <a:round/>
+                      <a:headEnd type="none" w="med" len="med"/>
+                      <a:tailEnd type="none" w="med" len="med"/>
+                    </a:lnB>
+                  </a:tcPr>
+                </a:tc>
+                <a:tc>
+                  <a:txBody>
+                    <a:bodyPr/>
+                    <a:lstStyle/>
+                    <a:p>
+                      <a:pPr indent="0" marL="0">
+                        <a:buNone/>
+                      </a:pPr>
+                      <a:r>
+                        <a:rPr lang="en-US" sz="1200" dirty="0">
+                          <a:solidFill>
+                            <a:srgbClr val="1F2933"/>
+                          </a:solidFill>
+                          <a:latin typeface="Arial" pitchFamily="34" charset="0"/>
+                          <a:ea typeface="Arial" pitchFamily="34" charset="-122"/>
+                          <a:cs typeface="Arial" pitchFamily="34" charset="-120"/>
+                        </a:rPr>
+                        <a:t>Adverse ruling on EUR 1.5B claim: $0.23 to $0.36 one-time EPS in the base case, unreserved by Nike</a:t>
+                      </a:r>
+                      <a:endParaRPr lang="en-US" sz="1200" dirty="0">
+                        <a:latin typeface="Arial" charset="0"/>
+                        <a:ea typeface="Arial" charset="0"/>
+                        <a:cs typeface="Arial" charset="0"/>
+                      </a:endParaRPr>
+                    </a:p>
+                  </a:txBody>
+                  <a:tcPr marL="91440" marR="91440" marT="45720" marB="45720" anchor="ctr">
+                    <a:lnL w="0" cap="flat" cmpd="sng" algn="ctr">
+                      <a:noFill/>
+                    </a:lnL>
+                    <a:lnR w="0" cap="flat" cmpd="sng" algn="ctr">
+                      <a:noFill/>
+                    </a:lnR>
+                    <a:lnT w="0" cap="flat" cmpd="sng" algn="ctr">
+                      <a:noFill/>
+                    </a:lnT>
+                    <a:lnB w="6350" cap="flat" cmpd="sng" algn="ctr">
+                      <a:solidFill>
+                        <a:srgbClr val="C9CED6"/>
+                      </a:solidFill>
+                      <a:prstDash val="solid"/>
+                      <a:round/>
+                      <a:headEnd type="none" w="med" len="med"/>
+                      <a:tailEnd type="none" w="med" len="med"/>
+                    </a:lnB>
+                  </a:tcPr>
+                </a:tc>
+                <a:tc>
+                  <a:txBody>
+                    <a:bodyPr/>
+                    <a:lstStyle/>
+                    <a:p>
+                      <a:pPr indent="0" marL="0">
+                        <a:buNone/>
+                      </a:pPr>
+                      <a:r>
+                        <a:rPr lang="en-US" sz="1200" dirty="0">
+                          <a:solidFill>
+                            <a:srgbClr val="1F2933"/>
+                          </a:solidFill>
+                          <a:latin typeface="Arial" pitchFamily="34" charset="0"/>
+                          <a:ea typeface="Arial" pitchFamily="34" charset="-122"/>
+                          <a:cs typeface="Arial" pitchFamily="34" charset="-120"/>
+                        </a:rPr>
+                        <a:t>Nike wins or the claim is cut sharply</a:t>
+                      </a:r>
+                      <a:endParaRPr lang="en-US" sz="1200" dirty="0">
+                        <a:latin typeface="Arial" charset="0"/>
+                        <a:ea typeface="Arial" charset="0"/>
+                        <a:cs typeface="Arial" charset="0"/>
+                      </a:endParaRPr>
+                    </a:p>
+                  </a:txBody>
+                  <a:tcPr marL="91440" marR="91440" marT="45720" marB="45720" anchor="ctr">
+                    <a:lnL w="0" cap="flat" cmpd="sng" algn="ctr">
+                      <a:noFill/>
+                    </a:lnL>
+                    <a:lnR w="0" cap="flat" cmpd="sng" algn="ctr">
+                      <a:noFill/>
+                    </a:lnR>
+                    <a:lnT w="0" cap="flat" cmpd="sng" algn="ctr">
+                      <a:noFill/>
+                    </a:lnT>
+                    <a:lnB w="6350" cap="flat" cmpd="sng" algn="ctr">
+                      <a:solidFill>
+                        <a:srgbClr val="C9CED6"/>
+                      </a:solidFill>
+                      <a:prstDash val="solid"/>
+                      <a:round/>
+                      <a:headEnd type="none" w="med" len="med"/>
+                      <a:tailEnd type="none" w="med" len="med"/>
+                    </a:lnB>
+                  </a:tcPr>
+                </a:tc>
+              </a:tr>
+              <a:tr h="548640">
+                <a:tc>
+                  <a:txBody>
+                    <a:bodyPr/>
+                    <a:lstStyle/>
+                    <a:p>
+                      <a:pPr indent="0" marL="0">
+                        <a:buNone/>
+                      </a:pPr>
+                      <a:r>
+                        <a:rPr lang="en-US" sz="1200" dirty="0">
+                          <a:solidFill>
+                            <a:srgbClr val="1F2933"/>
+                          </a:solidFill>
+                          <a:latin typeface="Arial" pitchFamily="34" charset="0"/>
+                          <a:ea typeface="Arial" pitchFamily="34" charset="-122"/>
+                          <a:cs typeface="Arial" pitchFamily="34" charset="-120"/>
+                        </a:rPr>
+                        <a:t>About Dec 17</a:t>
+                      </a:r>
+                      <a:endParaRPr lang="en-US" sz="1200" dirty="0">
+                        <a:latin typeface="Arial" charset="0"/>
+                        <a:ea typeface="Arial" charset="0"/>
+                        <a:cs typeface="Arial" charset="0"/>
+                      </a:endParaRPr>
+                    </a:p>
+                  </a:txBody>
+                  <a:tcPr marL="91440" marR="91440" marT="45720" marB="45720" anchor="ctr">
+                    <a:lnL w="0" cap="flat" cmpd="sng" algn="ctr">
+                      <a:noFill/>
+                    </a:lnL>
+                    <a:lnR w="0" cap="flat" cmpd="sng" algn="ctr">
+                      <a:noFill/>
+                    </a:lnR>
+                    <a:lnT w="0" cap="flat" cmpd="sng" algn="ctr">
+                      <a:noFill/>
+                    </a:lnT>
+                    <a:lnB w="6350" cap="flat" cmpd="sng" algn="ctr">
+                      <a:solidFill>
+                        <a:srgbClr val="C9CED6"/>
+                      </a:solidFill>
+                      <a:prstDash val="solid"/>
+                      <a:round/>
+                      <a:headEnd type="none" w="med" len="med"/>
+                      <a:tailEnd type="none" w="med" len="med"/>
+                    </a:lnB>
+                  </a:tcPr>
+                </a:tc>
+                <a:tc>
+                  <a:txBody>
+                    <a:bodyPr/>
+                    <a:lstStyle/>
+                    <a:p>
+                      <a:pPr indent="0" marL="0">
+                        <a:buNone/>
+                      </a:pPr>
+                      <a:r>
+                        <a:rPr lang="en-US" sz="1200" b="1" dirty="0">
+                          <a:solidFill>
+                            <a:srgbClr val="1F2933"/>
+                          </a:solidFill>
+                          <a:latin typeface="Arial" pitchFamily="34" charset="0"/>
+                          <a:ea typeface="Arial" pitchFamily="34" charset="-122"/>
+                          <a:cs typeface="Arial" pitchFamily="34" charset="-120"/>
+                        </a:rPr>
+                        <a:t>Q2 FY27 results</a:t>
+                      </a:r>
+                      <a:endParaRPr lang="en-US" sz="1200" dirty="0">
+                        <a:latin typeface="Arial" charset="0"/>
+                        <a:ea typeface="Arial" charset="0"/>
+                        <a:cs typeface="Arial" charset="0"/>
+                      </a:endParaRPr>
+                    </a:p>
+                  </a:txBody>
+                  <a:tcPr marL="91440" marR="91440" marT="45720" marB="45720" anchor="ctr">
+                    <a:lnL w="0" cap="flat" cmpd="sng" algn="ctr">
+                      <a:noFill/>
+                    </a:lnL>
+                    <a:lnR w="0" cap="flat" cmpd="sng" algn="ctr">
+                      <a:noFill/>
+                    </a:lnR>
+                    <a:lnT w="0" cap="flat" cmpd="sng" algn="ctr">
+                      <a:noFill/>
+                    </a:lnT>
+                    <a:lnB w="6350" cap="flat" cmpd="sng" algn="ctr">
+                      <a:solidFill>
+                        <a:srgbClr val="C9CED6"/>
+                      </a:solidFill>
+                      <a:prstDash val="solid"/>
+                      <a:round/>
+                      <a:headEnd type="none" w="med" len="med"/>
+                      <a:tailEnd type="none" w="med" len="med"/>
+                    </a:lnB>
+                  </a:tcPr>
+                </a:tc>
+                <a:tc>
+                  <a:txBody>
+                    <a:bodyPr/>
+                    <a:lstStyle/>
+                    <a:p>
+                      <a:pPr indent="0" marL="0">
+                        <a:buNone/>
+                      </a:pPr>
+                      <a:r>
+                        <a:rPr lang="en-US" sz="1200" dirty="0">
+                          <a:solidFill>
+                            <a:srgbClr val="1F2933"/>
+                          </a:solidFill>
+                          <a:latin typeface="Arial" pitchFamily="34" charset="0"/>
+                          <a:ea typeface="Arial" pitchFamily="34" charset="-122"/>
+                          <a:cs typeface="Arial" pitchFamily="34" charset="-120"/>
+                        </a:rPr>
+                        <a:t>Gross margin below 40.6%; wholesale receivable days still rising</a:t>
+                      </a:r>
+                      <a:endParaRPr lang="en-US" sz="1200" dirty="0">
+                        <a:latin typeface="Arial" charset="0"/>
+                        <a:ea typeface="Arial" charset="0"/>
+                        <a:cs typeface="Arial" charset="0"/>
+                      </a:endParaRPr>
+                    </a:p>
+                  </a:txBody>
+                  <a:tcPr marL="91440" marR="91440" marT="45720" marB="45720" anchor="ctr">
+                    <a:lnL w="0" cap="flat" cmpd="sng" algn="ctr">
+                      <a:noFill/>
+                    </a:lnL>
+                    <a:lnR w="0" cap="flat" cmpd="sng" algn="ctr">
+                      <a:noFill/>
+                    </a:lnR>
+                    <a:lnT w="0" cap="flat" cmpd="sng" algn="ctr">
+                      <a:noFill/>
+                    </a:lnT>
+                    <a:lnB w="6350" cap="flat" cmpd="sng" algn="ctr">
+                      <a:solidFill>
+                        <a:srgbClr val="C9CED6"/>
+                      </a:solidFill>
+                      <a:prstDash val="solid"/>
+                      <a:round/>
+                      <a:headEnd type="none" w="med" len="med"/>
+                      <a:tailEnd type="none" w="med" len="med"/>
+                    </a:lnB>
+                  </a:tcPr>
+                </a:tc>
+                <a:tc>
+                  <a:txBody>
+                    <a:bodyPr/>
+                    <a:lstStyle/>
+                    <a:p>
+                      <a:pPr indent="0" marL="0">
+                        <a:buNone/>
+                      </a:pPr>
+                      <a:r>
+                        <a:rPr lang="en-US" sz="1200" dirty="0">
+                          <a:solidFill>
+                            <a:srgbClr val="1F2933"/>
+                          </a:solidFill>
+                          <a:latin typeface="Arial" pitchFamily="34" charset="0"/>
+                          <a:ea typeface="Arial" pitchFamily="34" charset="-122"/>
+                          <a:cs typeface="Arial" pitchFamily="34" charset="-120"/>
+                        </a:rPr>
+                        <a:t>Gross margin well above 41% with pricing positive</a:t>
+                      </a:r>
+                      <a:endParaRPr lang="en-US" sz="1200" dirty="0">
+                        <a:latin typeface="Arial" charset="0"/>
+                        <a:ea typeface="Arial" charset="0"/>
+                        <a:cs typeface="Arial" charset="0"/>
+                      </a:endParaRPr>
+                    </a:p>
+                  </a:txBody>
+                  <a:tcPr marL="91440" marR="91440" marT="45720" marB="45720" anchor="ctr">
+                    <a:lnL w="0" cap="flat" cmpd="sng" algn="ctr">
+                      <a:noFill/>
+                    </a:lnL>
+                    <a:lnR w="0" cap="flat" cmpd="sng" algn="ctr">
+                      <a:noFill/>
+                    </a:lnR>
+                    <a:lnT w="0" cap="flat" cmpd="sng" algn="ctr">
+                      <a:noFill/>
+                    </a:lnT>
+                    <a:lnB w="6350" cap="flat" cmpd="sng" algn="ctr">
+                      <a:solidFill>
+                        <a:srgbClr val="C9CED6"/>
+                      </a:solidFill>
+                      <a:prstDash val="solid"/>
+                      <a:round/>
+                      <a:headEnd type="none" w="med" len="med"/>
+                      <a:tailEnd type="none" w="med" len="med"/>
+                    </a:lnB>
+                  </a:tcPr>
+                </a:tc>
+              </a:tr>
+            </a:tbl>
+          </a:graphicData>
+        </a:graphic>
+      </p:graphicFrame>
+      <p:sp>
+        <p:nvSpPr>
+          <p:cNvPr id="5" name="Source"/>
+          <p:cNvSpPr txBox="1"/>
+          <p:nvPr/>
+        </p:nvSpPr>
+        <p:spPr>
+          <a:xfrm>
+            <a:off x="548640" y="5870448"/>
+            <a:ext cx="11091672" cy="502920"/>
+          </a:xfrm>
+          <a:prstGeom prst="rect">
+            <a:avLst/>
+          </a:prstGeom>
+          <a:noFill/>
+          <a:ln/>
+        </p:spPr>
+        <p:txBody>
+          <a:bodyPr wrap="square" lIns="0" tIns="0" rIns="0" bIns="0" rtlCol="0" anchor="b"/>
+          <a:lstStyle/>
+          <a:p>
+            <a:pPr indent="0" marL="0">
+              <a:buNone/>
+            </a:pPr>
+            <a:r>
+              <a:rPr lang="en-US" sz="1000" dirty="0">
+                <a:solidFill>
+                  <a:srgbClr val="6B7280"/>
+                </a:solidFill>
+                <a:latin typeface="Arial" pitchFamily="34" charset="0"/>
+                <a:ea typeface="Arial" pitchFamily="34" charset="-122"/>
+                <a:cs typeface="Arial" pitchFamily="34" charset="-120"/>
+              </a:rPr>
+              <a:t>Sources: Nike Q4 FY26 call (Investor Day date, Jun 30, 2026); Taiwan MOPS; HKEX; team decision rules (research_notes/Long or short cruxes/00_SCOREBOARD.md). Belgian hearing date from Belgian press (TV Limburg, Aug 28, 2026); Nike discloses the claim without an amount (10-Q Note 11). Dates for peer and supplier releases are expected, not confirmed.</a:t>
+            </a:r>
+            <a:endParaRPr lang="en-US" sz="1000" dirty="0"/>
+          </a:p>
+        </p:txBody>
+      </p:sp>
+      <p:sp>
+        <p:nvSpPr>
+          <p:cNvPr id="25" name="Slide Number Placeholder 0"/>
+          <p:cNvSpPr>
+            <a:spLocks noGrp="1"/>
+          </p:cNvSpPr>
+          <p:nvPr>
+            <p:ph type="sldNum" sz="quarter" idx="4294967295"/>
+          </p:nvPr>
+        </p:nvSpPr>
+        <p:spPr>
+          <a:xfrm>
+            <a:off x="10972800" y="6419088"/>
+            <a:ext cx="667512" cy="274320"/>
+          </a:xfrm>
+          <a:prstGeom prst="rect">
+            <a:avLst/>
+          </a:prstGeom>
+          <a:extLst>
+            <a:ext uri="{C572A759-6A51-4108-AA02-DFA0A04FC94B}">
+              <ma14:wrappingTextBoxFlag xmlns:ma14="http://schemas.microsoft.com/office/mac/drawingml/2011/main" val="0"/>
+            </a:ext>
+          </a:extLst>
+        </p:spPr>
+        <p:txBody>
+          <a:bodyPr/>
+          <a:lstStyle>
+            <a:lvl1pPr>
+              <a:defRPr sz="1000">
+                <a:solidFill>
+                  <a:srgbClr val="6B7280"/>
+                </a:solidFill>
+                <a:latin typeface="Arial"/>
+                <a:ea typeface="Arial"/>
+                <a:cs typeface="Arial"/>
+              </a:defRPr>
+            </a:lvl1pPr>
+          </a:lstStyle>
+          <a:p>
+            <a:pPr algn="r"/>
+            <a:fld id="{F7021451-1387-4CA6-816F-3879F97B5CBC}" type="slidenum">
+              <a:rPr b="0" lang="en-US"/>
+              <a:t>13</a:t>
+            </a:fld>
+            <a:endParaRPr lang="en-US"/>
+          </a:p>
+        </p:txBody>
+      </p:sp>
+    </p:spTree>
+  </p:cSld>
+  <p:clrMapOvr>
+    <a:masterClrMapping/>
+  </p:clrMapOvr>
+</p:sld>
+</file>
+
+<file path=ppt/slides/slide14.xml><?xml version="1.0" encoding="utf-8"?>
+<p:sld xmlns:a="http://schemas.openxmlformats.org/drawingml/2006/main" xmlns:r="http://schemas.openxmlformats.org/officeDocument/2006/relationships" xmlns:p="http://schemas.openxmlformats.org/presentationml/2006/main">
+  <p:cSld name="Slide 14">
+    <p:spTree>
+      <p:nvGrpSpPr>
+        <p:cNvPr id="1" name=""/>
+        <p:cNvGrpSpPr/>
+        <p:nvPr/>
+      </p:nvGrpSpPr>
+      <p:grpSpPr>
+        <a:xfrm>
+          <a:off x="0" y="0"/>
+          <a:ext cx="0" cy="0"/>
+          <a:chOff x="0" y="0"/>
+          <a:chExt cx="0" cy="0"/>
+        </a:xfrm>
+      </p:grpSpPr>
+      <p:sp>
+        <p:nvSpPr>
+          <p:cNvPr id="2" name="Text 1"/>
+          <p:cNvSpPr/>
+          <p:nvPr>
+            <p:ph idx="101" type="title" hasCustomPrompt="1"/>
+          </p:nvPr>
+        </p:nvSpPr>
+        <p:spPr>
+          <a:xfrm>
+            <a:off x="548640" y="347472"/>
+            <a:ext cx="11091672" cy="914400"/>
+          </a:xfrm>
+          <a:prstGeom prst="rect">
+            <a:avLst/>
+          </a:prstGeom>
+          <a:noFill/>
+          <a:ln/>
+        </p:spPr>
+        <p:txBody>
+          <a:bodyPr wrap="square" lIns="0" tIns="0" rIns="0" bIns="0" rtlCol="0" anchor="t"/>
+          <a:lstStyle/>
+          <a:p>
+            <a:pPr algn="l" indent="0" marL="0">
+              <a:buNone/>
+            </a:pPr>
+            <a:r>
+              <a:rPr lang="en-US" sz="2400" b="1" dirty="0">
+                <a:solidFill>
+                  <a:srgbClr val="0B2A4A"/>
+                </a:solidFill>
+                <a:latin typeface="Arial" pitchFamily="34" charset="0"/>
+                <a:ea typeface="Arial" pitchFamily="34" charset="-122"/>
+                <a:cs typeface="Arial" pitchFamily="34" charset="-120"/>
+              </a:rPr>
+              <a:t>Appendix: independent checkers downgraded several early findings, and the deck uses the corrected grades</a:t>
+            </a:r>
+            <a:endParaRPr lang="en-US" sz="2400" dirty="0"/>
+          </a:p>
+        </p:txBody>
+      </p:sp>
+      <p:graphicFrame>
+        <p:nvGraphicFramePr>
+          <p:cNvPr id="15" name="Table 0"/>
+          <p:cNvGraphicFramePr>
+            <a:graphicFrameLocks noGrp="1"/>
+          </p:cNvGraphicFramePr>
+          <p:nvPr>
+            <p:extLst>
+              <p:ext uri="{D42A27DB-BD31-4B8C-83A1-F6EECF244321}">
+                <p14:modId xmlns:p14="http://schemas.microsoft.com/office/powerpoint/2010/main" val="1579011935"/>
+              </p:ext>
+            </p:extLst>
+          </p:nvPr>
+        </p:nvGraphicFramePr>
+        <p:xfrm>
+          <a:off x="548640" y="1463040"/>
+          <a:ext cx="11091672" cy="914400"/>
+        </p:xfrm>
+        <a:graphic>
+          <a:graphicData uri="http://schemas.openxmlformats.org/drawingml/2006/table">
+            <a:tbl>
+              <a:tblPr/>
+              <a:tblGrid>
+                <a:gridCol w="4206240"/>
+                <a:gridCol w="6885432"/>
+              </a:tblGrid>
+              <a:tr h="347472">
+                <a:tc>
+                  <a:txBody>
+                    <a:bodyPr/>
+                    <a:lstStyle/>
+                    <a:p>
+                      <a:pPr algn="l" indent="0" marL="0">
+                        <a:buNone/>
+                      </a:pPr>
+                      <a:r>
+                        <a:rPr lang="en-US" sz="1200" b="1" dirty="0">
+                          <a:solidFill>
+                            <a:srgbClr val="FFFFFF"/>
+                          </a:solidFill>
+                          <a:latin typeface="Arial" pitchFamily="34" charset="0"/>
+                          <a:ea typeface="Arial" pitchFamily="34" charset="-122"/>
+                          <a:cs typeface="Arial" pitchFamily="34" charset="-120"/>
+                        </a:rPr>
+                        <a:t>Early claim</a:t>
+                      </a:r>
+                      <a:endParaRPr lang="en-US" sz="1200" dirty="0">
+                        <a:latin typeface="Arial" charset="0"/>
+                        <a:ea typeface="Arial" charset="0"/>
+                        <a:cs typeface="Arial" charset="0"/>
+                      </a:endParaRPr>
+                    </a:p>
+                  </a:txBody>
+                  <a:tcPr marL="91440" marR="91440" marT="45720" marB="45720" anchor="ctr">
+                    <a:lnL w="0" cap="flat" cmpd="sng" algn="ctr">
+                      <a:noFill/>
+                    </a:lnL>
+                    <a:lnR w="0" cap="flat" cmpd="sng" algn="ctr">
+                      <a:noFill/>
+                    </a:lnR>
+                    <a:lnT w="0" cap="flat" cmpd="sng" algn="ctr">
+                      <a:noFill/>
+                    </a:lnT>
+                    <a:lnB w="0" cap="flat" cmpd="sng" algn="ctr">
+                      <a:noFill/>
+                    </a:lnB>
+                    <a:solidFill>
+                      <a:srgbClr val="0B2A4A"/>
+                    </a:solidFill>
+                  </a:tcPr>
+                </a:tc>
+                <a:tc>
+                  <a:txBody>
+                    <a:bodyPr/>
+                    <a:lstStyle/>
+                    <a:p>
+                      <a:pPr algn="l" indent="0" marL="0">
+                        <a:buNone/>
+                      </a:pPr>
+                      <a:r>
+                        <a:rPr lang="en-US" sz="1200" b="1" dirty="0">
+                          <a:solidFill>
+                            <a:srgbClr val="FFFFFF"/>
+                          </a:solidFill>
+                          <a:latin typeface="Arial" pitchFamily="34" charset="0"/>
+                          <a:ea typeface="Arial" pitchFamily="34" charset="-122"/>
+                          <a:cs typeface="Arial" pitchFamily="34" charset="-120"/>
+                        </a:rPr>
+                        <a:t>After checking</a:t>
+                      </a:r>
+                      <a:endParaRPr lang="en-US" sz="1200" dirty="0">
+                        <a:latin typeface="Arial" charset="0"/>
+                        <a:ea typeface="Arial" charset="0"/>
+                        <a:cs typeface="Arial" charset="0"/>
+                      </a:endParaRPr>
+                    </a:p>
+                  </a:txBody>
+                  <a:tcPr marL="91440" marR="91440" marT="45720" marB="45720" anchor="ctr">
+                    <a:lnL w="0" cap="flat" cmpd="sng" algn="ctr">
+                      <a:noFill/>
+                    </a:lnL>
+                    <a:lnR w="0" cap="flat" cmpd="sng" algn="ctr">
+                      <a:noFill/>
+                    </a:lnR>
+                    <a:lnT w="0" cap="flat" cmpd="sng" algn="ctr">
+                      <a:noFill/>
+                    </a:lnT>
+                    <a:lnB w="0" cap="flat" cmpd="sng" algn="ctr">
+                      <a:noFill/>
+                    </a:lnB>
+                    <a:solidFill>
+                      <a:srgbClr val="0B2A4A"/>
+                    </a:solidFill>
+                  </a:tcPr>
+                </a:tc>
+              </a:tr>
+              <a:tr h="457200">
+                <a:tc>
+                  <a:txBody>
+                    <a:bodyPr/>
+                    <a:lstStyle/>
+                    <a:p>
+                      <a:pPr indent="0" marL="0">
+                        <a:buNone/>
+                      </a:pPr>
+                      <a:r>
+                        <a:rPr lang="en-US" sz="1200" dirty="0">
+                          <a:solidFill>
+                            <a:srgbClr val="1F2933"/>
+                          </a:solidFill>
+                          <a:latin typeface="Arial" pitchFamily="34" charset="0"/>
+                          <a:ea typeface="Arial" pitchFamily="34" charset="-122"/>
+                          <a:cs typeface="Arial" pitchFamily="34" charset="-120"/>
+                        </a:rPr>
+                        <a:t>Resale decline has stopped (Nike + Jordan -2.3% YoY)</a:t>
+                      </a:r>
+                      <a:endParaRPr lang="en-US" sz="1200" dirty="0">
+                        <a:latin typeface="Arial" charset="0"/>
+                        <a:ea typeface="Arial" charset="0"/>
+                        <a:cs typeface="Arial" charset="0"/>
+                      </a:endParaRPr>
+                    </a:p>
+                  </a:txBody>
+                  <a:tcPr marL="91440" marR="91440" marT="45720" marB="45720" anchor="ctr">
+                    <a:lnL w="0" cap="flat" cmpd="sng" algn="ctr">
+                      <a:noFill/>
+                    </a:lnL>
+                    <a:lnR w="0" cap="flat" cmpd="sng" algn="ctr">
+                      <a:noFill/>
+                    </a:lnR>
+                    <a:lnT w="0" cap="flat" cmpd="sng" algn="ctr">
+                      <a:noFill/>
+                    </a:lnT>
+                    <a:lnB w="6350" cap="flat" cmpd="sng" algn="ctr">
+                      <a:solidFill>
+                        <a:srgbClr val="C9CED6"/>
+                      </a:solidFill>
+                      <a:prstDash val="solid"/>
+                      <a:round/>
+                      <a:headEnd type="none" w="med" len="med"/>
+                      <a:tailEnd type="none" w="med" len="med"/>
+                    </a:lnB>
+                  </a:tcPr>
+                </a:tc>
+                <a:tc>
+                  <a:txBody>
+                    <a:bodyPr/>
+                    <a:lstStyle/>
+                    <a:p>
+                      <a:pPr indent="0" marL="0">
+                        <a:buNone/>
+                      </a:pPr>
+                      <a:r>
+                        <a:rPr lang="en-US" sz="1200" dirty="0">
+                          <a:solidFill>
+                            <a:srgbClr val="1F2933"/>
+                          </a:solidFill>
+                          <a:latin typeface="Arial" pitchFamily="34" charset="0"/>
+                          <a:ea typeface="Arial" pitchFamily="34" charset="-122"/>
+                          <a:cs typeface="Arial" pitchFamily="34" charset="-120"/>
+                        </a:rPr>
+                        <a:t>Mostly the weaker yen; about -9.5% in USD, rivals -5.5%. Launch-premium gain disappears for men's sizes</a:t>
+                      </a:r>
+                      <a:endParaRPr lang="en-US" sz="1200" dirty="0">
+                        <a:latin typeface="Arial" charset="0"/>
+                        <a:ea typeface="Arial" charset="0"/>
+                        <a:cs typeface="Arial" charset="0"/>
+                      </a:endParaRPr>
+                    </a:p>
+                  </a:txBody>
+                  <a:tcPr marL="91440" marR="91440" marT="45720" marB="45720" anchor="ctr">
+                    <a:lnL w="0" cap="flat" cmpd="sng" algn="ctr">
+                      <a:noFill/>
+                    </a:lnL>
+                    <a:lnR w="0" cap="flat" cmpd="sng" algn="ctr">
+                      <a:noFill/>
+                    </a:lnR>
+                    <a:lnT w="0" cap="flat" cmpd="sng" algn="ctr">
+                      <a:noFill/>
+                    </a:lnT>
+                    <a:lnB w="6350" cap="flat" cmpd="sng" algn="ctr">
+                      <a:solidFill>
+                        <a:srgbClr val="C9CED6"/>
+                      </a:solidFill>
+                      <a:prstDash val="solid"/>
+                      <a:round/>
+                      <a:headEnd type="none" w="med" len="med"/>
+                      <a:tailEnd type="none" w="med" len="med"/>
+                    </a:lnB>
+                  </a:tcPr>
+                </a:tc>
+              </a:tr>
+              <a:tr h="457200">
+                <a:tc>
+                  <a:txBody>
+                    <a:bodyPr/>
+                    <a:lstStyle/>
+                    <a:p>
+                      <a:pPr indent="0" marL="0">
+                        <a:buNone/>
+                      </a:pPr>
+                      <a:r>
+                        <a:rPr lang="en-US" sz="1200" dirty="0">
+                          <a:solidFill>
+                            <a:srgbClr val="1F2933"/>
+                          </a:solidFill>
+                          <a:latin typeface="Arial" pitchFamily="34" charset="0"/>
+                          <a:ea typeface="Arial" pitchFamily="34" charset="-122"/>
+                          <a:cs typeface="Arial" pitchFamily="34" charset="-120"/>
+                        </a:rPr>
+                        <a:t>Market size: strong short on North America volume</a:t>
+                      </a:r>
+                      <a:endParaRPr lang="en-US" sz="1200" dirty="0">
+                        <a:latin typeface="Arial" charset="0"/>
+                        <a:ea typeface="Arial" charset="0"/>
+                        <a:cs typeface="Arial" charset="0"/>
+                      </a:endParaRPr>
+                    </a:p>
+                  </a:txBody>
+                  <a:tcPr marL="91440" marR="91440" marT="45720" marB="45720" anchor="ctr">
+                    <a:lnL w="0" cap="flat" cmpd="sng" algn="ctr">
+                      <a:noFill/>
+                    </a:lnL>
+                    <a:lnR w="0" cap="flat" cmpd="sng" algn="ctr">
+                      <a:noFill/>
+                    </a:lnR>
+                    <a:lnT w="0" cap="flat" cmpd="sng" algn="ctr">
+                      <a:noFill/>
+                    </a:lnT>
+                    <a:lnB w="6350" cap="flat" cmpd="sng" algn="ctr">
+                      <a:solidFill>
+                        <a:srgbClr val="C9CED6"/>
+                      </a:solidFill>
+                      <a:prstDash val="solid"/>
+                      <a:round/>
+                      <a:headEnd type="none" w="med" len="med"/>
+                      <a:tailEnd type="none" w="med" len="med"/>
+                    </a:lnB>
+                  </a:tcPr>
+                </a:tc>
+                <a:tc>
+                  <a:txBody>
+                    <a:bodyPr/>
+                    <a:lstStyle/>
+                    <a:p>
+                      <a:pPr indent="0" marL="0">
+                        <a:buNone/>
+                      </a:pPr>
+                      <a:r>
+                        <a:rPr lang="en-US" sz="1200" dirty="0">
+                          <a:solidFill>
+                            <a:srgbClr val="1F2933"/>
+                          </a:solidFill>
+                          <a:latin typeface="Arial" pitchFamily="34" charset="0"/>
+                          <a:ea typeface="Arial" pitchFamily="34" charset="-122"/>
+                          <a:cs typeface="Arial" pitchFamily="34" charset="-120"/>
+                        </a:rPr>
+                        <a:t>Not supported for the last four quarters (Nike units at or above real spending); rests on FY24 to FY25 and price</a:t>
+                      </a:r>
+                      <a:endParaRPr lang="en-US" sz="1200" dirty="0">
+                        <a:latin typeface="Arial" charset="0"/>
+                        <a:ea typeface="Arial" charset="0"/>
+                        <a:cs typeface="Arial" charset="0"/>
+                      </a:endParaRPr>
+                    </a:p>
+                  </a:txBody>
+                  <a:tcPr marL="91440" marR="91440" marT="45720" marB="45720" anchor="ctr">
+                    <a:lnL w="0" cap="flat" cmpd="sng" algn="ctr">
+                      <a:noFill/>
+                    </a:lnL>
+                    <a:lnR w="0" cap="flat" cmpd="sng" algn="ctr">
+                      <a:noFill/>
+                    </a:lnR>
+                    <a:lnT w="0" cap="flat" cmpd="sng" algn="ctr">
+                      <a:noFill/>
+                    </a:lnT>
+                    <a:lnB w="6350" cap="flat" cmpd="sng" algn="ctr">
+                      <a:solidFill>
+                        <a:srgbClr val="C9CED6"/>
+                      </a:solidFill>
+                      <a:prstDash val="solid"/>
+                      <a:round/>
+                      <a:headEnd type="none" w="med" len="med"/>
+                      <a:tailEnd type="none" w="med" len="med"/>
+                    </a:lnB>
+                  </a:tcPr>
+                </a:tc>
+              </a:tr>
+              <a:tr h="411480">
+                <a:tc>
+                  <a:txBody>
+                    <a:bodyPr/>
+                    <a:lstStyle/>
+                    <a:p>
+                      <a:pPr indent="0" marL="0">
+                        <a:buNone/>
+                      </a:pPr>
+                      <a:r>
+                        <a:rPr lang="en-US" sz="1200" dirty="0">
+                          <a:solidFill>
+                            <a:srgbClr val="1F2933"/>
+                          </a:solidFill>
+                          <a:latin typeface="Arial" pitchFamily="34" charset="0"/>
+                          <a:ea typeface="Arial" pitchFamily="34" charset="-122"/>
+                          <a:cs typeface="Arial" pitchFamily="34" charset="-120"/>
+                        </a:rPr>
+                        <a:t>Factory vs US imports: strong</a:t>
+                      </a:r>
+                      <a:endParaRPr lang="en-US" sz="1200" dirty="0">
+                        <a:latin typeface="Arial" charset="0"/>
+                        <a:ea typeface="Arial" charset="0"/>
+                        <a:cs typeface="Arial" charset="0"/>
+                      </a:endParaRPr>
+                    </a:p>
+                  </a:txBody>
+                  <a:tcPr marL="91440" marR="91440" marT="45720" marB="45720" anchor="ctr">
+                    <a:lnL w="0" cap="flat" cmpd="sng" algn="ctr">
+                      <a:noFill/>
+                    </a:lnL>
+                    <a:lnR w="0" cap="flat" cmpd="sng" algn="ctr">
+                      <a:noFill/>
+                    </a:lnR>
+                    <a:lnT w="0" cap="flat" cmpd="sng" algn="ctr">
+                      <a:noFill/>
+                    </a:lnT>
+                    <a:lnB w="6350" cap="flat" cmpd="sng" algn="ctr">
+                      <a:solidFill>
+                        <a:srgbClr val="C9CED6"/>
+                      </a:solidFill>
+                      <a:prstDash val="solid"/>
+                      <a:round/>
+                      <a:headEnd type="none" w="med" len="med"/>
+                      <a:tailEnd type="none" w="med" len="med"/>
+                    </a:lnB>
+                  </a:tcPr>
+                </a:tc>
+                <a:tc>
+                  <a:txBody>
+                    <a:bodyPr/>
+                    <a:lstStyle/>
+                    <a:p>
+                      <a:pPr indent="0" marL="0">
+                        <a:buNone/>
+                      </a:pPr>
+                      <a:r>
+                        <a:rPr lang="en-US" sz="1200" dirty="0">
+                          <a:solidFill>
+                            <a:srgbClr val="1F2933"/>
+                          </a:solidFill>
+                          <a:latin typeface="Arial" pitchFamily="34" charset="0"/>
+                          <a:ea typeface="Arial" pitchFamily="34" charset="-122"/>
+                          <a:cs typeface="Arial" pitchFamily="34" charset="-120"/>
+                        </a:rPr>
+                        <a:t>Moderate; four of seven benchmarks are the same goods from the same countries</a:t>
+                      </a:r>
+                      <a:endParaRPr lang="en-US" sz="1200" dirty="0">
+                        <a:latin typeface="Arial" charset="0"/>
+                        <a:ea typeface="Arial" charset="0"/>
+                        <a:cs typeface="Arial" charset="0"/>
+                      </a:endParaRPr>
+                    </a:p>
+                  </a:txBody>
+                  <a:tcPr marL="91440" marR="91440" marT="45720" marB="45720" anchor="ctr">
+                    <a:lnL w="0" cap="flat" cmpd="sng" algn="ctr">
+                      <a:noFill/>
+                    </a:lnL>
+                    <a:lnR w="0" cap="flat" cmpd="sng" algn="ctr">
+                      <a:noFill/>
+                    </a:lnR>
+                    <a:lnT w="0" cap="flat" cmpd="sng" algn="ctr">
+                      <a:noFill/>
+                    </a:lnT>
+                    <a:lnB w="6350" cap="flat" cmpd="sng" algn="ctr">
+                      <a:solidFill>
+                        <a:srgbClr val="C9CED6"/>
+                      </a:solidFill>
+                      <a:prstDash val="solid"/>
+                      <a:round/>
+                      <a:headEnd type="none" w="med" len="med"/>
+                      <a:tailEnd type="none" w="med" len="med"/>
+                    </a:lnB>
+                  </a:tcPr>
+                </a:tc>
+              </a:tr>
+              <a:tr h="411480">
+                <a:tc>
+                  <a:txBody>
+                    <a:bodyPr/>
+                    <a:lstStyle/>
+                    <a:p>
+                      <a:pPr indent="0" marL="0">
+                        <a:buNone/>
+                      </a:pPr>
+                      <a:r>
+                        <a:rPr lang="en-US" sz="1200" dirty="0">
+                          <a:solidFill>
+                            <a:srgbClr val="1F2933"/>
+                          </a:solidFill>
+                          <a:latin typeface="Arial" pitchFamily="34" charset="0"/>
+                          <a:ea typeface="Arial" pitchFamily="34" charset="-122"/>
+                          <a:cs typeface="Arial" pitchFamily="34" charset="-120"/>
+                        </a:rPr>
+                        <a:t>Product hiring share doubled to 36%</a:t>
+                      </a:r>
+                      <a:endParaRPr lang="en-US" sz="1200" dirty="0">
+                        <a:latin typeface="Arial" charset="0"/>
+                        <a:ea typeface="Arial" charset="0"/>
+                        <a:cs typeface="Arial" charset="0"/>
+                      </a:endParaRPr>
+                    </a:p>
+                  </a:txBody>
+                  <a:tcPr marL="91440" marR="91440" marT="45720" marB="45720" anchor="ctr">
+                    <a:lnL w="0" cap="flat" cmpd="sng" algn="ctr">
+                      <a:noFill/>
+                    </a:lnL>
+                    <a:lnR w="0" cap="flat" cmpd="sng" algn="ctr">
+                      <a:noFill/>
+                    </a:lnR>
+                    <a:lnT w="0" cap="flat" cmpd="sng" algn="ctr">
+                      <a:noFill/>
+                    </a:lnT>
+                    <a:lnB w="6350" cap="flat" cmpd="sng" algn="ctr">
+                      <a:solidFill>
+                        <a:srgbClr val="C9CED6"/>
+                      </a:solidFill>
+                      <a:prstDash val="solid"/>
+                      <a:round/>
+                      <a:headEnd type="none" w="med" len="med"/>
+                      <a:tailEnd type="none" w="med" len="med"/>
+                    </a:lnB>
+                  </a:tcPr>
+                </a:tc>
+                <a:tc>
+                  <a:txBody>
+                    <a:bodyPr/>
+                    <a:lstStyle/>
+                    <a:p>
+                      <a:pPr indent="0" marL="0">
+                        <a:buNone/>
+                      </a:pPr>
+                      <a:r>
+                        <a:rPr lang="en-US" sz="1200" dirty="0">
+                          <a:solidFill>
+                            <a:srgbClr val="1F2933"/>
+                          </a:solidFill>
+                          <a:latin typeface="Arial" pitchFamily="34" charset="0"/>
+                          <a:ea typeface="Arial" pitchFamily="34" charset="-122"/>
+                          <a:cs typeface="Arial" pitchFamily="34" charset="-120"/>
+                        </a:rPr>
+                        <a:t>Overstated; October open postings are about 5% to 6% below last year</a:t>
+                      </a:r>
+                      <a:endParaRPr lang="en-US" sz="1200" dirty="0">
+                        <a:latin typeface="Arial" charset="0"/>
+                        <a:ea typeface="Arial" charset="0"/>
+                        <a:cs typeface="Arial" charset="0"/>
+                      </a:endParaRPr>
+                    </a:p>
+                  </a:txBody>
+                  <a:tcPr marL="91440" marR="91440" marT="45720" marB="45720" anchor="ctr">
+                    <a:lnL w="0" cap="flat" cmpd="sng" algn="ctr">
+                      <a:noFill/>
+                    </a:lnL>
+                    <a:lnR w="0" cap="flat" cmpd="sng" algn="ctr">
+                      <a:noFill/>
+                    </a:lnR>
+                    <a:lnT w="0" cap="flat" cmpd="sng" algn="ctr">
+                      <a:noFill/>
+                    </a:lnT>
+                    <a:lnB w="6350" cap="flat" cmpd="sng" algn="ctr">
+                      <a:solidFill>
+                        <a:srgbClr val="C9CED6"/>
+                      </a:solidFill>
+                      <a:prstDash val="solid"/>
+                      <a:round/>
+                      <a:headEnd type="none" w="med" len="med"/>
+                      <a:tailEnd type="none" w="med" len="med"/>
+                    </a:lnB>
+                  </a:tcPr>
+                </a:tc>
+              </a:tr>
+              <a:tr h="457200">
+                <a:tc>
+                  <a:txBody>
+                    <a:bodyPr/>
+                    <a:lstStyle/>
+                    <a:p>
+                      <a:pPr indent="0" marL="0">
+                        <a:buNone/>
+                      </a:pPr>
+                      <a:r>
+                        <a:rPr lang="en-US" sz="1200" dirty="0">
+                          <a:solidFill>
+                            <a:srgbClr val="1F2933"/>
+                          </a:solidFill>
+                          <a:latin typeface="Arial" pitchFamily="34" charset="0"/>
+                          <a:ea typeface="Arial" pitchFamily="34" charset="-122"/>
+                          <a:cs typeface="Arial" pitchFamily="34" charset="-120"/>
+                        </a:rPr>
+                        <a:t>Store closures: 33 of 73 US in-line stores (45%)</a:t>
+                      </a:r>
+                      <a:endParaRPr lang="en-US" sz="1200" dirty="0">
+                        <a:latin typeface="Arial" charset="0"/>
+                        <a:ea typeface="Arial" charset="0"/>
+                        <a:cs typeface="Arial" charset="0"/>
+                      </a:endParaRPr>
+                    </a:p>
+                  </a:txBody>
+                  <a:tcPr marL="91440" marR="91440" marT="45720" marB="45720" anchor="ctr">
+                    <a:lnL w="0" cap="flat" cmpd="sng" algn="ctr">
+                      <a:noFill/>
+                    </a:lnL>
+                    <a:lnR w="0" cap="flat" cmpd="sng" algn="ctr">
+                      <a:noFill/>
+                    </a:lnR>
+                    <a:lnT w="0" cap="flat" cmpd="sng" algn="ctr">
+                      <a:noFill/>
+                    </a:lnT>
+                    <a:lnB w="6350" cap="flat" cmpd="sng" algn="ctr">
+                      <a:solidFill>
+                        <a:srgbClr val="C9CED6"/>
+                      </a:solidFill>
+                      <a:prstDash val="solid"/>
+                      <a:round/>
+                      <a:headEnd type="none" w="med" len="med"/>
+                      <a:tailEnd type="none" w="med" len="med"/>
+                    </a:lnB>
+                  </a:tcPr>
+                </a:tc>
+                <a:tc>
+                  <a:txBody>
+                    <a:bodyPr/>
+                    <a:lstStyle/>
+                    <a:p>
+                      <a:pPr indent="0" marL="0">
+                        <a:buNone/>
+                      </a:pPr>
+                      <a:r>
+                        <a:rPr lang="en-US" sz="1200" dirty="0">
+                          <a:solidFill>
+                            <a:srgbClr val="1F2933"/>
+                          </a:solidFill>
+                          <a:latin typeface="Arial" pitchFamily="34" charset="0"/>
+                          <a:ea typeface="Arial" pitchFamily="34" charset="-122"/>
+                          <a:cs typeface="Arial" pitchFamily="34" charset="-120"/>
+                        </a:rPr>
+                        <a:t>Confirmed, but all small Well Collective doors; about 0.15% to 0.35% of revenue, so weak as a revenue signal</a:t>
+                      </a:r>
+                      <a:endParaRPr lang="en-US" sz="1200" dirty="0">
+                        <a:latin typeface="Arial" charset="0"/>
+                        <a:ea typeface="Arial" charset="0"/>
+                        <a:cs typeface="Arial" charset="0"/>
+                      </a:endParaRPr>
+                    </a:p>
+                  </a:txBody>
+                  <a:tcPr marL="91440" marR="91440" marT="45720" marB="45720" anchor="ctr">
+                    <a:lnL w="0" cap="flat" cmpd="sng" algn="ctr">
+                      <a:noFill/>
+                    </a:lnL>
+                    <a:lnR w="0" cap="flat" cmpd="sng" algn="ctr">
+                      <a:noFill/>
+                    </a:lnR>
+                    <a:lnT w="0" cap="flat" cmpd="sng" algn="ctr">
+                      <a:noFill/>
+                    </a:lnT>
+                    <a:lnB w="6350" cap="flat" cmpd="sng" algn="ctr">
+                      <a:solidFill>
+                        <a:srgbClr val="C9CED6"/>
+                      </a:solidFill>
+                      <a:prstDash val="solid"/>
+                      <a:round/>
+                      <a:headEnd type="none" w="med" len="med"/>
+                      <a:tailEnd type="none" w="med" len="med"/>
+                    </a:lnB>
+                  </a:tcPr>
+                </a:tc>
+              </a:tr>
+              <a:tr h="411480">
+                <a:tc>
+                  <a:txBody>
+                    <a:bodyPr/>
+                    <a:lstStyle/>
+                    <a:p>
+                      <a:pPr indent="0" marL="0">
+                        <a:buNone/>
+                      </a:pPr>
+                      <a:r>
+                        <a:rPr lang="en-US" sz="1200" dirty="0">
+                          <a:solidFill>
+                            <a:srgbClr val="1F2933"/>
+                          </a:solidFill>
+                          <a:latin typeface="Arial" pitchFamily="34" charset="0"/>
+                          <a:ea typeface="Arial" pitchFamily="34" charset="-122"/>
+                          <a:cs typeface="Arial" pitchFamily="34" charset="-120"/>
+                        </a:rPr>
+                        <a:t>Positioning (13F exits, short interest, insider buying)</a:t>
+                      </a:r>
+                      <a:endParaRPr lang="en-US" sz="1200" dirty="0">
+                        <a:latin typeface="Arial" charset="0"/>
+                        <a:ea typeface="Arial" charset="0"/>
+                        <a:cs typeface="Arial" charset="0"/>
+                      </a:endParaRPr>
+                    </a:p>
+                  </a:txBody>
+                  <a:tcPr marL="91440" marR="91440" marT="45720" marB="45720" anchor="ctr">
+                    <a:lnL w="0" cap="flat" cmpd="sng" algn="ctr">
+                      <a:noFill/>
+                    </a:lnL>
+                    <a:lnR w="0" cap="flat" cmpd="sng" algn="ctr">
+                      <a:noFill/>
+                    </a:lnR>
+                    <a:lnT w="0" cap="flat" cmpd="sng" algn="ctr">
+                      <a:noFill/>
+                    </a:lnT>
+                    <a:lnB w="6350" cap="flat" cmpd="sng" algn="ctr">
+                      <a:solidFill>
+                        <a:srgbClr val="C9CED6"/>
+                      </a:solidFill>
+                      <a:prstDash val="solid"/>
+                      <a:round/>
+                      <a:headEnd type="none" w="med" len="med"/>
+                      <a:tailEnd type="none" w="med" len="med"/>
+                    </a:lnB>
+                  </a:tcPr>
+                </a:tc>
+                <a:tc>
+                  <a:txBody>
+                    <a:bodyPr/>
+                    <a:lstStyle/>
+                    <a:p>
+                      <a:pPr indent="0" marL="0">
+                        <a:buNone/>
+                      </a:pPr>
+                      <a:r>
+                        <a:rPr lang="en-US" sz="1200" dirty="0">
+                          <a:solidFill>
+                            <a:srgbClr val="1F2933"/>
+                          </a:solidFill>
+                          <a:latin typeface="Arial" pitchFamily="34" charset="0"/>
+                          <a:ea typeface="Arial" pitchFamily="34" charset="-122"/>
+                          <a:cs typeface="Arial" pitchFamily="34" charset="-120"/>
+                        </a:rPr>
+                        <a:t>Did not predict returns in historical tests; fund exits overstated about fivefold</a:t>
+                      </a:r>
+                      <a:endParaRPr lang="en-US" sz="1200" dirty="0">
+                        <a:latin typeface="Arial" charset="0"/>
+                        <a:ea typeface="Arial" charset="0"/>
+                        <a:cs typeface="Arial" charset="0"/>
+                      </a:endParaRPr>
+                    </a:p>
+                  </a:txBody>
+                  <a:tcPr marL="91440" marR="91440" marT="45720" marB="45720" anchor="ctr">
+                    <a:lnL w="0" cap="flat" cmpd="sng" algn="ctr">
+                      <a:noFill/>
+                    </a:lnL>
+                    <a:lnR w="0" cap="flat" cmpd="sng" algn="ctr">
+                      <a:noFill/>
+                    </a:lnR>
+                    <a:lnT w="0" cap="flat" cmpd="sng" algn="ctr">
+                      <a:noFill/>
+                    </a:lnT>
+                    <a:lnB w="6350" cap="flat" cmpd="sng" algn="ctr">
+                      <a:solidFill>
+                        <a:srgbClr val="C9CED6"/>
+                      </a:solidFill>
+                      <a:prstDash val="solid"/>
+                      <a:round/>
+                      <a:headEnd type="none" w="med" len="med"/>
+                      <a:tailEnd type="none" w="med" len="med"/>
+                    </a:lnB>
+                  </a:tcPr>
+                </a:tc>
+              </a:tr>
+              <a:tr h="566928">
+                <a:tc>
+                  <a:txBody>
+                    <a:bodyPr/>
+                    <a:lstStyle/>
+                    <a:p>
+                      <a:pPr indent="0" marL="0">
+                        <a:buNone/>
+                      </a:pPr>
+                      <a:r>
+                        <a:rPr lang="en-US" sz="1200" dirty="0">
+                          <a:solidFill>
+                            <a:srgbClr val="1F2933"/>
+                          </a:solidFill>
+                          <a:latin typeface="Arial" pitchFamily="34" charset="0"/>
+                          <a:ea typeface="Arial" pitchFamily="34" charset="-122"/>
+                          <a:cs typeface="Arial" pitchFamily="34" charset="-120"/>
+                        </a:rPr>
+                        <a:t>Reserve releases explain the FY26 guidance beats ($0.30 to $0.43 EPS)</a:t>
+                      </a:r>
+                      <a:endParaRPr lang="en-US" sz="1200" dirty="0">
+                        <a:latin typeface="Arial" charset="0"/>
+                        <a:ea typeface="Arial" charset="0"/>
+                        <a:cs typeface="Arial" charset="0"/>
+                      </a:endParaRPr>
+                    </a:p>
+                  </a:txBody>
+                  <a:tcPr marL="91440" marR="91440" marT="45720" marB="45720" anchor="ctr">
+                    <a:lnL w="0" cap="flat" cmpd="sng" algn="ctr">
+                      <a:noFill/>
+                    </a:lnL>
+                    <a:lnR w="0" cap="flat" cmpd="sng" algn="ctr">
+                      <a:noFill/>
+                    </a:lnR>
+                    <a:lnT w="0" cap="flat" cmpd="sng" algn="ctr">
+                      <a:noFill/>
+                    </a:lnT>
+                    <a:lnB w="6350" cap="flat" cmpd="sng" algn="ctr">
+                      <a:solidFill>
+                        <a:srgbClr val="C9CED6"/>
+                      </a:solidFill>
+                      <a:prstDash val="solid"/>
+                      <a:round/>
+                      <a:headEnd type="none" w="med" len="med"/>
+                      <a:tailEnd type="none" w="med" len="med"/>
+                    </a:lnB>
+                  </a:tcPr>
+                </a:tc>
+                <a:tc>
+                  <a:txBody>
+                    <a:bodyPr/>
+                    <a:lstStyle/>
+                    <a:p>
+                      <a:pPr indent="0" marL="0">
+                        <a:buNone/>
+                      </a:pPr>
+                      <a:r>
+                        <a:rPr lang="en-US" sz="1200" dirty="0">
+                          <a:solidFill>
+                            <a:srgbClr val="1F2933"/>
+                          </a:solidFill>
+                          <a:latin typeface="Arial" pitchFamily="34" charset="0"/>
+                          <a:ea typeface="Arial" pitchFamily="34" charset="-122"/>
+                          <a:cs typeface="Arial" pitchFamily="34" charset="-120"/>
+                        </a:rPr>
+                        <a:t>Skeptic check: a pre-announced base effect; filings cannot separate lower provision from higher usage; beat and reserve swing correlate -0.08 over eight quarters</a:t>
+                      </a:r>
+                      <a:endParaRPr lang="en-US" sz="1200" dirty="0">
+                        <a:latin typeface="Arial" charset="0"/>
+                        <a:ea typeface="Arial" charset="0"/>
+                        <a:cs typeface="Arial" charset="0"/>
+                      </a:endParaRPr>
+                    </a:p>
+                  </a:txBody>
+                  <a:tcPr marL="91440" marR="91440" marT="45720" marB="45720" anchor="ctr">
+                    <a:lnL w="0" cap="flat" cmpd="sng" algn="ctr">
+                      <a:noFill/>
+                    </a:lnL>
+                    <a:lnR w="0" cap="flat" cmpd="sng" algn="ctr">
+                      <a:noFill/>
+                    </a:lnR>
+                    <a:lnT w="0" cap="flat" cmpd="sng" algn="ctr">
+                      <a:noFill/>
+                    </a:lnT>
+                    <a:lnB w="6350" cap="flat" cmpd="sng" algn="ctr">
+                      <a:solidFill>
+                        <a:srgbClr val="C9CED6"/>
+                      </a:solidFill>
+                      <a:prstDash val="solid"/>
+                      <a:round/>
+                      <a:headEnd type="none" w="med" len="med"/>
+                      <a:tailEnd type="none" w="med" len="med"/>
+                    </a:lnB>
+                  </a:tcPr>
+                </a:tc>
+              </a:tr>
+              <a:tr h="566928">
+                <a:tc>
+                  <a:txBody>
+                    <a:bodyPr/>
+                    <a:lstStyle/>
+                    <a:p>
+                      <a:pPr indent="0" marL="0">
+                        <a:buNone/>
+                      </a:pPr>
+                      <a:r>
+                        <a:rPr lang="en-US" sz="1200" dirty="0">
+                          <a:solidFill>
+                            <a:srgbClr val="1F2933"/>
+                          </a:solidFill>
+                          <a:latin typeface="Arial" pitchFamily="34" charset="0"/>
+                          <a:ea typeface="Arial" pitchFamily="34" charset="-122"/>
+                          <a:cs typeface="Arial" pitchFamily="34" charset="-120"/>
+                        </a:rPr>
+                        <a:t>Nike's 63% P/E premium is unjustified; dividend cut likely; 86% of declines are China and Converse</a:t>
+                      </a:r>
+                      <a:endParaRPr lang="en-US" sz="1200" dirty="0">
+                        <a:latin typeface="Arial" charset="0"/>
+                        <a:ea typeface="Arial" charset="0"/>
+                        <a:cs typeface="Arial" charset="0"/>
+                      </a:endParaRPr>
+                    </a:p>
+                  </a:txBody>
+                  <a:tcPr marL="91440" marR="91440" marT="45720" marB="45720" anchor="ctr">
+                    <a:lnL w="0" cap="flat" cmpd="sng" algn="ctr">
+                      <a:noFill/>
+                    </a:lnL>
+                    <a:lnR w="0" cap="flat" cmpd="sng" algn="ctr">
+                      <a:noFill/>
+                    </a:lnR>
+                    <a:lnT w="0" cap="flat" cmpd="sng" algn="ctr">
+                      <a:noFill/>
+                    </a:lnT>
+                    <a:lnB w="6350" cap="flat" cmpd="sng" algn="ctr">
+                      <a:solidFill>
+                        <a:srgbClr val="C9CED6"/>
+                      </a:solidFill>
+                      <a:prstDash val="solid"/>
+                      <a:round/>
+                      <a:headEnd type="none" w="med" len="med"/>
+                      <a:tailEnd type="none" w="med" len="med"/>
+                    </a:lnB>
+                  </a:tcPr>
+                </a:tc>
+                <a:tc>
+                  <a:txBody>
+                    <a:bodyPr/>
+                    <a:lstStyle/>
+                    <a:p>
+                      <a:pPr indent="0" marL="0">
+                        <a:buNone/>
+                      </a:pPr>
+                      <a:r>
+                        <a:rPr lang="en-US" sz="1200" dirty="0">
+                          <a:solidFill>
+                            <a:srgbClr val="1F2933"/>
+                          </a:solidFill>
+                          <a:latin typeface="Arial" pitchFamily="34" charset="0"/>
+                          <a:ea typeface="Arial" pitchFamily="34" charset="-122"/>
+                          <a:cs typeface="Arial" pitchFamily="34" charset="-120"/>
+                        </a:rPr>
+                        <a:t>Premium is mostly trough earnings (at FY24 margin Nike trades 8% below peers); balance sheet covers the dividend for years; gross share is 70%</a:t>
+                      </a:r>
+                      <a:endParaRPr lang="en-US" sz="1200" dirty="0">
+                        <a:latin typeface="Arial" charset="0"/>
+                        <a:ea typeface="Arial" charset="0"/>
+                        <a:cs typeface="Arial" charset="0"/>
+                      </a:endParaRPr>
+                    </a:p>
+                  </a:txBody>
+                  <a:tcPr marL="91440" marR="91440" marT="45720" marB="45720" anchor="ctr">
+                    <a:lnL w="0" cap="flat" cmpd="sng" algn="ctr">
+                      <a:noFill/>
+                    </a:lnL>
+                    <a:lnR w="0" cap="flat" cmpd="sng" algn="ctr">
+                      <a:noFill/>
+                    </a:lnR>
+                    <a:lnT w="0" cap="flat" cmpd="sng" algn="ctr">
+                      <a:noFill/>
+                    </a:lnT>
+                    <a:lnB w="6350" cap="flat" cmpd="sng" algn="ctr">
+                      <a:solidFill>
+                        <a:srgbClr val="C9CED6"/>
+                      </a:solidFill>
+                      <a:prstDash val="solid"/>
+                      <a:round/>
+                      <a:headEnd type="none" w="med" len="med"/>
+                      <a:tailEnd type="none" w="med" len="med"/>
+                    </a:lnB>
+                  </a:tcPr>
+                </a:tc>
+              </a:tr>
+            </a:tbl>
+          </a:graphicData>
+        </a:graphic>
+      </p:graphicFrame>
+      <p:sp>
+        <p:nvSpPr>
+          <p:cNvPr id="5" name="Source"/>
+          <p:cNvSpPr txBox="1"/>
+          <p:nvPr/>
+        </p:nvSpPr>
+        <p:spPr>
+          <a:xfrm>
+            <a:off x="548640" y="5870448"/>
+            <a:ext cx="11091672" cy="502920"/>
+          </a:xfrm>
+          <a:prstGeom prst="rect">
+            <a:avLst/>
+          </a:prstGeom>
+          <a:noFill/>
+          <a:ln/>
+        </p:spPr>
+        <p:txBody>
+          <a:bodyPr wrap="square" lIns="0" tIns="0" rIns="0" bIns="0" rtlCol="0" anchor="b"/>
+          <a:lstStyle/>
+          <a:p>
+            <a:pPr indent="0" marL="0">
+              <a:buNone/>
+            </a:pPr>
+            <a:r>
+              <a:rPr lang="en-US" sz="1000" dirty="0">
+                <a:solidFill>
+                  <a:srgbClr val="6B7280"/>
+                </a:solidFill>
+                <a:latin typeface="Arial" pitchFamily="34" charset="0"/>
+                <a:ea typeface="Arial" pitchFamily="34" charset="-122"/>
+                <a:cs typeface="Arial" pitchFamily="34" charset="-120"/>
+              </a:rPr>
+              <a:t>Sources: checker reviews in data/hunt/*/README.md and research_notes/Long or short cruxes/. Unmeasurable: Nike US shipment volumes (masked consignee), Census API (registration required).</a:t>
+            </a:r>
+            <a:endParaRPr lang="en-US" sz="1000" dirty="0"/>
+          </a:p>
+        </p:txBody>
+      </p:sp>
+      <p:sp>
+        <p:nvSpPr>
+          <p:cNvPr id="25" name="Slide Number Placeholder 0"/>
+          <p:cNvSpPr>
+            <a:spLocks noGrp="1"/>
+          </p:cNvSpPr>
+          <p:nvPr>
+            <p:ph type="sldNum" sz="quarter" idx="4294967295"/>
+          </p:nvPr>
+        </p:nvSpPr>
+        <p:spPr>
+          <a:xfrm>
+            <a:off x="10972800" y="6419088"/>
+            <a:ext cx="667512" cy="274320"/>
+          </a:xfrm>
+          <a:prstGeom prst="rect">
+            <a:avLst/>
+          </a:prstGeom>
+          <a:extLst>
+            <a:ext uri="{C572A759-6A51-4108-AA02-DFA0A04FC94B}">
+              <ma14:wrappingTextBoxFlag xmlns:ma14="http://schemas.microsoft.com/office/mac/drawingml/2011/main" val="0"/>
+            </a:ext>
+          </a:extLst>
+        </p:spPr>
+        <p:txBody>
+          <a:bodyPr/>
+          <a:lstStyle>
+            <a:lvl1pPr>
+              <a:defRPr sz="1000">
+                <a:solidFill>
+                  <a:srgbClr val="6B7280"/>
+                </a:solidFill>
+                <a:latin typeface="Arial"/>
+                <a:ea typeface="Arial"/>
+                <a:cs typeface="Arial"/>
+              </a:defRPr>
+            </a:lvl1pPr>
+          </a:lstStyle>
+          <a:p>
+            <a:pPr algn="r"/>
+            <a:fld id="{F7021451-1387-4CA6-816F-3879F97B5CBC}" type="slidenum">
+              <a:rPr b="0" lang="en-US"/>
+              <a:t>14</a:t>
+            </a:fld>
+            <a:endParaRPr lang="en-US"/>
+          </a:p>
+        </p:txBody>
+      </p:sp>
+    </p:spTree>
+  </p:cSld>
+  <p:clrMapOvr>
+    <a:masterClrMapping/>
+  </p:clrMapOvr>
+</p:sld>
+</file>
+
+<file path=ppt/slides/slide15.xml><?xml version="1.0" encoding="utf-8"?>
+<p:sld xmlns:a="http://schemas.openxmlformats.org/drawingml/2006/main" xmlns:r="http://schemas.openxmlformats.org/officeDocument/2006/relationships" xmlns:p="http://schemas.openxmlformats.org/presentationml/2006/main">
+  <p:cSld name="Slide 15">
+    <p:spTree>
+      <p:nvGrpSpPr>
+        <p:cNvPr id="1" name=""/>
+        <p:cNvGrpSpPr/>
+        <p:nvPr/>
+      </p:nvGrpSpPr>
+      <p:grpSpPr>
+        <a:xfrm>
+          <a:off x="0" y="0"/>
+          <a:ext cx="0" cy="0"/>
+          <a:chOff x="0" y="0"/>
+          <a:chExt cx="0" cy="0"/>
+        </a:xfrm>
+      </p:grpSpPr>
+      <p:sp>
+        <p:nvSpPr>
+          <p:cNvPr id="2" name="Text 1"/>
+          <p:cNvSpPr/>
+          <p:nvPr>
+            <p:ph idx="101" type="title" hasCustomPrompt="1"/>
+          </p:nvPr>
+        </p:nvSpPr>
+        <p:spPr>
+          <a:xfrm>
+            <a:off x="548640" y="347472"/>
+            <a:ext cx="11091672" cy="914400"/>
+          </a:xfrm>
+          <a:prstGeom prst="rect">
+            <a:avLst/>
+          </a:prstGeom>
+          <a:noFill/>
+          <a:ln/>
+        </p:spPr>
+        <p:txBody>
+          <a:bodyPr wrap="square" lIns="0" tIns="0" rIns="0" bIns="0" rtlCol="0" anchor="t"/>
+          <a:lstStyle/>
+          <a:p>
+            <a:pPr algn="l" indent="0" marL="0">
+              <a:buNone/>
+            </a:pPr>
+            <a:r>
+              <a:rPr lang="en-US" sz="2400" b="1" dirty="0">
+                <a:solidFill>
+                  <a:srgbClr val="0B2A4A"/>
+                </a:solidFill>
+                <a:latin typeface="Arial" pitchFamily="34" charset="0"/>
+                <a:ea typeface="Arial" pitchFamily="34" charset="-122"/>
+                <a:cs typeface="Arial" pitchFamily="34" charset="-120"/>
+              </a:rPr>
+              <a:t>Appendix: primary sources and where the data lives</a:t>
+            </a:r>
+            <a:endParaRPr lang="en-US" sz="2400" dirty="0"/>
+          </a:p>
+        </p:txBody>
+      </p:sp>
+      <p:graphicFrame>
+        <p:nvGraphicFramePr>
+          <p:cNvPr id="16" name="Table 0"/>
+          <p:cNvGraphicFramePr>
+            <a:graphicFrameLocks noGrp="1"/>
+          </p:cNvGraphicFramePr>
+          <p:nvPr>
+            <p:extLst>
+              <p:ext uri="{D42A27DB-BD31-4B8C-83A1-F6EECF244321}">
+                <p14:modId xmlns:p14="http://schemas.microsoft.com/office/powerpoint/2010/main" val="1579011935"/>
+              </p:ext>
+            </p:extLst>
+          </p:nvPr>
+        </p:nvGraphicFramePr>
+        <p:xfrm>
+          <a:off x="548640" y="1463040"/>
+          <a:ext cx="11091672" cy="914400"/>
+        </p:xfrm>
+        <a:graphic>
+          <a:graphicData uri="http://schemas.openxmlformats.org/drawingml/2006/table">
+            <a:tbl>
+              <a:tblPr/>
+              <a:tblGrid>
+                <a:gridCol w="2468880"/>
+                <a:gridCol w="8622792"/>
+              </a:tblGrid>
+              <a:tr h="347472">
+                <a:tc>
+                  <a:txBody>
+                    <a:bodyPr/>
+                    <a:lstStyle/>
+                    <a:p>
+                      <a:pPr algn="l" indent="0" marL="0">
+                        <a:buNone/>
+                      </a:pPr>
+                      <a:r>
+                        <a:rPr lang="en-US" sz="1200" b="1" dirty="0">
+                          <a:solidFill>
+                            <a:srgbClr val="FFFFFF"/>
+                          </a:solidFill>
+                          <a:latin typeface="Arial" pitchFamily="34" charset="0"/>
+                          <a:ea typeface="Arial" pitchFamily="34" charset="-122"/>
+                          <a:cs typeface="Arial" pitchFamily="34" charset="-120"/>
+                        </a:rPr>
+                        <a:t>Category</a:t>
+                      </a:r>
+                      <a:endParaRPr lang="en-US" sz="1200" dirty="0">
+                        <a:latin typeface="Arial" charset="0"/>
+                        <a:ea typeface="Arial" charset="0"/>
+                        <a:cs typeface="Arial" charset="0"/>
+                      </a:endParaRPr>
+                    </a:p>
+                  </a:txBody>
+                  <a:tcPr marL="91440" marR="91440" marT="45720" marB="45720" anchor="ctr">
+                    <a:lnL w="0" cap="flat" cmpd="sng" algn="ctr">
+                      <a:noFill/>
+                    </a:lnL>
+                    <a:lnR w="0" cap="flat" cmpd="sng" algn="ctr">
+                      <a:noFill/>
+                    </a:lnR>
+                    <a:lnT w="0" cap="flat" cmpd="sng" algn="ctr">
+                      <a:noFill/>
+                    </a:lnT>
+                    <a:lnB w="0" cap="flat" cmpd="sng" algn="ctr">
+                      <a:noFill/>
+                    </a:lnB>
+                    <a:solidFill>
+                      <a:srgbClr val="0B2A4A"/>
+                    </a:solidFill>
+                  </a:tcPr>
+                </a:tc>
+                <a:tc>
+                  <a:txBody>
+                    <a:bodyPr/>
+                    <a:lstStyle/>
+                    <a:p>
+                      <a:pPr algn="l" indent="0" marL="0">
+                        <a:buNone/>
+                      </a:pPr>
+                      <a:r>
+                        <a:rPr lang="en-US" sz="1200" b="1" dirty="0">
+                          <a:solidFill>
+                            <a:srgbClr val="FFFFFF"/>
+                          </a:solidFill>
+                          <a:latin typeface="Arial" pitchFamily="34" charset="0"/>
+                          <a:ea typeface="Arial" pitchFamily="34" charset="-122"/>
+                          <a:cs typeface="Arial" pitchFamily="34" charset="-120"/>
+                        </a:rPr>
+                        <a:t>Sources</a:t>
+                      </a:r>
+                      <a:endParaRPr lang="en-US" sz="1200" dirty="0">
+                        <a:latin typeface="Arial" charset="0"/>
+                        <a:ea typeface="Arial" charset="0"/>
+                        <a:cs typeface="Arial" charset="0"/>
+                      </a:endParaRPr>
+                    </a:p>
+                  </a:txBody>
+                  <a:tcPr marL="91440" marR="91440" marT="45720" marB="45720" anchor="ctr">
+                    <a:lnL w="0" cap="flat" cmpd="sng" algn="ctr">
+                      <a:noFill/>
+                    </a:lnL>
+                    <a:lnR w="0" cap="flat" cmpd="sng" algn="ctr">
+                      <a:noFill/>
+                    </a:lnR>
+                    <a:lnT w="0" cap="flat" cmpd="sng" algn="ctr">
+                      <a:noFill/>
+                    </a:lnT>
+                    <a:lnB w="0" cap="flat" cmpd="sng" algn="ctr">
+                      <a:noFill/>
+                    </a:lnB>
+                    <a:solidFill>
+                      <a:srgbClr val="0B2A4A"/>
+                    </a:solidFill>
+                  </a:tcPr>
+                </a:tc>
+              </a:tr>
+              <a:tr h="685800">
+                <a:tc>
+                  <a:txBody>
+                    <a:bodyPr/>
+                    <a:lstStyle/>
+                    <a:p>
+                      <a:pPr indent="0" marL="0">
+                        <a:buNone/>
+                      </a:pPr>
+                      <a:r>
+                        <a:rPr lang="en-US" sz="1200" b="1" dirty="0">
+                          <a:solidFill>
+                            <a:srgbClr val="1F2933"/>
+                          </a:solidFill>
+                          <a:latin typeface="Arial" pitchFamily="34" charset="0"/>
+                          <a:ea typeface="Arial" pitchFamily="34" charset="-122"/>
+                          <a:cs typeface="Arial" pitchFamily="34" charset="-120"/>
+                        </a:rPr>
+                        <a:t>Nike filings and calls</a:t>
+                      </a:r>
+                      <a:endParaRPr lang="en-US" sz="1200" dirty="0">
+                        <a:latin typeface="Arial" charset="0"/>
+                        <a:ea typeface="Arial" charset="0"/>
+                        <a:cs typeface="Arial" charset="0"/>
+                      </a:endParaRPr>
+                    </a:p>
+                  </a:txBody>
+                  <a:tcPr marL="91440" marR="91440" marT="45720" marB="45720" anchor="ctr">
+                    <a:lnL w="0" cap="flat" cmpd="sng" algn="ctr">
+                      <a:noFill/>
+                    </a:lnL>
+                    <a:lnR w="0" cap="flat" cmpd="sng" algn="ctr">
+                      <a:noFill/>
+                    </a:lnR>
+                    <a:lnT w="0" cap="flat" cmpd="sng" algn="ctr">
+                      <a:noFill/>
+                    </a:lnT>
+                    <a:lnB w="6350" cap="flat" cmpd="sng" algn="ctr">
+                      <a:solidFill>
+                        <a:srgbClr val="C9CED6"/>
+                      </a:solidFill>
+                      <a:prstDash val="solid"/>
+                      <a:round/>
+                      <a:headEnd type="none" w="med" len="med"/>
+                      <a:tailEnd type="none" w="med" len="med"/>
+                    </a:lnB>
+                  </a:tcPr>
+                </a:tc>
+                <a:tc>
+                  <a:txBody>
+                    <a:bodyPr/>
+                    <a:lstStyle/>
+                    <a:p>
+                      <a:pPr indent="0" marL="0">
+                        <a:buNone/>
+                      </a:pPr>
+                      <a:r>
+                        <a:rPr lang="en-US" sz="1200" dirty="0">
+                          <a:solidFill>
+                            <a:srgbClr val="1F2933"/>
+                          </a:solidFill>
+                          <a:latin typeface="Arial" pitchFamily="34" charset="0"/>
+                          <a:ea typeface="Arial" pitchFamily="34" charset="-122"/>
+                          <a:cs typeface="Arial" pitchFamily="34" charset="-120"/>
+                        </a:rPr>
+                        <a:t>FY24, FY25, FY26 Form 10-K; Q1 FY27 Form 10-Q and earnings release (Oct 1, 2026); official call transcripts Q1 FY21 to Q1 FY27 (investors.nike.com)</a:t>
+                      </a:r>
+                      <a:endParaRPr lang="en-US" sz="1200" dirty="0">
+                        <a:latin typeface="Arial" charset="0"/>
+                        <a:ea typeface="Arial" charset="0"/>
+                        <a:cs typeface="Arial" charset="0"/>
+                      </a:endParaRPr>
+                    </a:p>
+                  </a:txBody>
+                  <a:tcPr marL="91440" marR="91440" marT="45720" marB="45720" anchor="ctr">
+                    <a:lnL w="0" cap="flat" cmpd="sng" algn="ctr">
+                      <a:noFill/>
+                    </a:lnL>
+                    <a:lnR w="0" cap="flat" cmpd="sng" algn="ctr">
+                      <a:noFill/>
+                    </a:lnR>
+                    <a:lnT w="0" cap="flat" cmpd="sng" algn="ctr">
+                      <a:noFill/>
+                    </a:lnT>
+                    <a:lnB w="6350" cap="flat" cmpd="sng" algn="ctr">
+                      <a:solidFill>
+                        <a:srgbClr val="C9CED6"/>
+                      </a:solidFill>
+                      <a:prstDash val="solid"/>
+                      <a:round/>
+                      <a:headEnd type="none" w="med" len="med"/>
+                      <a:tailEnd type="none" w="med" len="med"/>
+                    </a:lnB>
+                  </a:tcPr>
+                </a:tc>
+              </a:tr>
+              <a:tr h="685800">
+                <a:tc>
+                  <a:txBody>
+                    <a:bodyPr/>
+                    <a:lstStyle/>
+                    <a:p>
+                      <a:pPr indent="0" marL="0">
+                        <a:buNone/>
+                      </a:pPr>
+                      <a:r>
+                        <a:rPr lang="en-US" sz="1200" b="1" dirty="0">
+                          <a:solidFill>
+                            <a:srgbClr val="1F2933"/>
+                          </a:solidFill>
+                          <a:latin typeface="Arial" pitchFamily="34" charset="0"/>
+                          <a:ea typeface="Arial" pitchFamily="34" charset="-122"/>
+                          <a:cs typeface="Arial" pitchFamily="34" charset="-120"/>
+                        </a:rPr>
+                        <a:t>Peers and market</a:t>
+                      </a:r>
+                      <a:endParaRPr lang="en-US" sz="1200" dirty="0">
+                        <a:latin typeface="Arial" charset="0"/>
+                        <a:ea typeface="Arial" charset="0"/>
+                        <a:cs typeface="Arial" charset="0"/>
+                      </a:endParaRPr>
+                    </a:p>
+                  </a:txBody>
+                  <a:tcPr marL="91440" marR="91440" marT="45720" marB="45720" anchor="ctr">
+                    <a:lnL w="0" cap="flat" cmpd="sng" algn="ctr">
+                      <a:noFill/>
+                    </a:lnL>
+                    <a:lnR w="0" cap="flat" cmpd="sng" algn="ctr">
+                      <a:noFill/>
+                    </a:lnR>
+                    <a:lnT w="0" cap="flat" cmpd="sng" algn="ctr">
+                      <a:noFill/>
+                    </a:lnT>
+                    <a:lnB w="6350" cap="flat" cmpd="sng" algn="ctr">
+                      <a:solidFill>
+                        <a:srgbClr val="C9CED6"/>
+                      </a:solidFill>
+                      <a:prstDash val="solid"/>
+                      <a:round/>
+                      <a:headEnd type="none" w="med" len="med"/>
+                      <a:tailEnd type="none" w="med" len="med"/>
+                    </a:lnB>
+                  </a:tcPr>
+                </a:tc>
+                <a:tc>
+                  <a:txBody>
+                    <a:bodyPr/>
+                    <a:lstStyle/>
+                    <a:p>
+                      <a:pPr indent="0" marL="0">
+                        <a:buNone/>
+                      </a:pPr>
+                      <a:r>
+                        <a:rPr lang="en-US" sz="1200" dirty="0">
+                          <a:solidFill>
+                            <a:srgbClr val="1F2933"/>
+                          </a:solidFill>
+                          <a:latin typeface="Arial" pitchFamily="34" charset="0"/>
+                          <a:ea typeface="Arial" pitchFamily="34" charset="-122"/>
+                          <a:cs typeface="Arial" pitchFamily="34" charset="-120"/>
+                        </a:rPr>
+                        <a:t>adidas, On, Deckers, ASICS results; HKEX filings (Topsports, Pou Sheng, ANTA, Li-Ning, Xtep, 361); Taiwan MOPS (Feng Tay and others); Yahoo Finance; FINRA; BEA; BLS; China NBS</a:t>
+                      </a:r>
+                      <a:endParaRPr lang="en-US" sz="1200" dirty="0">
+                        <a:latin typeface="Arial" charset="0"/>
+                        <a:ea typeface="Arial" charset="0"/>
+                        <a:cs typeface="Arial" charset="0"/>
+                      </a:endParaRPr>
+                    </a:p>
+                  </a:txBody>
+                  <a:tcPr marL="91440" marR="91440" marT="45720" marB="45720" anchor="ctr">
+                    <a:lnL w="0" cap="flat" cmpd="sng" algn="ctr">
+                      <a:noFill/>
+                    </a:lnL>
+                    <a:lnR w="0" cap="flat" cmpd="sng" algn="ctr">
+                      <a:noFill/>
+                    </a:lnR>
+                    <a:lnT w="0" cap="flat" cmpd="sng" algn="ctr">
+                      <a:noFill/>
+                    </a:lnT>
+                    <a:lnB w="6350" cap="flat" cmpd="sng" algn="ctr">
+                      <a:solidFill>
+                        <a:srgbClr val="C9CED6"/>
+                      </a:solidFill>
+                      <a:prstDash val="solid"/>
+                      <a:round/>
+                      <a:headEnd type="none" w="med" len="med"/>
+                      <a:tailEnd type="none" w="med" len="med"/>
+                    </a:lnB>
+                  </a:tcPr>
+                </a:tc>
+              </a:tr>
+              <a:tr h="685800">
+                <a:tc>
+                  <a:txBody>
+                    <a:bodyPr/>
+                    <a:lstStyle/>
+                    <a:p>
+                      <a:pPr indent="0" marL="0">
+                        <a:buNone/>
+                      </a:pPr>
+                      <a:r>
+                        <a:rPr lang="en-US" sz="1200" b="1" dirty="0">
+                          <a:solidFill>
+                            <a:srgbClr val="1F2933"/>
+                          </a:solidFill>
+                          <a:latin typeface="Arial" pitchFamily="34" charset="0"/>
+                          <a:ea typeface="Arial" pitchFamily="34" charset="-122"/>
+                          <a:cs typeface="Arial" pitchFamily="34" charset="-120"/>
+                        </a:rPr>
+                        <a:t>Alternative data</a:t>
+                      </a:r>
+                      <a:endParaRPr lang="en-US" sz="1200" dirty="0">
+                        <a:latin typeface="Arial" charset="0"/>
+                        <a:ea typeface="Arial" charset="0"/>
+                        <a:cs typeface="Arial" charset="0"/>
+                      </a:endParaRPr>
+                    </a:p>
+                  </a:txBody>
+                  <a:tcPr marL="91440" marR="91440" marT="45720" marB="45720" anchor="ctr">
+                    <a:lnL w="0" cap="flat" cmpd="sng" algn="ctr">
+                      <a:noFill/>
+                    </a:lnL>
+                    <a:lnR w="0" cap="flat" cmpd="sng" algn="ctr">
+                      <a:noFill/>
+                    </a:lnR>
+                    <a:lnT w="0" cap="flat" cmpd="sng" algn="ctr">
+                      <a:noFill/>
+                    </a:lnT>
+                    <a:lnB w="6350" cap="flat" cmpd="sng" algn="ctr">
+                      <a:solidFill>
+                        <a:srgbClr val="C9CED6"/>
+                      </a:solidFill>
+                      <a:prstDash val="solid"/>
+                      <a:round/>
+                      <a:headEnd type="none" w="med" len="med"/>
+                      <a:tailEnd type="none" w="med" len="med"/>
+                    </a:lnB>
+                  </a:tcPr>
+                </a:tc>
+                <a:tc>
+                  <a:txBody>
+                    <a:bodyPr/>
+                    <a:lstStyle/>
+                    <a:p>
+                      <a:pPr indent="0" marL="0">
+                        <a:buNone/>
+                      </a:pPr>
+                      <a:r>
+                        <a:rPr lang="en-US" sz="1200" dirty="0">
+                          <a:solidFill>
+                            <a:srgbClr val="1F2933"/>
+                          </a:solidFill>
+                          <a:latin typeface="Arial" pitchFamily="34" charset="0"/>
+                          <a:ea typeface="Arial" pitchFamily="34" charset="-122"/>
+                          <a:cs typeface="Arial" pitchFamily="34" charset="-120"/>
+                        </a:rPr>
+                        <a:t>Common Crawl nike.com panel; Nike store API; SNKRDUNK resale; Dick's, Foot Locker and Fleet Feet product feeds; Google Play reviews; Wikipedia pageviews</a:t>
+                      </a:r>
+                      <a:endParaRPr lang="en-US" sz="1200" dirty="0">
+                        <a:latin typeface="Arial" charset="0"/>
+                        <a:ea typeface="Arial" charset="0"/>
+                        <a:cs typeface="Arial" charset="0"/>
+                      </a:endParaRPr>
+                    </a:p>
+                  </a:txBody>
+                  <a:tcPr marL="91440" marR="91440" marT="45720" marB="45720" anchor="ctr">
+                    <a:lnL w="0" cap="flat" cmpd="sng" algn="ctr">
+                      <a:noFill/>
+                    </a:lnL>
+                    <a:lnR w="0" cap="flat" cmpd="sng" algn="ctr">
+                      <a:noFill/>
+                    </a:lnR>
+                    <a:lnT w="0" cap="flat" cmpd="sng" algn="ctr">
+                      <a:noFill/>
+                    </a:lnT>
+                    <a:lnB w="6350" cap="flat" cmpd="sng" algn="ctr">
+                      <a:solidFill>
+                        <a:srgbClr val="C9CED6"/>
+                      </a:solidFill>
+                      <a:prstDash val="solid"/>
+                      <a:round/>
+                      <a:headEnd type="none" w="med" len="med"/>
+                      <a:tailEnd type="none" w="med" len="med"/>
+                    </a:lnB>
+                  </a:tcPr>
+                </a:tc>
+              </a:tr>
+              <a:tr h="685800">
+                <a:tc>
+                  <a:txBody>
+                    <a:bodyPr/>
+                    <a:lstStyle/>
+                    <a:p>
+                      <a:pPr indent="0" marL="0">
+                        <a:buNone/>
+                      </a:pPr>
+                      <a:r>
+                        <a:rPr lang="en-US" sz="1200" b="1" dirty="0">
+                          <a:solidFill>
+                            <a:srgbClr val="1F2933"/>
+                          </a:solidFill>
+                          <a:latin typeface="Arial" pitchFamily="34" charset="0"/>
+                          <a:ea typeface="Arial" pitchFamily="34" charset="-122"/>
+                          <a:cs typeface="Arial" pitchFamily="34" charset="-120"/>
+                        </a:rPr>
+                        <a:t>Analysis in the repo</a:t>
+                      </a:r>
+                      <a:endParaRPr lang="en-US" sz="1200" dirty="0">
+                        <a:latin typeface="Arial" charset="0"/>
+                        <a:ea typeface="Arial" charset="0"/>
+                        <a:cs typeface="Arial" charset="0"/>
+                      </a:endParaRPr>
+                    </a:p>
+                  </a:txBody>
+                  <a:tcPr marL="91440" marR="91440" marT="45720" marB="45720" anchor="ctr">
+                    <a:lnL w="0" cap="flat" cmpd="sng" algn="ctr">
+                      <a:noFill/>
+                    </a:lnL>
+                    <a:lnR w="0" cap="flat" cmpd="sng" algn="ctr">
+                      <a:noFill/>
+                    </a:lnR>
+                    <a:lnT w="0" cap="flat" cmpd="sng" algn="ctr">
+                      <a:noFill/>
+                    </a:lnT>
+                    <a:lnB w="6350" cap="flat" cmpd="sng" algn="ctr">
+                      <a:solidFill>
+                        <a:srgbClr val="C9CED6"/>
+                      </a:solidFill>
+                      <a:prstDash val="solid"/>
+                      <a:round/>
+                      <a:headEnd type="none" w="med" len="med"/>
+                      <a:tailEnd type="none" w="med" len="med"/>
+                    </a:lnB>
+                  </a:tcPr>
+                </a:tc>
+                <a:tc>
+                  <a:txBody>
+                    <a:bodyPr/>
+                    <a:lstStyle/>
+                    <a:p>
+                      <a:pPr indent="0" marL="0">
+                        <a:buNone/>
+                      </a:pPr>
+                      <a:r>
+                        <a:rPr lang="en-US" sz="1200" dirty="0">
+                          <a:solidFill>
+                            <a:srgbClr val="1F2933"/>
+                          </a:solidFill>
+                          <a:latin typeface="Arial" pitchFamily="34" charset="0"/>
+                          <a:ea typeface="Arial" pitchFamily="34" charset="-122"/>
+                          <a:cs typeface="Arial" pitchFamily="34" charset="-120"/>
+                        </a:rPr>
+                        <a:t>research_notes/Long or short cruxes/ (scoreboard and eight question notes); data/hunt/ (cleaned data and scripts); research_notes/Deep dives Oct 14/ (FY28 bridge, long case, valuation, dividend, Investor Day study); research_notes/Smoking gun hunt/ (units, receivables, reserves, disclosures, traffic, IP, credit, tax, litigation, Belgian customs); research_notes/Refinitiv pull list.md</a:t>
                       </a:r>
                       <a:endParaRPr lang="en-US" sz="1200" dirty="0">
                         <a:latin typeface="Arial" charset="0"/>
@@ -8716,7 +11962,7 @@
             <a:pPr algn="r"/>
             <a:fld id="{F7021451-1387-4CA6-816F-3879F97B5CBC}" type="slidenum">
               <a:rPr b="0" lang="en-US"/>
-              <a:t>13</a:t>
+              <a:t>15</a:t>
             </a:fld>
             <a:endParaRPr lang="en-US"/>
           </a:p>
@@ -8782,7 +12028,7 @@
                 <a:ea typeface="Arial" pitchFamily="34" charset="-122"/>
                 <a:cs typeface="Arial" pitchFamily="34" charset="-120"/>
               </a:rPr>
-              <a:t>We recommend a short: the stock prices a FY28 recovery that Nike's own guidance does not support</a:t>
+              <a:t>We recommend a short: the price needs a margin recovery that volume, price and share data do not support</a:t>
             </a:r>
             <a:endParaRPr lang="en-US" sz="2400" dirty="0"/>
           </a:p>
@@ -8813,7 +12059,7 @@
               <a:buNone/>
             </a:pPr>
             <a:r>
-              <a:rPr lang="en-US" sz="1500" b="1" dirty="0">
+              <a:rPr lang="en-US" sz="1300" b="1" dirty="0">
                 <a:solidFill>
                   <a:srgbClr val="0B2A4A"/>
                 </a:solidFill>
@@ -8821,16 +12067,16 @@
                 <a:ea typeface="Arial" pitchFamily="34" charset="-122"/>
                 <a:cs typeface="Arial" pitchFamily="34" charset="-120"/>
               </a:rPr>
-              <a:t>FY28 is the debate. </a:t>
+              <a:t>The price needs a margin Nike has not earned since FY24. </a:t>
             </a:r>
             <a:pPr indent="0" marL="0">
               <a:spcAft>
-                <a:spcPts val="1600"/>
+                <a:spcPts val="1200"/>
               </a:spcAft>
               <a:buNone/>
             </a:pPr>
             <a:r>
-              <a:rPr lang="en-US" sz="1500" dirty="0">
+              <a:rPr lang="en-US" sz="1300" dirty="0">
                 <a:solidFill>
                   <a:srgbClr val="1F2933"/>
                 </a:solidFill>
@@ -8838,16 +12084,16 @@
                 <a:ea typeface="Arial" pitchFamily="34" charset="-122"/>
                 <a:cs typeface="Arial" pitchFamily="34" charset="-120"/>
               </a:rPr>
-              <a:t>Consensus EPS of $1.65 (+28%) on about +1% revenue needs about +170 bp of operating margin. Nike's best annual gain from FY22 to FY26 was 60 bp. Management says the pain will "bleed into fiscal '28" and declined to discuss FY28 revenue.</a:t>
+              <a:t>A reverse DCF at a 9% to 10% required return needs a long-run operating margin of 11% to 14%; peer parity on P/E needs about 11.6%. Consensus has 7.2% in FY28; FY26 was 8.3% (6.2% without the tariff refund). On sales and EBITDA Nike already trades at the peer median, so the premium is only a margin bet.</a:t>
             </a:r>
-            <a:endParaRPr lang="en-US" sz="1500" dirty="0"/>
+            <a:endParaRPr lang="en-US" sz="1300" dirty="0"/>
           </a:p>
           <a:p>
             <a:pPr indent="0" marL="0">
               <a:buNone/>
             </a:pPr>
             <a:r>
-              <a:rPr lang="en-US" sz="1500" b="1" dirty="0">
+              <a:rPr lang="en-US" sz="1300" b="1" dirty="0">
                 <a:solidFill>
                   <a:srgbClr val="0B2A4A"/>
                 </a:solidFill>
@@ -8855,16 +12101,16 @@
                 <a:ea typeface="Arial" pitchFamily="34" charset="-122"/>
                 <a:cs typeface="Arial" pitchFamily="34" charset="-120"/>
               </a:rPr>
-              <a:t>Share loss in growing markets. </a:t>
+              <a:t>Volume has not grown in seven years; price did the work and is now falling. </a:t>
             </a:r>
             <a:pPr indent="0" marL="0">
               <a:spcAft>
-                <a:spcPts val="1600"/>
+                <a:spcPts val="1200"/>
               </a:spcAft>
               <a:buNone/>
             </a:pPr>
             <a:r>
-              <a:rPr lang="en-US" sz="1500" dirty="0">
+              <a:rPr lang="en-US" sz="1300" dirty="0">
                 <a:solidFill>
                   <a:srgbClr val="1F2933"/>
                 </a:solidFill>
@@ -8872,16 +12118,16 @@
                 <a:ea typeface="Arial" pitchFamily="34" charset="-122"/>
                 <a:cs typeface="Arial" pitchFamily="34" charset="-120"/>
               </a:rPr>
-              <a:t>US footwear spending rose about 11.6% over FY24 to FY26 while Nike North America footwear revenue fell about 10.5%. In China, Nike guides worse than the -26% of Q1 FY27.</a:t>
+              <a:t>Nike footwear units are flat versus FY19 while revenue per pair is up 22%. Since FY23 units are down 10.7%, and price turned negative in FY25 (-3 points), FY26 (-1) and Q1 FY27 (-1, with units -5%). All figures from Nike's own 10-K unit and ASP disclosures.</a:t>
             </a:r>
-            <a:endParaRPr lang="en-US" sz="1500" dirty="0"/>
+            <a:endParaRPr lang="en-US" sz="1300" dirty="0"/>
           </a:p>
           <a:p>
             <a:pPr indent="0" marL="0">
               <a:buNone/>
             </a:pPr>
             <a:r>
-              <a:rPr lang="en-US" sz="1500" b="1" dirty="0">
+              <a:rPr lang="en-US" sz="1300" b="1" dirty="0">
                 <a:solidFill>
                   <a:srgbClr val="0B2A4A"/>
                 </a:solidFill>
@@ -8889,16 +12135,16 @@
                 <a:ea typeface="Arial" pitchFamily="34" charset="-122"/>
                 <a:cs typeface="Arial" pitchFamily="34" charset="-120"/>
               </a:rPr>
-              <a:t>The repair keeps slipping. </a:t>
+              <a:t>Share loss where markets still grow. </a:t>
             </a:r>
             <a:pPr indent="0" marL="0">
               <a:spcAft>
-                <a:spcPts val="1600"/>
+                <a:spcPts val="1200"/>
               </a:spcAft>
               <a:buNone/>
             </a:pPr>
             <a:r>
-              <a:rPr lang="en-US" sz="1500" dirty="0">
+              <a:rPr lang="en-US" sz="1300" dirty="0">
                 <a:solidFill>
                   <a:srgbClr val="1F2933"/>
                 </a:solidFill>
@@ -8906,16 +12152,16 @@
                 <a:ea typeface="Arial" pitchFamily="34" charset="-122"/>
                 <a:cs typeface="Arial" pitchFamily="34" charset="-120"/>
               </a:rPr>
-              <a:t>The December 2026 finish date was dropped, nike.com discounting is flat year on year (31.0% of pages vs 30.5%), and every multi-year profit target from 2017 and 2021 was missed.</a:t>
+              <a:t>Nike's two largest China partners closed 26% of doors in three years; Nike trails the European peer median by 14 to 18 points for eight quarters; nike.com visits fell 11% in August while adidas.com rose 12.5% and DICK'S rose 15%, so the digital decline is lost demand, not only a deliberate cut.</a:t>
             </a:r>
-            <a:endParaRPr lang="en-US" sz="1500" dirty="0"/>
+            <a:endParaRPr lang="en-US" sz="1300" dirty="0"/>
           </a:p>
           <a:p>
             <a:pPr indent="0" marL="0">
               <a:buNone/>
             </a:pPr>
             <a:r>
-              <a:rPr lang="en-US" sz="1500" b="1" dirty="0">
+              <a:rPr lang="en-US" sz="1300" b="1" dirty="0">
                 <a:solidFill>
                   <a:srgbClr val="0B2A4A"/>
                 </a:solidFill>
@@ -8923,16 +12169,16 @@
                 <a:ea typeface="Arial" pitchFamily="34" charset="-122"/>
                 <a:cs typeface="Arial" pitchFamily="34" charset="-120"/>
               </a:rPr>
-              <a:t>We state what could break the short. </a:t>
+              <a:t>What we do not claim, and the risks. </a:t>
             </a:r>
             <a:pPr indent="0" marL="0">
               <a:spcAft>
-                <a:spcPts val="1600"/>
+                <a:spcPts val="1200"/>
               </a:spcAft>
               <a:buNone/>
             </a:pPr>
             <a:r>
-              <a:rPr lang="en-US" sz="1500" dirty="0">
+              <a:rPr lang="en-US" sz="1300" dirty="0">
                 <a:solidFill>
                   <a:srgbClr val="1F2933"/>
                 </a:solidFill>
@@ -8940,9 +12186,9 @@
                 <a:ea typeface="Arial" pitchFamily="34" charset="-122"/>
                 <a:cs typeface="Arial" pitchFamily="34" charset="-120"/>
               </a:rPr>
-              <a:t>Running volume is real, tariff relief is worth about $0.08 to $0.12 of FY28 EPS, and quarterly guidance was met or beaten 14 of 14 times. We short FY28, not a Q2 miss.</a:t>
+              <a:t>No single smoking gun: 12 forensic hunts found none. The FY28 EPS gap on filing facts alone is $0.09 to $0.19; the larger gap depends on the margin step not happening. Running volume is real, 2026 trademark filings are at a 15-year high, and Nike landed inside its guided range 16 of 16 times.</a:t>
             </a:r>
-            <a:endParaRPr lang="en-US" sz="1500" dirty="0"/>
+            <a:endParaRPr lang="en-US" sz="1300" dirty="0"/>
           </a:p>
         </p:txBody>
       </p:sp>
@@ -13917,7 +17163,7 @@
                 <a:ea typeface="Arial" pitchFamily="34" charset="-122"/>
                 <a:cs typeface="Arial" pitchFamily="34" charset="-120"/>
               </a:rPr>
-              <a:t>Nike's best one-year margin gain from FY22 to FY26 was 60 bp. The FY28 consensus needs about 170 bp.</a:t>
+              <a:t>Consensus needs about $700M more EBIT in FY28. Volume explains about $200M. The other $500M (114 bp) must come from margin and cost, and Nike's best one-year gain since FY22 was 60 bp.</a:t>
             </a:r>
             <a:endParaRPr lang="en-US" sz="1500" dirty="0"/>
           </a:p>
@@ -14585,7 +17831,7 @@
                 <a:ea typeface="Arial" pitchFamily="34" charset="-122"/>
                 <a:cs typeface="Arial" pitchFamily="34" charset="-120"/>
               </a:rPr>
-              <a:t>Quarterly guides were met or beaten 14 of 14 times under CEO Hill (revenue averaged 2.3 points above the midpoint). We therefore do not rely on a Q2 miss; the case is FY28.</a:t>
+              <a:t>Nike landed inside or above its guided range on revenue and gross margin 16 of 16 times in eight quarters, but Q1 FY27 revenue was the first below the midpoint. We do not rely on a Q2 miss; the case is FY28.</a:t>
             </a:r>
             <a:endParaRPr lang="en-US" sz="1500" dirty="0"/>
           </a:p>
@@ -14642,7 +17888,7 @@
                 <a:ea typeface="Arial" pitchFamily="34" charset="-122"/>
                 <a:cs typeface="Arial" pitchFamily="34" charset="-120"/>
               </a:rPr>
-              <a:t>Sources: Nike Q1 FY27 release (guide read as -7% to -9%; wording does not specify reported vs currency-neutral) and 10-Q p.25; Q1 FY27 call; earnings call analysis (14 of 14 guides). Implied ranges are team arithmetic.</a:t>
+              <a:t>Sources: Nike Q1 FY27 release (guide read as -7% to -9%; wording does not specify reported vs currency-neutral) and 10-Q p.25; Q1 FY27 call; guidance record scored against call transcripts and releases (research_notes/Smoking gun hunt/G9_guidance_record.md). Implied ranges are team arithmetic.</a:t>
             </a:r>
             <a:endParaRPr lang="en-US" sz="1000" dirty="0"/>
           </a:p>

--- a/slides/pptx/Nike Short Thesis.pptx
+++ b/slides/pptx/Nike Short Thesis.pptx
@@ -121,14 +121,14 @@
   <p:extLst>
     <p:ext uri="{521415D9-36F7-43E2-AB2F-B90AF26B5E84}">
       <p14:sectionLst xmlns:p14="http://schemas.microsoft.com/office/powerpoint/2010/main">
-        <p14:section name="Recommendation" id="{8cabbabb-b518-677e-2d7b-0ac9c59cb13d}">
+        <p14:section name="Recommendation" id="{5ea5188c-fd3e-f2c7-83ca-1e83dfe0b5c6}">
           <p14:sldIdLst>
             <p14:sldId id="256"/>
             <p14:sldId id="257"/>
             <p14:sldId id="258"/>
           </p14:sldIdLst>
         </p14:section>
-        <p14:section name="Fundamentals and valuation" id="{7cba7521-067f-b6ea-2641-e8bf20e766f7}">
+        <p14:section name="Fundamentals and valuation" id="{bc454f24-cad7-9849-de93-04ca5aadffae}">
           <p14:sldIdLst>
             <p14:sldId id="259"/>
             <p14:sldId id="260"/>
@@ -136,7 +136,7 @@
             <p14:sldId id="262"/>
           </p14:sldIdLst>
         </p14:section>
-        <p14:section name="Evidence" id="{3126091c-dd3b-8fb1-41fc-94672efbee26}">
+        <p14:section name="Evidence" id="{970cf4a0-a17c-5b1f-1e95-bcacc007eb3b}">
           <p14:sldIdLst>
             <p14:sldId id="263"/>
             <p14:sldId id="264"/>
@@ -144,13 +144,13 @@
             <p14:sldId id="266"/>
           </p14:sldIdLst>
         </p14:section>
-        <p14:section name="Risks and catalysts" id="{9cf2ef53-8be3-abe7-13f9-fdb57af104cc}">
+        <p14:section name="Risks and catalysts" id="{ec7c108e-5344-2cc9-b661-8c87e1656f3c}">
           <p14:sldIdLst>
             <p14:sldId id="267"/>
             <p14:sldId id="268"/>
           </p14:sldIdLst>
         </p14:section>
-        <p14:section name="Appendix" id="{cae77758-b188-c4ee-cf54-832458652b1a}">
+        <p14:section name="Appendix" id="{8b215c64-60e0-54c1-326c-67d59642cb0a}">
           <p14:sldIdLst>
             <p14:sldId id="269"/>
             <p14:sldId id="270"/>
@@ -4403,7 +4403,7 @@
           <a:p>
             <a:r>
               <a:rPr lang="en-US" dirty="0"/>
-              <a:t>A reverse DCF starts from today's price and asks what long-run margin the market must assume. WACC is the yearly return investors demand; a higher WACC needs a higher margin. We show 8%, 9% and 10% because 9% and 10% both come from standard equity risk premium choices (Damodaran and Kroll). This is not a price target and no model is built yet. The 10-year average of 11.8% is our arithmetic on reported margins. Scoreboard caution: this supports 'FY28 and beyond is priced for a rebound', not 'the price assumes FY24 margins outright'.</a:t>
+              <a:t>A reverse DCF starts from today's price and asks what long-run margin the market must assume. WACC is the yearly return investors demand; a higher WACC needs a higher margin. We show 8%, 9% and 10% because 9% and 10% both come from standard equity risk premium choices (Damodaran and Kroll). This is not a price target and no model is built yet. Base rates: the Base Rate Book (Mauboussin and Callahan, 2016, printed p. 62) gives five-year operating margin persistence of 0.73 for consumer discretionary, which from 8.3% (FY26) implies about 9.0% to 9.4% by FY31; a skeptic check on a 73-company SEC panel found firms two or more points below their own 10-year mean regained 3.3 points 16% to 24% of the time, with brand leaders no better (1 of 11). The bull analog is adidas (6% to 11.3%, 2014 to 2019). At an 8% WACC, 9.4% is worth about $32.50, so the short needs a WACC of 9% or more. The 10-year average of 11.8% is our arithmetic on reported margins. Scoreboard caution: this supports 'FY28 and beyond is priced for a rebound', not 'the price assumes FY24 margins outright'.</a:t>
             </a:r>
             <a:endParaRPr lang="en-US" dirty="0"/>
           </a:p>
@@ -7779,7 +7779,7 @@
                           <a:ea typeface="Arial" pitchFamily="34" charset="-122"/>
                           <a:cs typeface="Arial" pitchFamily="34" charset="-120"/>
                         </a:rPr>
-                        <a:t>Real volume, but Pegasus 42 is marked down and growth lags ASICS and adidas; offsets lifestyle, not the FY28 gap</a:t>
+                        <a:t>Not visible in what runners wear: Hakone Ekiden Nike share 95.7% (2021) to 16.7% (2026); Running USA 2026 favorite racing shoe -4.2 pts. Growth may be distribution and lifestyle, not runners</a:t>
                       </a:r>
                       <a:endParaRPr lang="en-US" sz="1200" dirty="0">
                         <a:latin typeface="Arial" charset="0"/>
@@ -8562,7 +8562,7 @@
                 <a:ea typeface="Arial" pitchFamily="34" charset="-122"/>
                 <a:cs typeface="Arial" pitchFamily="34" charset="-120"/>
               </a:rPr>
-              <a:t>Sources: Dick's/Foot Locker review feed (Jun to Jul 2026); tariff gap sizing (USTR Section 301 notice, Jul 2026; Nike 10-Q); FINRA (Sep 30, 2026), Ortex, Interactive Brokers borrow data; SEC Form 4 and 13F data; guidance record (G9); USPTO trademark search (G7).</a:t>
+              <a:t>Sources: Dick's/Foot Locker review feed (Jun to Jul 2026); Alpen Group Hakone counts and Running USA Global Runner Survey (Oct 14, 2026) (N7); tariff gap sizing (USTR Section 301 notice, Jul 2026; Nike 10-Q); FINRA (Sep 30, 2026), Ortex, Interactive Brokers borrow data; SEC Form 4 and 13F data; guidance record (G9); USPTO trademark search (G7).</a:t>
             </a:r>
             <a:endParaRPr lang="en-US" sz="1000" dirty="0"/>
           </a:p>
@@ -12084,7 +12084,7 @@
                 <a:ea typeface="Arial" pitchFamily="34" charset="-122"/>
                 <a:cs typeface="Arial" pitchFamily="34" charset="-120"/>
               </a:rPr>
-              <a:t>A reverse DCF at a 9% to 10% required return needs a long-run operating margin of 11% to 14%; peer parity on P/E needs about 11.6%. Consensus has 7.2% in FY28; FY26 was 8.3% (6.2% without the tariff refund). On sales and EBITDA Nike already trades at the peer median, so the premium is only a margin bet.</a:t>
+              <a:t>A reverse DCF at a 9% to 10% required return needs a long-run operating margin of about 11% to 14%. Base rates (Mauboussin, Base Rate Book) put the expected FY31 margin near 9%; in a 73-company SEC panel, firms this far below their own average regained 3.3 points about one time in five. At 9.4% the same DCF gives $24 to $28. On sales and EBITDA Nike already trades at the peer median, so the premium is only a margin bet.</a:t>
             </a:r>
             <a:endParaRPr lang="en-US" sz="1300" dirty="0"/>
           </a:p>
@@ -12152,7 +12152,7 @@
                 <a:ea typeface="Arial" pitchFamily="34" charset="-122"/>
                 <a:cs typeface="Arial" pitchFamily="34" charset="-120"/>
               </a:rPr>
-              <a:t>Nike's two largest China partners closed 26% of doors in three years; Nike trails the European peer median by 14 to 18 points for eight quarters; nike.com visits fell 11% in August while adidas.com rose 12.5% and DICK'S rose 15%, so the digital decline is lost demand, not only a deliberate cut.</a:t>
+              <a:t>Nike fell from #1 to #3 on Tmall sports rankings (11.11 2025 and 618 2026, behind adidas and FILA); its two largest China partners closed 26% of doors; Nike trails the European peer median by 14 to 18 points for eight quarters; nike.com visits fell 11% in August while adidas.com rose 12.5% and DICK'S rose 15%, so the digital decline is lost demand, not only a deliberate cut.</a:t>
             </a:r>
             <a:endParaRPr lang="en-US" sz="1300" dirty="0"/>
           </a:p>
@@ -16783,7 +16783,7 @@
                 <a:ea typeface="Arial" pitchFamily="34" charset="-122"/>
                 <a:cs typeface="Arial" pitchFamily="34" charset="-120"/>
               </a:rPr>
-              <a:t>At $35.35 and 3% sales growth, a buyer earns about 9.0% a year only if margins settle at the 10-year average; at today's 8.3% it is about 7.2%.</a:t>
+              <a:t>Base rates put the expected FY31 margin near 9%, and companies this far below their own average regain 3.3 points about one time in five. At 9.4% the DCF gives $24 to $28.</a:t>
             </a:r>
             <a:endParaRPr lang="en-US" sz="1300" dirty="0"/>
           </a:p>
@@ -16822,7 +16822,7 @@
                 <a:ea typeface="Arial" pitchFamily="34" charset="-122"/>
                 <a:cs typeface="Arial" pitchFamily="34" charset="-120"/>
               </a:rPr>
-              <a:t>Sources: reverse DCF grid (22.5% tax, 3% revenue CAGR FY28 to FY36; range across growth assumptions), replicated cell by cell in repo; Nike FY24 and FY26 10-Ks; consensus (Oct 13, 2026). 10-year average is team arithmetic. Not a price target.</a:t>
+              <a:t>Sources: reverse DCF grid (22.5% tax, 3% revenue CAGR FY28 to FY36; range across growth assumptions), replicated cell by cell in repo; Nike FY24 and FY26 10-Ks; consensus (Oct 13, 2026); Base Rate Book (2016) p. 62 and SEC panel (research_notes/Niche sources/N8 and N8_check). Not a price target.</a:t>
             </a:r>
             <a:endParaRPr lang="en-US" sz="1000" dirty="0"/>
           </a:p>
@@ -18135,7 +18135,7 @@
                 <a:ea typeface="Arial" pitchFamily="34" charset="-122"/>
                 <a:cs typeface="Arial" pitchFamily="34" charset="-120"/>
               </a:rPr>
-              <a:t>65% to 50%</a:t>
+              <a:t>#1 to #3</a:t>
             </a:r>
             <a:endParaRPr lang="en-US" sz="2800" dirty="0"/>
           </a:p>
@@ -18174,7 +18174,7 @@
                 <a:ea typeface="Arial" pitchFamily="34" charset="-122"/>
                 <a:cs typeface="Arial" pitchFamily="34" charset="-120"/>
               </a:rPr>
-              <a:t>Nike's share of a 14-company China peer set, 2022 to H1 2026.</a:t>
+              <a:t>Nike's rank on Tmall sports lists: first every festival 2019 to 11.11 2024, third at 11.11 2025 and 618 2026, behind adidas and FILA.</a:t>
             </a:r>
             <a:endParaRPr lang="en-US" sz="1200" dirty="0"/>
           </a:p>
@@ -18291,7 +18291,7 @@
                 <a:ea typeface="Arial" pitchFamily="34" charset="-122"/>
                 <a:cs typeface="Arial" pitchFamily="34" charset="-120"/>
               </a:rPr>
-              <a:t>Sources: HKEX annual and interim reports (Topsports 6110, Pou Sheng 3813, ANTA, Li-Ning, Xtep, 361 Degrees) through Jun 2026; Nike Q1 FY27 10-Q; FY24 and FY26 10-Ks. No source counts Nike-only doors; partners also sell adidas. Topsports reports Aug 2026 doors on Oct 28.</a:t>
+              <a:t>Sources: Tmall festival rankings and Guosen Securities platform data (research_notes/Niche sources/N5); HKEX annual and interim reports (Topsports 6110, Pou Sheng 3813, ANTA, Li-Ning, Xtep, 361 Degrees) through Jun 2026; Nike Q1 FY27 10-Q; FY24 and FY26 10-Ks. No source counts Nike-only doors; partners also sell adidas. Topsports reports Aug 2026 doors on Oct 28.</a:t>
             </a:r>
             <a:endParaRPr lang="en-US" sz="1000" dirty="0"/>
           </a:p>

--- a/slides/pptx/Nike Short Thesis.pptx
+++ b/slides/pptx/Nike Short Thesis.pptx
@@ -121,14 +121,14 @@
   <p:extLst>
     <p:ext uri="{521415D9-36F7-43E2-AB2F-B90AF26B5E84}">
       <p14:sectionLst xmlns:p14="http://schemas.microsoft.com/office/powerpoint/2010/main">
-        <p14:section name="Recommendation" id="{5ea5188c-fd3e-f2c7-83ca-1e83dfe0b5c6}">
+        <p14:section name="Recommendation" id="{d10599f1-4e84-1711-85cc-c2287a193e85}">
           <p14:sldIdLst>
             <p14:sldId id="256"/>
             <p14:sldId id="257"/>
             <p14:sldId id="258"/>
           </p14:sldIdLst>
         </p14:section>
-        <p14:section name="Fundamentals and valuation" id="{bc454f24-cad7-9849-de93-04ca5aadffae}">
+        <p14:section name="Fundamentals and valuation" id="{d928c699-5b7d-c853-2785-772d950fda2f}">
           <p14:sldIdLst>
             <p14:sldId id="259"/>
             <p14:sldId id="260"/>
@@ -136,7 +136,7 @@
             <p14:sldId id="262"/>
           </p14:sldIdLst>
         </p14:section>
-        <p14:section name="Evidence" id="{970cf4a0-a17c-5b1f-1e95-bcacc007eb3b}">
+        <p14:section name="Evidence" id="{f212fbca-2466-1276-df01-f7a8b7bbd41b}">
           <p14:sldIdLst>
             <p14:sldId id="263"/>
             <p14:sldId id="264"/>
@@ -144,13 +144,13 @@
             <p14:sldId id="266"/>
           </p14:sldIdLst>
         </p14:section>
-        <p14:section name="Risks and catalysts" id="{ec7c108e-5344-2cc9-b661-8c87e1656f3c}">
+        <p14:section name="Risks and catalysts" id="{b642981a-00e0-9e4a-4c01-b49b05148c48}">
           <p14:sldIdLst>
             <p14:sldId id="267"/>
             <p14:sldId id="268"/>
           </p14:sldIdLst>
         </p14:section>
-        <p14:section name="Appendix" id="{8b215c64-60e0-54c1-326c-67d59642cb0a}">
+        <p14:section name="Appendix" id="{5ee75705-db09-d794-cdba-e9c84a0025c7}">
           <p14:sldIdLst>
             <p14:sldId id="269"/>
             <p14:sldId id="270"/>
@@ -3787,7 +3787,7 @@
           <a:p>
             <a:r>
               <a:rPr lang="en-US" dirty="0"/>
-              <a:t>Decision rules written in advance. Investor Day: a dated long-term operating margin target of 13% or more with an interim bridge would falsify the margin argument; an undated target or one below about 12% supports it. Feng Tay October revenue is published on Taiwan's MOPS around the 10th of each month; thresholds are on a two-year US-dollar basis. Q2 FY27 results arrive around Dec 17, after finals. The dividend is usually declared between Nov 14 and 20; a freeze or token raise is the likely outcome and a mild positive; a large raise would work against us.</a:t>
+              <a:t>Decision rules written in advance. CFO Denton record (Wave 3 W2): across Lowe's, CVS and Pfizer, 0 of 7 targets were above consensus and 10 of 12 guides were met; in-line guides rallied about 5% the next day, but 7 of 8 came with buybacks or dividend raises, which Nike has paused. Supplier read (W3): Feng Tay says Nike momentum is flat and 2027 orders are still being negotiated. Investor Day: a dated long-term operating margin target of 13% or more with an interim bridge would falsify the margin argument; an undated target or one below about 12% supports it. Feng Tay October revenue is published on Taiwan's MOPS around the 10th of each month; thresholds are on a two-year US-dollar basis. Q2 FY27 results arrive around Dec 17, after finals. The dividend is usually declared between Nov 14 and 20; a freeze or token raise is the likely outcome and a mild positive; a large raise would work against us.</a:t>
             </a:r>
             <a:endParaRPr lang="en-US" dirty="0"/>
           </a:p>
@@ -8906,7 +8906,7 @@
                           <a:ea typeface="Arial" pitchFamily="34" charset="-122"/>
                           <a:cs typeface="Arial" pitchFamily="34" charset="-120"/>
                         </a:rPr>
-                        <a:t>Oct 28</a:t>
+                        <a:t>Oct 21 to 28</a:t>
                       </a:r>
                       <a:endParaRPr lang="en-US" sz="1200" dirty="0">
                         <a:latin typeface="Arial" charset="0"/>
@@ -8953,7 +8953,7 @@
                           <a:ea typeface="Arial" pitchFamily="34" charset="-122"/>
                           <a:cs typeface="Arial" pitchFamily="34" charset="-120"/>
                         </a:rPr>
-                        <a:t>Topsports interim results</a:t>
+                        <a:t>Topsports quarterly update and interim results</a:t>
                       </a:r>
                       <a:endParaRPr lang="en-US" sz="1200" dirty="0">
                         <a:latin typeface="Arial" charset="0"/>
@@ -9000,7 +9000,7 @@
                           <a:ea typeface="Arial" pitchFamily="34" charset="-122"/>
                           <a:cs typeface="Arial" pitchFamily="34" charset="-120"/>
                         </a:rPr>
-                        <a:t>Door decline continues; China wholesale weak</a:t>
+                        <a:t>Jun to Aug sales low-teens down or worse; our China Q2 nowcast is -19% to -32%</a:t>
                       </a:r>
                       <a:endParaRPr lang="en-US" sz="1200" dirty="0">
                         <a:latin typeface="Arial" charset="0"/>
@@ -9047,7 +9047,7 @@
                           <a:ea typeface="Arial" pitchFamily="34" charset="-122"/>
                           <a:cs typeface="Arial" pitchFamily="34" charset="-120"/>
                         </a:rPr>
-                        <a:t>Doors stabilize</a:t>
+                        <a:t>Mid-single-digit decline or better</a:t>
                       </a:r>
                       <a:endParaRPr lang="en-US" sz="1200" dirty="0">
                         <a:latin typeface="Arial" charset="0"/>
@@ -9570,7 +9570,7 @@
                           <a:ea typeface="Arial" pitchFamily="34" charset="-122"/>
                           <a:cs typeface="Arial" pitchFamily="34" charset="-120"/>
                         </a:rPr>
-                        <a:t>FY28 EPS framed below about $1.50, or revenue below flat</a:t>
+                        <a:t>No dated margin target, or one below about 12%; the CFO set 0 of 7 targets above consensus at Lowe's, CVS and Pfizer</a:t>
                       </a:r>
                       <a:endParaRPr lang="en-US" sz="1200" dirty="0">
                         <a:latin typeface="Arial" charset="0"/>
@@ -9617,7 +9617,7 @@
                           <a:ea typeface="Arial" pitchFamily="34" charset="-122"/>
                           <a:cs typeface="Arial" pitchFamily="34" charset="-120"/>
                         </a:rPr>
-                        <a:t>FY28 held, plus FY29 margin target above about 9%</a:t>
+                        <a:t>Dated EBIT margin target of 13% or more with a bridge</a:t>
                       </a:r>
                       <a:endParaRPr lang="en-US" sz="1200" dirty="0">
                         <a:latin typeface="Arial" charset="0"/>
